--- a/slide/pratica/15/Aula15 - Matematica em Estrutura de Dados e Algoritmos.pptx
+++ b/slide/pratica/15/Aula15 - Matematica em Estrutura de Dados e Algoritmos.pptx
@@ -4,6 +4,9 @@
   <p:sldMasterIdLst>
     <p:sldMasterId id="2147483648" r:id="rId1"/>
   </p:sldMasterIdLst>
+  <p:notesMasterIdLst>
+    <p:notesMasterId r:id="rId22"/>
+  </p:notesMasterIdLst>
   <p:sldIdLst>
     <p:sldId id="256" r:id="rId2"/>
     <p:sldId id="257" r:id="rId3"/>
@@ -26,9 +29,6 @@
     <p:sldId id="274" r:id="rId20"/>
     <p:sldId id="275" r:id="rId21"/>
   </p:sldIdLst>
-  <p:notesMasterIdLst>
-    <p:notesMasterId r:id="rId22"/>
-  </p:notesMasterIdLst>
   <p:sldSz cx="12192000" cy="6858000"/>
   <p:notesSz cx="6858000" cy="12192000"/>
   <p:defaultTextStyle>
@@ -123,6 +123,11 @@
       </a:defRPr>
     </a:lvl9pPr>
   </p:defaultTextStyle>
+  <p:extLst>
+    <p:ext uri="{EFAFB233-063F-42B5-8137-9DF3F51BA10A}">
+      <p15:sldGuideLst xmlns:p15="http://schemas.microsoft.com/office/powerpoint/2012/main"/>
+    </p:ext>
+  </p:extLst>
 </p:presentation>
 </file>
 
@@ -148,234 +153,10 @@
           <a:chExt cx="0" cy="0"/>
         </a:xfrm>
       </p:grpSpPr>
-      <p:sp>
-        <p:nvSpPr>
-          <p:cNvPr id="2" name="Header Placeholder 1"/>
-          <p:cNvSpPr>
-            <a:spLocks noGrp="1"/>
-          </p:cNvSpPr>
-          <p:nvPr>
-            <p:ph type="hdr" sz="quarter"/>
-          </p:nvPr>
-        </p:nvSpPr>
-        <p:spPr>
-          <a:xfrm>
-            <a:off x="0" y="0"/>
-            <a:ext cx="2971800" cy="458788"/>
-          </a:xfrm>
-          <a:prstGeom prst="rect">
-            <a:avLst/>
-          </a:prstGeom>
-        </p:spPr>
-        <p:txBody>
-          <a:bodyPr vert="horz" lIns="91440" tIns="45720" rIns="91440" bIns="45720" rtlCol="0"/>
-          <a:lstStyle>
-            <a:lvl1pPr algn="l">
-              <a:defRPr sz="1200"/>
-            </a:lvl1pPr>
-          </a:lstStyle>
-          <a:p>
-            <a:endParaRPr lang="en-US"/>
-          </a:p>
-        </p:txBody>
-      </p:sp>
-      <p:sp>
-        <p:nvSpPr>
-          <p:cNvPr id="3" name="Date Placeholder 2"/>
-          <p:cNvSpPr>
-            <a:spLocks noGrp="1"/>
-          </p:cNvSpPr>
-          <p:nvPr>
-            <p:ph type="dt" idx="1"/>
-          </p:nvPr>
-        </p:nvSpPr>
-        <p:spPr>
-          <a:xfrm>
-            <a:off x="3884613" y="0"/>
-            <a:ext cx="2971800" cy="458788"/>
-          </a:xfrm>
-          <a:prstGeom prst="rect">
-            <a:avLst/>
-          </a:prstGeom>
-        </p:spPr>
-        <p:txBody>
-          <a:bodyPr vert="horz" lIns="91440" tIns="45720" rIns="91440" bIns="45720" rtlCol="0"/>
-          <a:lstStyle>
-            <a:lvl1pPr algn="r">
-              <a:defRPr sz="1200"/>
-            </a:lvl1pPr>
-          </a:lstStyle>
-          <a:p>
-            <a:fld id="{5282F153-3F37-0F45-9E97-73ACFA13230C}" type="datetimeFigureOut">
-              <a:rPr lang="en-US"/>
-              <a:t>7/23/19</a:t>
-            </a:fld>
-            <a:endParaRPr lang="en-US"/>
-          </a:p>
-        </p:txBody>
-      </p:sp>
-      <p:sp>
-        <p:nvSpPr>
-          <p:cNvPr id="4" name="Slide Image Placeholder 3"/>
-          <p:cNvSpPr>
-            <a:spLocks noGrp="1" noRot="1" noChangeAspect="1"/>
-          </p:cNvSpPr>
-          <p:nvPr>
-            <p:ph type="sldImg" idx="2"/>
-          </p:nvPr>
-        </p:nvSpPr>
-        <p:spPr>
-          <a:xfrm>
-            <a:off x="685800" y="1143000"/>
-            <a:ext cx="5486400" cy="3086100"/>
-          </a:xfrm>
-          <a:prstGeom prst="rect">
-            <a:avLst/>
-          </a:prstGeom>
-          <a:noFill/>
-          <a:ln w="12700">
-            <a:solidFill>
-              <a:prstClr val="black"/>
-            </a:solidFill>
-          </a:ln>
-        </p:spPr>
-        <p:txBody>
-          <a:bodyPr vert="horz" lIns="91440" tIns="45720" rIns="91440" bIns="45720" rtlCol="0" anchor="ctr"/>
-          <a:lstStyle/>
-          <a:p>
-            <a:endParaRPr lang="en-US"/>
-          </a:p>
-        </p:txBody>
-      </p:sp>
-      <p:sp>
-        <p:nvSpPr>
-          <p:cNvPr id="5" name="Notes Placeholder 4"/>
-          <p:cNvSpPr>
-            <a:spLocks noGrp="1"/>
-          </p:cNvSpPr>
-          <p:nvPr>
-            <p:ph type="body" sz="quarter" idx="3"/>
-          </p:nvPr>
-        </p:nvSpPr>
-        <p:spPr>
-          <a:xfrm>
-            <a:off x="685800" y="4400550"/>
-            <a:ext cx="5486400" cy="3600450"/>
-          </a:xfrm>
-          <a:prstGeom prst="rect">
-            <a:avLst/>
-          </a:prstGeom>
-        </p:spPr>
-        <p:txBody>
-          <a:bodyPr vert="horz" lIns="91440" tIns="45720" rIns="91440" bIns="45720" rtlCol="0"/>
-          <a:lstStyle/>
-          <a:p>
-            <a:pPr lvl="0"/>
-            <a:r>
-              <a:rPr lang="en-US"/>
-              <a:t>Click to edit Master text styles</a:t>
-            </a:r>
-          </a:p>
-          <a:p>
-            <a:pPr lvl="1"/>
-            <a:r>
-              <a:rPr lang="en-US"/>
-              <a:t>Second level</a:t>
-            </a:r>
-          </a:p>
-          <a:p>
-            <a:pPr lvl="2"/>
-            <a:r>
-              <a:rPr lang="en-US"/>
-              <a:t>Third level</a:t>
-            </a:r>
-          </a:p>
-          <a:p>
-            <a:pPr lvl="3"/>
-            <a:r>
-              <a:rPr lang="en-US"/>
-              <a:t>Fourth level</a:t>
-            </a:r>
-          </a:p>
-          <a:p>
-            <a:pPr lvl="4"/>
-            <a:r>
-              <a:rPr lang="en-US"/>
-              <a:t>Fifth level</a:t>
-            </a:r>
-          </a:p>
-        </p:txBody>
-      </p:sp>
-      <p:sp>
-        <p:nvSpPr>
-          <p:cNvPr id="6" name="Footer Placeholder 5"/>
-          <p:cNvSpPr>
-            <a:spLocks noGrp="1"/>
-          </p:cNvSpPr>
-          <p:nvPr>
-            <p:ph type="ftr" sz="quarter" idx="4"/>
-          </p:nvPr>
-        </p:nvSpPr>
-        <p:spPr>
-          <a:xfrm>
-            <a:off x="0" y="8685213"/>
-            <a:ext cx="2971800" cy="458787"/>
-          </a:xfrm>
-          <a:prstGeom prst="rect">
-            <a:avLst/>
-          </a:prstGeom>
-        </p:spPr>
-        <p:txBody>
-          <a:bodyPr vert="horz" lIns="91440" tIns="45720" rIns="91440" bIns="45720" rtlCol="0" anchor="b"/>
-          <a:lstStyle>
-            <a:lvl1pPr algn="l">
-              <a:defRPr sz="1200"/>
-            </a:lvl1pPr>
-          </a:lstStyle>
-          <a:p>
-            <a:endParaRPr lang="en-US"/>
-          </a:p>
-        </p:txBody>
-      </p:sp>
-      <p:sp>
-        <p:nvSpPr>
-          <p:cNvPr id="7" name="Slide Number Placeholder 6"/>
-          <p:cNvSpPr>
-            <a:spLocks noGrp="1"/>
-          </p:cNvSpPr>
-          <p:nvPr>
-            <p:ph type="sldNum" sz="quarter" idx="5"/>
-          </p:nvPr>
-        </p:nvSpPr>
-        <p:spPr>
-          <a:xfrm>
-            <a:off x="3884613" y="8685213"/>
-            <a:ext cx="2971800" cy="458787"/>
-          </a:xfrm>
-          <a:prstGeom prst="rect">
-            <a:avLst/>
-          </a:prstGeom>
-        </p:spPr>
-        <p:txBody>
-          <a:bodyPr vert="horz" lIns="91440" tIns="45720" rIns="91440" bIns="45720" rtlCol="0" anchor="b"/>
-          <a:lstStyle>
-            <a:lvl1pPr algn="r">
-              <a:defRPr sz="1200"/>
-            </a:lvl1pPr>
-          </a:lstStyle>
-          <a:p>
-            <a:fld id="{CE5E9CC1-C706-0F49-92D6-E571CC5EEA8F}" type="slidenum">
-              <a:rPr lang="en-US"/>
-              <a:t>‹#›</a:t>
-            </a:fld>
-            <a:endParaRPr lang="en-US"/>
-          </a:p>
-        </p:txBody>
-      </p:sp>
     </p:spTree>
     <p:extLst>
       <p:ext uri="{BB962C8B-B14F-4D97-AF65-F5344CB8AC3E}">
-        <p14:creationId xmlns:p14="http://schemas.microsoft.com/office/powerpoint/2010/main" val="1024086991"/>
+        <p14:creationId xmlns:p14="http://schemas.microsoft.com/office/powerpoint/2010/main" val="1027425065"/>
       </p:ext>
     </p:extLst>
   </p:cSld>
@@ -523,7 +304,6 @@
               <a:rPr lang="en-US" dirty="0"/>
               <a:t>Última aula da disciplina — tom de síntese e fechamento, não de introdução de conteúdo novo isolado.</a:t>
             </a:r>
-            <a:endParaRPr lang="en-US" dirty="0"/>
           </a:p>
         </p:txBody>
       </p:sp>
@@ -611,7 +391,6 @@
               <a:rPr lang="en-US" dirty="0"/>
               <a:t>BFS/DFS aparecem aqui como O(V+E), que na prática se comporta como O(n) quando o grafo é esparso — bom gancho para o slide de BFS/DFS mais adiante.</a:t>
             </a:r>
-            <a:endParaRPr lang="en-US" dirty="0"/>
           </a:p>
         </p:txBody>
       </p:sp>
@@ -699,7 +478,6 @@
               <a:rPr lang="en-US" dirty="0"/>
               <a:t>Vale mencionar de passagem: é exatamente esse tipo de crescimento que torna certos algoritmos inviáveis em produção mesmo estando 'corretos'.</a:t>
             </a:r>
-            <a:endParaRPr lang="en-US" dirty="0"/>
           </a:p>
         </p:txBody>
       </p:sp>
@@ -787,7 +565,6 @@
               <a:rPr lang="en-US" dirty="0"/>
               <a:t>Erro comum de aluno iniciante: confundir 'O(n) é sempre mais rápido que O(n²)' com a ideia real, que é sobre a TAXA de crescimento, não valores absolutos para um n pequeno.</a:t>
             </a:r>
-            <a:endParaRPr lang="en-US" dirty="0"/>
           </a:p>
         </p:txBody>
       </p:sp>
@@ -875,7 +652,6 @@
               <a:rPr lang="en-US" dirty="0"/>
               <a:t>BFS/DFS não são conceitos novos — é o eh_conexo da Aula 12 e a travessia recursiva da Aula 14, só que formalizados com nome próprio.</a:t>
             </a:r>
-            <a:endParaRPr lang="en-US" dirty="0"/>
           </a:p>
         </p:txBody>
       </p:sp>
@@ -963,7 +739,6 @@
               <a:rPr lang="en-US" dirty="0"/>
               <a:t>EhConexo da Aula 12 já era um BFS/DFS disfarçado (usava Stack) — vale apontar essa conexão explicitamente para o aluno.</a:t>
             </a:r>
-            <a:endParaRPr lang="en-US" dirty="0"/>
           </a:p>
         </p:txBody>
       </p:sp>
@@ -1051,7 +826,6 @@
               <a:rPr lang="en-US" dirty="0"/>
               <a:t>DFS fica como exercício mental: é o mesmo código trocando deque/Queue por uma pilha (list.pop() sem argumento, ou Stack&lt;T&gt; em C#).</a:t>
             </a:r>
-            <a:endParaRPr lang="en-US" dirty="0"/>
           </a:p>
         </p:txBody>
       </p:sp>
@@ -1139,7 +913,6 @@
               <a:rPr lang="en-US" dirty="0"/>
               <a:t>Boa hora para relembrar que 'invariante de laço' já apareceu implicitamente em EhConexo (Aula 12): o HashSet de visitados nunca encolhe.</a:t>
             </a:r>
-            <a:endParaRPr lang="en-US" dirty="0"/>
           </a:p>
         </p:txBody>
       </p:sp>
@@ -1227,7 +1000,6 @@
               <a:rPr lang="en-US" dirty="0"/>
               <a:t>Sem entrega formal — o objetivo é o aluno perceber sozinho que já usa esses conceitos fora da disciplina, sem que a resposta seja corrigida.</a:t>
             </a:r>
-            <a:endParaRPr lang="en-US" dirty="0"/>
           </a:p>
         </p:txBody>
       </p:sp>
@@ -1315,7 +1087,6 @@
               <a:rPr lang="en-US" dirty="0"/>
               <a:t>CLRS é a referência canônica de complexidade — vale indicar como o próximo passo natural de leitura para quem quiser se aprofundar antes da próxima disciplina.</a:t>
             </a:r>
-            <a:endParaRPr lang="en-US" dirty="0"/>
           </a:p>
         </p:txBody>
       </p:sp>
@@ -1403,7 +1174,6 @@
               <a:rPr lang="en-US" dirty="0"/>
               <a:t>Links de busca do YouTube — resultados variam com o tempo, então vale conferir antes de indicar em aula.</a:t>
             </a:r>
-            <a:endParaRPr lang="en-US" dirty="0"/>
           </a:p>
         </p:txBody>
       </p:sp>
@@ -1491,7 +1261,6 @@
               <a:rPr lang="en-US" dirty="0"/>
               <a:t>Deixar claro desde já: esta aula não traz teoria nova isolada, é uma costura do que já foi visto.</a:t>
             </a:r>
-            <a:endParaRPr lang="en-US" dirty="0"/>
           </a:p>
         </p:txBody>
       </p:sp>
@@ -1579,7 +1348,6 @@
               <a:rPr lang="en-US" dirty="0"/>
               <a:t>Slide de encerramento do semestre inteiro, não só da aula — a timeline mostra as aulas efetivamente construídas nesta série, pulando os gaps conhecidos (08, 10, 11, 13).</a:t>
             </a:r>
-            <a:endParaRPr lang="en-US" dirty="0"/>
           </a:p>
         </p:txBody>
       </p:sp>
@@ -1667,7 +1435,6 @@
               <a:rPr lang="en-US" dirty="0"/>
               <a:t>Vale destacar que Circuitos digitais (Aula 09) não vira uma estrutura de dados, e sim uma explicação de POR QUE o computador executa o resto — é o elo diferente da tabela.</a:t>
             </a:r>
-            <a:endParaRPr lang="en-US" dirty="0"/>
           </a:p>
         </p:txBody>
       </p:sp>
@@ -1755,7 +1522,6 @@
               <a:rPr lang="en-US" dirty="0"/>
               <a:t>Todo aluno já usou lista/pilha/fila sem perceber que são grafos triviais — o ganho de destacar isso é mostrar que o vocabulário da Aula 12 se aplica em toda parte.</a:t>
             </a:r>
-            <a:endParaRPr lang="en-US" dirty="0"/>
           </a:p>
         </p:txBody>
       </p:sp>
@@ -1843,7 +1609,6 @@
               <a:rPr lang="en-US" dirty="0"/>
               <a:t>O mesmo diagrama do material fonte (mermaid), só que desenhado como fluxo de caixas em vez de sintaxe de código.</a:t>
             </a:r>
-            <a:endParaRPr lang="en-US" dirty="0"/>
           </a:p>
         </p:txBody>
       </p:sp>
@@ -1931,7 +1696,6 @@
               <a:rPr lang="en-US" dirty="0"/>
               <a:t>Deixar claro: notação O não é sobre um caso específico, é sobre a taxa de crescimento — isso volta com força no slide de tip mais adiante.</a:t>
             </a:r>
-            <a:endParaRPr lang="en-US" dirty="0"/>
           </a:p>
         </p:txBody>
       </p:sp>
@@ -2019,7 +1783,6 @@
               <a:rPr lang="en-US" dirty="0"/>
               <a:t>A referência ao mapa de Karnaugh (Aula 07) é proposital — é a mesma ideia de eliminar metade do espaço de busca a cada passo.</a:t>
             </a:r>
-            <a:endParaRPr lang="en-US" dirty="0"/>
           </a:p>
         </p:txBody>
       </p:sp>
@@ -2107,7 +1870,6 @@
               <a:rPr lang="en-US" dirty="0"/>
               <a:t>Repare que BuscaBst é uma recursão quase idêntica à em_ordem da Aula 14 — só muda a condição de qual filho seguir.</a:t>
             </a:r>
-            <a:endParaRPr lang="en-US" dirty="0"/>
           </a:p>
         </p:txBody>
       </p:sp>
@@ -2195,7 +1957,6 @@
               <a:rPr lang="en-US" dirty="0"/>
               <a:t>Esse contraste numérico costuma ser o momento em que a ficha cai sobre por que complexidade importa na prática, não só na teoria.</a:t>
             </a:r>
-            <a:endParaRPr lang="en-US" dirty="0"/>
           </a:p>
         </p:txBody>
       </p:sp>
@@ -2268,6 +2029,11 @@
 <file path=ppt/slideMasters/slideMaster1.xml><?xml version="1.0" encoding="utf-8"?>
 <p:sldMaster xmlns:a="http://schemas.openxmlformats.org/drawingml/2006/main" xmlns:r="http://schemas.openxmlformats.org/officeDocument/2006/relationships" xmlns:p="http://schemas.openxmlformats.org/presentationml/2006/main">
   <p:cSld>
+    <p:bg>
+      <p:bgRef idx="1001">
+        <a:schemeClr val="bg1"/>
+      </p:bgRef>
+    </p:bg>
     <p:spTree>
       <p:nvGrpSpPr>
         <p:cNvPr id="1" name=""/>
@@ -2550,6 +2316,7 @@
         <a:solidFill>
           <a:srgbClr val="141B41"/>
         </a:solidFill>
+        <a:effectLst/>
       </p:bgPr>
     </p:bg>
     <p:spTree>
@@ -2616,14 +2383,14 @@
       </p:sp>
       <p:pic>
         <p:nvPicPr>
-          <p:cNvPr id="4" name="Image 0" descr="preencoded.png">    </p:cNvPr>
+          <p:cNvPr id="4" name="Image 0" descr="preencoded.png"/>
           <p:cNvPicPr>
             <a:picLocks noChangeAspect="1"/>
           </p:cNvPicPr>
           <p:nvPr/>
         </p:nvPicPr>
         <p:blipFill>
-          <a:blip r:embed="rId1">
+          <a:blip r:embed="rId3">
             <a:alphaModFix amt="22000"/>
           </a:blip>
           <a:stretch>
@@ -2661,11 +2428,11 @@
           <a:bodyPr wrap="square" lIns="0" tIns="0" rIns="0" bIns="0" rtlCol="0" anchor="ctr"/>
           <a:lstStyle/>
           <a:p>
-            <a:pPr indent="0" marL="0">
-              <a:buNone/>
-            </a:pPr>
-            <a:r>
-              <a:rPr lang="en-US" sz="1400" b="1" spc="300" kern="0" dirty="0">
+            <a:pPr marL="0" indent="0">
+              <a:buNone/>
+            </a:pPr>
+            <a:r>
+              <a:rPr lang="en-US" sz="1400" b="1" kern="0" spc="300" dirty="0">
                 <a:solidFill>
                   <a:srgbClr val="2FE6C7"/>
                 </a:solidFill>
@@ -2700,7 +2467,7 @@
           <a:bodyPr wrap="square" lIns="0" tIns="0" rIns="0" bIns="0" rtlCol="0" anchor="ctr"/>
           <a:lstStyle/>
           <a:p>
-            <a:pPr indent="0" marL="0">
+            <a:pPr marL="0" indent="0">
               <a:buNone/>
             </a:pPr>
             <a:r>
@@ -2739,7 +2506,7 @@
           <a:bodyPr wrap="square" lIns="0" tIns="0" rIns="0" bIns="0" rtlCol="0" anchor="ctr"/>
           <a:lstStyle/>
           <a:p>
-            <a:pPr indent="0" marL="0">
+            <a:pPr marL="0" indent="0">
               <a:lnSpc>
                 <a:spcPts val="2600"/>
               </a:lnSpc>
@@ -2781,7 +2548,7 @@
           <a:bodyPr wrap="square" lIns="0" tIns="0" rIns="0" bIns="0" rtlCol="0" anchor="ctr"/>
           <a:lstStyle/>
           <a:p>
-            <a:pPr indent="0" marL="0">
+            <a:pPr marL="0" indent="0">
               <a:lnSpc>
                 <a:spcPts val="1800"/>
               </a:lnSpc>
@@ -2823,7 +2590,7 @@
           <a:bodyPr wrap="square" lIns="0" tIns="0" rIns="0" bIns="0" rtlCol="0" anchor="ctr"/>
           <a:lstStyle/>
           <a:p>
-            <a:pPr indent="0" marL="0">
+            <a:pPr marL="0" indent="0">
               <a:buNone/>
             </a:pPr>
             <a:r>
@@ -2857,6 +2624,7 @@
         <a:solidFill>
           <a:srgbClr val="FFFFFF"/>
         </a:solidFill>
+        <a:effectLst/>
       </p:bgPr>
     </p:bg>
     <p:spTree>
@@ -2894,11 +2662,11 @@
           <a:bodyPr wrap="square" lIns="0" tIns="0" rIns="0" bIns="0" rtlCol="0" anchor="ctr"/>
           <a:lstStyle/>
           <a:p>
-            <a:pPr algn="l" indent="0" marL="0">
-              <a:buNone/>
-            </a:pPr>
-            <a:r>
-              <a:rPr lang="en-US" sz="1200" b="1" spc="200" kern="0" dirty="0">
+            <a:pPr marL="0" indent="0" algn="l">
+              <a:buNone/>
+            </a:pPr>
+            <a:r>
+              <a:rPr lang="en-US" sz="1200" b="1" kern="0" spc="200" dirty="0">
                 <a:solidFill>
                   <a:srgbClr val="6C4BC1"/>
                 </a:solidFill>
@@ -2933,7 +2701,7 @@
           <a:bodyPr wrap="square" lIns="0" tIns="0" rIns="0" bIns="0" rtlCol="0" anchor="ctr"/>
           <a:lstStyle/>
           <a:p>
-            <a:pPr indent="0" marL="0">
+            <a:pPr marL="0" indent="0">
               <a:buNone/>
             </a:pPr>
             <a:r>
@@ -2974,9 +2742,27 @@
             <a:tbl>
               <a:tblPr/>
               <a:tblGrid>
-                <a:gridCol w="1737360"/>
-                <a:gridCol w="2011680"/>
-                <a:gridCol w="7132320"/>
+                <a:gridCol w="1737360">
+                  <a:extLst>
+                    <a:ext uri="{9D8B030D-6E8A-4147-A177-3AD203B41FA5}">
+                      <a16:colId xmlns:a16="http://schemas.microsoft.com/office/drawing/2014/main" val="20000"/>
+                    </a:ext>
+                  </a:extLst>
+                </a:gridCol>
+                <a:gridCol w="2011680">
+                  <a:extLst>
+                    <a:ext uri="{9D8B030D-6E8A-4147-A177-3AD203B41FA5}">
+                      <a16:colId xmlns:a16="http://schemas.microsoft.com/office/drawing/2014/main" val="20001"/>
+                    </a:ext>
+                  </a:extLst>
+                </a:gridCol>
+                <a:gridCol w="7132320">
+                  <a:extLst>
+                    <a:ext uri="{9D8B030D-6E8A-4147-A177-3AD203B41FA5}">
+                      <a16:colId xmlns:a16="http://schemas.microsoft.com/office/drawing/2014/main" val="20002"/>
+                    </a:ext>
+                  </a:extLst>
+                </a:gridCol>
               </a:tblGrid>
               <a:tr h="411480">
                 <a:tc>
@@ -2984,7 +2770,7 @@
                     <a:bodyPr/>
                     <a:lstStyle/>
                     <a:p>
-                      <a:pPr indent="0" marL="0">
+                      <a:pPr marL="0" indent="0">
                         <a:buNone/>
                       </a:pPr>
                       <a:r>
@@ -3052,7 +2838,7 @@
                     <a:bodyPr/>
                     <a:lstStyle/>
                     <a:p>
-                      <a:pPr indent="0" marL="0">
+                      <a:pPr marL="0" indent="0">
                         <a:buNone/>
                       </a:pPr>
                       <a:r>
@@ -3120,7 +2906,7 @@
                     <a:bodyPr/>
                     <a:lstStyle/>
                     <a:p>
-                      <a:pPr indent="0" marL="0">
+                      <a:pPr marL="0" indent="0">
                         <a:buNone/>
                       </a:pPr>
                       <a:r>
@@ -3183,6 +2969,11 @@
                     </a:solidFill>
                   </a:tcPr>
                 </a:tc>
+                <a:extLst>
+                  <a:ext uri="{0D108BD9-81ED-4DB2-BD59-A6C34878D82A}">
+                    <a16:rowId xmlns:a16="http://schemas.microsoft.com/office/drawing/2014/main" val="10000"/>
+                  </a:ext>
+                </a:extLst>
               </a:tr>
               <a:tr h="658368">
                 <a:tc>
@@ -3190,7 +2981,7 @@
                     <a:bodyPr/>
                     <a:lstStyle/>
                     <a:p>
-                      <a:pPr indent="0" marL="0">
+                      <a:pPr marL="0" indent="0">
                         <a:buNone/>
                       </a:pPr>
                       <a:r>
@@ -3258,7 +3049,7 @@
                     <a:bodyPr/>
                     <a:lstStyle/>
                     <a:p>
-                      <a:pPr indent="0" marL="0">
+                      <a:pPr marL="0" indent="0">
                         <a:buNone/>
                       </a:pPr>
                       <a:r>
@@ -3326,7 +3117,7 @@
                     <a:bodyPr/>
                     <a:lstStyle/>
                     <a:p>
-                      <a:pPr indent="0" marL="0">
+                      <a:pPr marL="0" indent="0">
                         <a:buNone/>
                       </a:pPr>
                       <a:r>
@@ -3389,6 +3180,11 @@
                     </a:solidFill>
                   </a:tcPr>
                 </a:tc>
+                <a:extLst>
+                  <a:ext uri="{0D108BD9-81ED-4DB2-BD59-A6C34878D82A}">
+                    <a16:rowId xmlns:a16="http://schemas.microsoft.com/office/drawing/2014/main" val="10001"/>
+                  </a:ext>
+                </a:extLst>
               </a:tr>
               <a:tr h="658368">
                 <a:tc>
@@ -3396,7 +3192,7 @@
                     <a:bodyPr/>
                     <a:lstStyle/>
                     <a:p>
-                      <a:pPr indent="0" marL="0">
+                      <a:pPr marL="0" indent="0">
                         <a:buNone/>
                       </a:pPr>
                       <a:r>
@@ -3464,7 +3260,7 @@
                     <a:bodyPr/>
                     <a:lstStyle/>
                     <a:p>
-                      <a:pPr indent="0" marL="0">
+                      <a:pPr marL="0" indent="0">
                         <a:buNone/>
                       </a:pPr>
                       <a:r>
@@ -3532,7 +3328,7 @@
                     <a:bodyPr/>
                     <a:lstStyle/>
                     <a:p>
-                      <a:pPr indent="0" marL="0">
+                      <a:pPr marL="0" indent="0">
                         <a:buNone/>
                       </a:pPr>
                       <a:r>
@@ -3595,6 +3391,11 @@
                     </a:solidFill>
                   </a:tcPr>
                 </a:tc>
+                <a:extLst>
+                  <a:ext uri="{0D108BD9-81ED-4DB2-BD59-A6C34878D82A}">
+                    <a16:rowId xmlns:a16="http://schemas.microsoft.com/office/drawing/2014/main" val="10002"/>
+                  </a:ext>
+                </a:extLst>
               </a:tr>
               <a:tr h="658368">
                 <a:tc>
@@ -3602,7 +3403,7 @@
                     <a:bodyPr/>
                     <a:lstStyle/>
                     <a:p>
-                      <a:pPr indent="0" marL="0">
+                      <a:pPr marL="0" indent="0">
                         <a:buNone/>
                       </a:pPr>
                       <a:r>
@@ -3670,7 +3471,7 @@
                     <a:bodyPr/>
                     <a:lstStyle/>
                     <a:p>
-                      <a:pPr indent="0" marL="0">
+                      <a:pPr marL="0" indent="0">
                         <a:buNone/>
                       </a:pPr>
                       <a:r>
@@ -3738,7 +3539,7 @@
                     <a:bodyPr/>
                     <a:lstStyle/>
                     <a:p>
-                      <a:pPr indent="0" marL="0">
+                      <a:pPr marL="0" indent="0">
                         <a:buNone/>
                       </a:pPr>
                       <a:r>
@@ -3801,6 +3602,11 @@
                     </a:solidFill>
                   </a:tcPr>
                 </a:tc>
+                <a:extLst>
+                  <a:ext uri="{0D108BD9-81ED-4DB2-BD59-A6C34878D82A}">
+                    <a16:rowId xmlns:a16="http://schemas.microsoft.com/office/drawing/2014/main" val="10003"/>
+                  </a:ext>
+                </a:extLst>
               </a:tr>
               <a:tr h="658368">
                 <a:tc>
@@ -3808,7 +3614,7 @@
                     <a:bodyPr/>
                     <a:lstStyle/>
                     <a:p>
-                      <a:pPr indent="0" marL="0">
+                      <a:pPr marL="0" indent="0">
                         <a:buNone/>
                       </a:pPr>
                       <a:r>
@@ -3876,7 +3682,7 @@
                     <a:bodyPr/>
                     <a:lstStyle/>
                     <a:p>
-                      <a:pPr indent="0" marL="0">
+                      <a:pPr marL="0" indent="0">
                         <a:buNone/>
                       </a:pPr>
                       <a:r>
@@ -3944,7 +3750,7 @@
                     <a:bodyPr/>
                     <a:lstStyle/>
                     <a:p>
-                      <a:pPr indent="0" marL="0">
+                      <a:pPr marL="0" indent="0">
                         <a:buNone/>
                       </a:pPr>
                       <a:r>
@@ -4007,6 +3813,11 @@
                     </a:solidFill>
                   </a:tcPr>
                 </a:tc>
+                <a:extLst>
+                  <a:ext uri="{0D108BD9-81ED-4DB2-BD59-A6C34878D82A}">
+                    <a16:rowId xmlns:a16="http://schemas.microsoft.com/office/drawing/2014/main" val="10004"/>
+                  </a:ext>
+                </a:extLst>
               </a:tr>
               <a:tr h="658368">
                 <a:tc>
@@ -4014,7 +3825,7 @@
                     <a:bodyPr/>
                     <a:lstStyle/>
                     <a:p>
-                      <a:pPr indent="0" marL="0">
+                      <a:pPr marL="0" indent="0">
                         <a:buNone/>
                       </a:pPr>
                       <a:r>
@@ -4082,7 +3893,7 @@
                     <a:bodyPr/>
                     <a:lstStyle/>
                     <a:p>
-                      <a:pPr indent="0" marL="0">
+                      <a:pPr marL="0" indent="0">
                         <a:buNone/>
                       </a:pPr>
                       <a:r>
@@ -4150,7 +3961,7 @@
                     <a:bodyPr/>
                     <a:lstStyle/>
                     <a:p>
-                      <a:pPr indent="0" marL="0">
+                      <a:pPr marL="0" indent="0">
                         <a:buNone/>
                       </a:pPr>
                       <a:r>
@@ -4213,6 +4024,11 @@
                     </a:solidFill>
                   </a:tcPr>
                 </a:tc>
+                <a:extLst>
+                  <a:ext uri="{0D108BD9-81ED-4DB2-BD59-A6C34878D82A}">
+                    <a16:rowId xmlns:a16="http://schemas.microsoft.com/office/drawing/2014/main" val="10005"/>
+                  </a:ext>
+                </a:extLst>
               </a:tr>
             </a:tbl>
           </a:graphicData>
@@ -4239,7 +4055,7 @@
           <a:bodyPr wrap="square" lIns="0" tIns="0" rIns="0" bIns="0" rtlCol="0" anchor="ctr"/>
           <a:lstStyle/>
           <a:p>
-            <a:pPr algn="ctr" indent="0" marL="0">
+            <a:pPr marL="0" indent="0" algn="ctr">
               <a:buNone/>
             </a:pPr>
             <a:r>
@@ -4278,7 +4094,7 @@
           <a:bodyPr wrap="square" lIns="0" tIns="0" rIns="0" bIns="0" rtlCol="0" anchor="ctr"/>
           <a:lstStyle/>
           <a:p>
-            <a:pPr algn="r" indent="0" marL="0">
+            <a:pPr marL="0" indent="0" algn="r">
               <a:buNone/>
             </a:pPr>
             <a:r>
@@ -4312,6 +4128,7 @@
         <a:solidFill>
           <a:srgbClr val="141B41"/>
         </a:solidFill>
+        <a:effectLst/>
       </p:bgPr>
     </p:bg>
     <p:spTree>
@@ -4373,11 +4190,11 @@
           <a:bodyPr wrap="square" lIns="0" tIns="0" rIns="0" bIns="0" rtlCol="0" anchor="ctr"/>
           <a:lstStyle/>
           <a:p>
-            <a:pPr algn="l" indent="0" marL="0">
-              <a:buNone/>
-            </a:pPr>
-            <a:r>
-              <a:rPr lang="en-US" sz="1200" b="1" spc="200" kern="0" dirty="0">
+            <a:pPr marL="0" indent="0" algn="l">
+              <a:buNone/>
+            </a:pPr>
+            <a:r>
+              <a:rPr lang="en-US" sz="1200" b="1" kern="0" spc="200" dirty="0">
                 <a:solidFill>
                   <a:srgbClr val="2FE6C7"/>
                 </a:solidFill>
@@ -4413,14 +4230,14 @@
       </p:sp>
       <p:pic>
         <p:nvPicPr>
-          <p:cNvPr id="5" name="Image 0" descr="preencoded.png">    </p:cNvPr>
+          <p:cNvPr id="5" name="Image 0" descr="preencoded.png"/>
           <p:cNvPicPr>
             <a:picLocks noChangeAspect="1"/>
           </p:cNvPicPr>
           <p:nvPr/>
         </p:nvPicPr>
         <p:blipFill>
-          <a:blip r:embed="rId1"/>
+          <a:blip r:embed="rId3"/>
           <a:stretch>
             <a:fillRect/>
           </a:stretch>
@@ -4483,7 +4300,7 @@
           <a:bodyPr wrap="square" lIns="0" tIns="0" rIns="0" bIns="0" rtlCol="0" anchor="ctr"/>
           <a:lstStyle/>
           <a:p>
-            <a:pPr algn="ctr" indent="0" marL="0">
+            <a:pPr marL="0" indent="0" algn="ctr">
               <a:buNone/>
             </a:pPr>
             <a:r>
@@ -4522,7 +4339,7 @@
           <a:bodyPr wrap="square" lIns="0" tIns="0" rIns="0" bIns="0" rtlCol="0" anchor="ctr"/>
           <a:lstStyle/>
           <a:p>
-            <a:pPr algn="ctr" indent="0" marL="0">
+            <a:pPr marL="0" indent="0" algn="ctr">
               <a:lnSpc>
                 <a:spcPts val="2000"/>
               </a:lnSpc>
@@ -4559,6 +4376,7 @@
         <a:solidFill>
           <a:srgbClr val="FFFFFF"/>
         </a:solidFill>
+        <a:effectLst/>
       </p:bgPr>
     </p:bg>
     <p:spTree>
@@ -4596,11 +4414,11 @@
           <a:bodyPr wrap="square" lIns="0" tIns="0" rIns="0" bIns="0" rtlCol="0" anchor="ctr"/>
           <a:lstStyle/>
           <a:p>
-            <a:pPr algn="l" indent="0" marL="0">
-              <a:buNone/>
-            </a:pPr>
-            <a:r>
-              <a:rPr lang="en-US" sz="1200" b="1" spc="200" kern="0" dirty="0">
+            <a:pPr marL="0" indent="0" algn="l">
+              <a:buNone/>
+            </a:pPr>
+            <a:r>
+              <a:rPr lang="en-US" sz="1200" b="1" kern="0" spc="200" dirty="0">
                 <a:solidFill>
                   <a:srgbClr val="6C4BC1"/>
                 </a:solidFill>
@@ -4636,14 +4454,14 @@
       </p:sp>
       <p:pic>
         <p:nvPicPr>
-          <p:cNvPr id="4" name="Image 0" descr="preencoded.png">    </p:cNvPr>
+          <p:cNvPr id="4" name="Image 0" descr="preencoded.png"/>
           <p:cNvPicPr>
             <a:picLocks noChangeAspect="1"/>
           </p:cNvPicPr>
           <p:nvPr/>
         </p:nvPicPr>
         <p:blipFill>
-          <a:blip r:embed="rId1"/>
+          <a:blip r:embed="rId3"/>
           <a:stretch>
             <a:fillRect/>
           </a:stretch>
@@ -4679,7 +4497,7 @@
           <a:bodyPr wrap="square" lIns="0" tIns="0" rIns="0" bIns="0" rtlCol="0" anchor="ctr"/>
           <a:lstStyle/>
           <a:p>
-            <a:pPr indent="0" marL="0">
+            <a:pPr marL="0" indent="0">
               <a:buNone/>
             </a:pPr>
             <a:r>
@@ -4740,7 +4558,7 @@
           <a:bodyPr wrap="square" lIns="0" tIns="0" rIns="0" bIns="0" rtlCol="0" anchor="ctr"/>
           <a:lstStyle/>
           <a:p>
-            <a:pPr algn="ctr" indent="0" marL="0">
+            <a:pPr marL="0" indent="0" algn="ctr">
               <a:lnSpc>
                 <a:spcPts val="2400"/>
               </a:lnSpc>
@@ -4782,7 +4600,7 @@
           <a:bodyPr wrap="square" lIns="0" tIns="0" rIns="0" bIns="0" rtlCol="0" anchor="ctr"/>
           <a:lstStyle/>
           <a:p>
-            <a:pPr algn="ctr" indent="0" marL="0">
+            <a:pPr marL="0" indent="0" algn="ctr">
               <a:lnSpc>
                 <a:spcPts val="1900"/>
               </a:lnSpc>
@@ -4824,7 +4642,7 @@
           <a:bodyPr wrap="square" lIns="0" tIns="0" rIns="0" bIns="0" rtlCol="0" anchor="ctr"/>
           <a:lstStyle/>
           <a:p>
-            <a:pPr algn="r" indent="0" marL="0">
+            <a:pPr marL="0" indent="0" algn="r">
               <a:buNone/>
             </a:pPr>
             <a:r>
@@ -4858,6 +4676,7 @@
         <a:solidFill>
           <a:srgbClr val="6C4BC1"/>
         </a:solidFill>
+        <a:effectLst/>
       </p:bgPr>
     </p:bg>
     <p:spTree>
@@ -4944,14 +4763,14 @@
       </p:sp>
       <p:pic>
         <p:nvPicPr>
-          <p:cNvPr id="5" name="Image 0" descr="preencoded.png">    </p:cNvPr>
+          <p:cNvPr id="5" name="Image 0" descr="preencoded.png"/>
           <p:cNvPicPr>
             <a:picLocks noChangeAspect="1"/>
           </p:cNvPicPr>
           <p:nvPr/>
         </p:nvPicPr>
         <p:blipFill>
-          <a:blip r:embed="rId1"/>
+          <a:blip r:embed="rId3"/>
           <a:stretch>
             <a:fillRect/>
           </a:stretch>
@@ -4987,7 +4806,7 @@
           <a:bodyPr wrap="square" lIns="0" tIns="0" rIns="0" bIns="0" rtlCol="0" anchor="ctr"/>
           <a:lstStyle/>
           <a:p>
-            <a:pPr algn="ctr" indent="0" marL="0">
+            <a:pPr marL="0" indent="0" algn="ctr">
               <a:buNone/>
             </a:pPr>
             <a:r>
@@ -5026,7 +4845,7 @@
           <a:bodyPr wrap="square" lIns="0" tIns="0" rIns="0" bIns="0" rtlCol="0" anchor="ctr"/>
           <a:lstStyle/>
           <a:p>
-            <a:pPr algn="ctr" indent="0" marL="0">
+            <a:pPr marL="0" indent="0" algn="ctr">
               <a:lnSpc>
                 <a:spcPts val="2200"/>
               </a:lnSpc>
@@ -5063,6 +4882,7 @@
         <a:solidFill>
           <a:srgbClr val="FFFFFF"/>
         </a:solidFill>
+        <a:effectLst/>
       </p:bgPr>
     </p:bg>
     <p:spTree>
@@ -5100,11 +4920,11 @@
           <a:bodyPr wrap="square" lIns="0" tIns="0" rIns="0" bIns="0" rtlCol="0" anchor="ctr"/>
           <a:lstStyle/>
           <a:p>
-            <a:pPr algn="l" indent="0" marL="0">
-              <a:buNone/>
-            </a:pPr>
-            <a:r>
-              <a:rPr lang="en-US" sz="1200" b="1" spc="200" kern="0" dirty="0">
+            <a:pPr marL="0" indent="0" algn="l">
+              <a:buNone/>
+            </a:pPr>
+            <a:r>
+              <a:rPr lang="en-US" sz="1200" b="1" kern="0" spc="200" dirty="0">
                 <a:solidFill>
                   <a:srgbClr val="6C4BC1"/>
                 </a:solidFill>
@@ -5139,7 +4959,7 @@
           <a:bodyPr wrap="square" lIns="0" tIns="0" rIns="0" bIns="0" rtlCol="0" anchor="ctr"/>
           <a:lstStyle/>
           <a:p>
-            <a:pPr indent="0" marL="0">
+            <a:pPr marL="0" indent="0">
               <a:buNone/>
             </a:pPr>
             <a:r>
@@ -5178,7 +4998,7 @@
           <a:bodyPr wrap="square" lIns="0" tIns="0" rIns="0" bIns="0" rtlCol="0" anchor="ctr"/>
           <a:lstStyle/>
           <a:p>
-            <a:pPr indent="0" marL="0">
+            <a:pPr marL="0" indent="0">
               <a:lnSpc>
                 <a:spcPts val="1800"/>
               </a:lnSpc>
@@ -5337,7 +5157,7 @@
           <a:bodyPr wrap="square" lIns="0" tIns="0" rIns="0" bIns="0" rtlCol="0" anchor="ctr"/>
           <a:lstStyle/>
           <a:p>
-            <a:pPr algn="ctr" indent="0" marL="0">
+            <a:pPr marL="0" indent="0" algn="ctr">
               <a:buNone/>
             </a:pPr>
             <a:r>
@@ -5401,7 +5221,7 @@
           <a:bodyPr wrap="square" lIns="0" tIns="0" rIns="0" bIns="0" rtlCol="0" anchor="ctr"/>
           <a:lstStyle/>
           <a:p>
-            <a:pPr algn="ctr" indent="0" marL="0">
+            <a:pPr marL="0" indent="0" algn="ctr">
               <a:buNone/>
             </a:pPr>
             <a:r>
@@ -5465,7 +5285,7 @@
           <a:bodyPr wrap="square" lIns="0" tIns="0" rIns="0" bIns="0" rtlCol="0" anchor="ctr"/>
           <a:lstStyle/>
           <a:p>
-            <a:pPr algn="ctr" indent="0" marL="0">
+            <a:pPr marL="0" indent="0" algn="ctr">
               <a:buNone/>
             </a:pPr>
             <a:r>
@@ -5529,7 +5349,7 @@
           <a:bodyPr wrap="square" lIns="0" tIns="0" rIns="0" bIns="0" rtlCol="0" anchor="ctr"/>
           <a:lstStyle/>
           <a:p>
-            <a:pPr algn="ctr" indent="0" marL="0">
+            <a:pPr marL="0" indent="0" algn="ctr">
               <a:buNone/>
             </a:pPr>
             <a:r>
@@ -5568,7 +5388,7 @@
           <a:bodyPr wrap="square" lIns="0" tIns="0" rIns="0" bIns="0" rtlCol="0" anchor="ctr"/>
           <a:lstStyle/>
           <a:p>
-            <a:pPr algn="ctr" indent="0" marL="0">
+            <a:pPr marL="0" indent="0" algn="ctr">
               <a:buNone/>
             </a:pPr>
             <a:r>
@@ -5630,14 +5450,14 @@
       </p:sp>
       <p:pic>
         <p:nvPicPr>
-          <p:cNvPr id="20" name="Image 0" descr="preencoded.png">    </p:cNvPr>
+          <p:cNvPr id="20" name="Image 0" descr="preencoded.png"/>
           <p:cNvPicPr>
             <a:picLocks noChangeAspect="1"/>
           </p:cNvPicPr>
           <p:nvPr/>
         </p:nvPicPr>
         <p:blipFill>
-          <a:blip r:embed="rId1"/>
+          <a:blip r:embed="rId3"/>
           <a:stretch>
             <a:fillRect/>
           </a:stretch>
@@ -5673,7 +5493,7 @@
           <a:bodyPr wrap="square" lIns="0" tIns="0" rIns="0" bIns="0" rtlCol="0" anchor="ctr"/>
           <a:lstStyle/>
           <a:p>
-            <a:pPr indent="0" marL="0">
+            <a:pPr marL="0" indent="0">
               <a:lnSpc>
                 <a:spcPts val="1700"/>
               </a:lnSpc>
@@ -5715,7 +5535,7 @@
           <a:bodyPr wrap="square" lIns="0" tIns="0" rIns="0" bIns="0" rtlCol="0" anchor="ctr"/>
           <a:lstStyle/>
           <a:p>
-            <a:pPr indent="0" marL="0">
+            <a:pPr marL="0" indent="0">
               <a:lnSpc>
                 <a:spcPts val="1500"/>
               </a:lnSpc>
@@ -5780,14 +5600,14 @@
       </p:sp>
       <p:pic>
         <p:nvPicPr>
-          <p:cNvPr id="25" name="Image 1" descr="preencoded.png">    </p:cNvPr>
+          <p:cNvPr id="25" name="Image 1" descr="preencoded.png"/>
           <p:cNvPicPr>
             <a:picLocks noChangeAspect="1"/>
           </p:cNvPicPr>
           <p:nvPr/>
         </p:nvPicPr>
         <p:blipFill>
-          <a:blip r:embed="rId2"/>
+          <a:blip r:embed="rId4"/>
           <a:stretch>
             <a:fillRect/>
           </a:stretch>
@@ -5823,7 +5643,7 @@
           <a:bodyPr wrap="square" lIns="0" tIns="0" rIns="0" bIns="0" rtlCol="0" anchor="ctr"/>
           <a:lstStyle/>
           <a:p>
-            <a:pPr indent="0" marL="0">
+            <a:pPr marL="0" indent="0">
               <a:lnSpc>
                 <a:spcPts val="1700"/>
               </a:lnSpc>
@@ -5865,7 +5685,7 @@
           <a:bodyPr wrap="square" lIns="0" tIns="0" rIns="0" bIns="0" rtlCol="0" anchor="ctr"/>
           <a:lstStyle/>
           <a:p>
-            <a:pPr indent="0" marL="0">
+            <a:pPr marL="0" indent="0">
               <a:lnSpc>
                 <a:spcPts val="1500"/>
               </a:lnSpc>
@@ -5907,7 +5727,7 @@
           <a:bodyPr wrap="square" lIns="0" tIns="0" rIns="0" bIns="0" rtlCol="0" anchor="ctr"/>
           <a:lstStyle/>
           <a:p>
-            <a:pPr algn="r" indent="0" marL="0">
+            <a:pPr marL="0" indent="0" algn="r">
               <a:buNone/>
             </a:pPr>
             <a:r>
@@ -5941,6 +5761,7 @@
         <a:solidFill>
           <a:srgbClr val="FFFFFF"/>
         </a:solidFill>
+        <a:effectLst/>
       </p:bgPr>
     </p:bg>
     <p:spTree>
@@ -5978,11 +5799,11 @@
           <a:bodyPr wrap="square" lIns="0" tIns="0" rIns="0" bIns="0" rtlCol="0" anchor="ctr"/>
           <a:lstStyle/>
           <a:p>
-            <a:pPr algn="l" indent="0" marL="0">
-              <a:buNone/>
-            </a:pPr>
-            <a:r>
-              <a:rPr lang="en-US" sz="1200" b="1" spc="200" kern="0" dirty="0">
+            <a:pPr marL="0" indent="0" algn="l">
+              <a:buNone/>
+            </a:pPr>
+            <a:r>
+              <a:rPr lang="en-US" sz="1200" b="1" kern="0" spc="200" dirty="0">
                 <a:solidFill>
                   <a:srgbClr val="6C4BC1"/>
                 </a:solidFill>
@@ -6017,7 +5838,7 @@
           <a:bodyPr wrap="square" lIns="0" tIns="0" rIns="0" bIns="0" rtlCol="0" anchor="ctr"/>
           <a:lstStyle/>
           <a:p>
-            <a:pPr indent="0" marL="0">
+            <a:pPr marL="0" indent="0">
               <a:buNone/>
             </a:pPr>
             <a:r>
@@ -6056,7 +5877,7 @@
           <a:bodyPr wrap="square" lIns="0" tIns="0" rIns="0" bIns="0" rtlCol="0" anchor="ctr"/>
           <a:lstStyle/>
           <a:p>
-            <a:pPr indent="0" marL="0">
+            <a:pPr marL="0" indent="0">
               <a:buNone/>
             </a:pPr>
             <a:r>
@@ -6177,7 +5998,7 @@
           <a:bodyPr wrap="square" lIns="0" tIns="0" rIns="0" bIns="0" rtlCol="0" anchor="ctr"/>
           <a:lstStyle/>
           <a:p>
-            <a:pPr indent="0" marL="0">
+            <a:pPr marL="0" indent="0">
               <a:buNone/>
             </a:pPr>
             <a:r>
@@ -6197,14 +6018,14 @@
       </p:sp>
       <p:pic>
         <p:nvPicPr>
-          <p:cNvPr id="10" name="Image 0" descr="preencoded.png">    </p:cNvPr>
+          <p:cNvPr id="10" name="Image 0" descr="preencoded.png"/>
           <p:cNvPicPr>
             <a:picLocks noChangeAspect="1"/>
           </p:cNvPicPr>
           <p:nvPr/>
         </p:nvPicPr>
         <p:blipFill>
-          <a:blip r:embed="rId1"/>
+          <a:blip r:embed="rId3"/>
           <a:stretch>
             <a:fillRect/>
           </a:stretch>
@@ -6240,7 +6061,7 @@
           <a:bodyPr wrap="square" lIns="0" tIns="0" rIns="0" bIns="0" rtlCol="0" anchor="ctr"/>
           <a:lstStyle/>
           <a:p>
-            <a:pPr indent="0" marL="0">
+            <a:pPr marL="0" indent="0">
               <a:buNone/>
             </a:pPr>
             <a:r>
@@ -6252,23 +6073,45 @@
                 <a:ea typeface="Courier New" pitchFamily="34" charset="-122"/>
                 <a:cs typeface="Courier New" pitchFamily="34" charset="-120"/>
               </a:rPr>
-              <a:t>static List&lt;</a:t>
-            </a:r>
-            <a:pPr indent="0" marL="0">
-              <a:buNone/>
-            </a:pPr>
+              <a:t>static List&lt;string</a:t>
+            </a:r>
             <a:r>
               <a:rPr lang="en-US" sz="1000" dirty="0">
                 <a:solidFill>
-                  <a:srgbClr val="2FE6C7"/>
+                  <a:srgbClr val="E7E5F7"/>
                 </a:solidFill>
                 <a:latin typeface="Courier New" pitchFamily="34" charset="0"/>
                 <a:ea typeface="Courier New" pitchFamily="34" charset="-122"/>
                 <a:cs typeface="Courier New" pitchFamily="34" charset="-120"/>
               </a:rPr>
-              <a:t>string</a:t>
-            </a:r>
-            <a:pPr indent="0" marL="0">
+              <a:t>&gt; Bfs(</a:t>
+            </a:r>
+            <a:endParaRPr lang="en-US" sz="1000" dirty="0"/>
+          </a:p>
+        </p:txBody>
+      </p:sp>
+      <p:sp>
+        <p:nvSpPr>
+          <p:cNvPr id="12" name="Text 9"/>
+          <p:cNvSpPr/>
+          <p:nvPr/>
+        </p:nvSpPr>
+        <p:spPr>
+          <a:xfrm>
+            <a:off x="932688" y="2546604"/>
+            <a:ext cx="4732020" cy="233172"/>
+          </a:xfrm>
+          <a:prstGeom prst="rect">
+            <a:avLst/>
+          </a:prstGeom>
+          <a:noFill/>
+          <a:ln/>
+        </p:spPr>
+        <p:txBody>
+          <a:bodyPr wrap="square" lIns="0" tIns="0" rIns="0" bIns="0" rtlCol="0" anchor="ctr"/>
+          <a:lstStyle/>
+          <a:p>
+            <a:pPr marL="0" indent="0">
               <a:buNone/>
             </a:pPr>
             <a:r>
@@ -6280,7 +6123,7 @@
                 <a:ea typeface="Courier New" pitchFamily="34" charset="-122"/>
                 <a:cs typeface="Courier New" pitchFamily="34" charset="-120"/>
               </a:rPr>
-              <a:t>&gt; Bfs(</a:t>
+              <a:t>    Dictionary&lt;string, List&lt;string&gt;&gt; grafo,</a:t>
             </a:r>
             <a:endParaRPr lang="en-US" sz="1000" dirty="0"/>
           </a:p>
@@ -6288,13 +6131,13 @@
       </p:sp>
       <p:sp>
         <p:nvSpPr>
-          <p:cNvPr id="12" name="Text 9"/>
-          <p:cNvSpPr/>
-          <p:nvPr/>
-        </p:nvSpPr>
-        <p:spPr>
-          <a:xfrm>
-            <a:off x="932688" y="2546604"/>
+          <p:cNvPr id="13" name="Text 10"/>
+          <p:cNvSpPr/>
+          <p:nvPr/>
+        </p:nvSpPr>
+        <p:spPr>
+          <a:xfrm>
+            <a:off x="932688" y="2779776"/>
             <a:ext cx="4732020" cy="233172"/>
           </a:xfrm>
           <a:prstGeom prst="rect">
@@ -6307,7 +6150,7 @@
           <a:bodyPr wrap="square" lIns="0" tIns="0" rIns="0" bIns="0" rtlCol="0" anchor="ctr"/>
           <a:lstStyle/>
           <a:p>
-            <a:pPr indent="0" marL="0">
+            <a:pPr marL="0" indent="0">
               <a:buNone/>
             </a:pPr>
             <a:r>
@@ -6319,7 +6162,7 @@
                 <a:ea typeface="Courier New" pitchFamily="34" charset="-122"/>
                 <a:cs typeface="Courier New" pitchFamily="34" charset="-120"/>
               </a:rPr>
-              <a:t>    Dictionary&lt;string, List&lt;string&gt;&gt; grafo,</a:t>
+              <a:t>    string inicio) {</a:t>
             </a:r>
             <a:endParaRPr lang="en-US" sz="1000" dirty="0"/>
           </a:p>
@@ -6327,13 +6170,13 @@
       </p:sp>
       <p:sp>
         <p:nvSpPr>
-          <p:cNvPr id="13" name="Text 10"/>
-          <p:cNvSpPr/>
-          <p:nvPr/>
-        </p:nvSpPr>
-        <p:spPr>
-          <a:xfrm>
-            <a:off x="932688" y="2779776"/>
+          <p:cNvPr id="14" name="Text 11"/>
+          <p:cNvSpPr/>
+          <p:nvPr/>
+        </p:nvSpPr>
+        <p:spPr>
+          <a:xfrm>
+            <a:off x="932688" y="3012948"/>
             <a:ext cx="4732020" cy="233172"/>
           </a:xfrm>
           <a:prstGeom prst="rect">
@@ -6346,7 +6189,7 @@
           <a:bodyPr wrap="square" lIns="0" tIns="0" rIns="0" bIns="0" rtlCol="0" anchor="ctr"/>
           <a:lstStyle/>
           <a:p>
-            <a:pPr indent="0" marL="0">
+            <a:pPr marL="0" indent="0">
               <a:buNone/>
             </a:pPr>
             <a:r>
@@ -6358,62 +6201,56 @@
                 <a:ea typeface="Courier New" pitchFamily="34" charset="-122"/>
                 <a:cs typeface="Courier New" pitchFamily="34" charset="-120"/>
               </a:rPr>
-              <a:t>    string inicio) {</a:t>
-            </a:r>
-            <a:endParaRPr lang="en-US" sz="1000" dirty="0"/>
-          </a:p>
-        </p:txBody>
-      </p:sp>
-      <p:sp>
-        <p:nvSpPr>
-          <p:cNvPr id="14" name="Text 11"/>
-          <p:cNvSpPr/>
-          <p:nvPr/>
-        </p:nvSpPr>
-        <p:spPr>
-          <a:xfrm>
-            <a:off x="932688" y="3012948"/>
-            <a:ext cx="4732020" cy="233172"/>
-          </a:xfrm>
-          <a:prstGeom prst="rect">
-            <a:avLst/>
-          </a:prstGeom>
-          <a:noFill/>
-          <a:ln/>
-        </p:spPr>
-        <p:txBody>
-          <a:bodyPr wrap="square" lIns="0" tIns="0" rIns="0" bIns="0" rtlCol="0" anchor="ctr"/>
-          <a:lstStyle/>
-          <a:p>
-            <a:pPr indent="0" marL="0">
-              <a:buNone/>
-            </a:pPr>
+              <a:t>    var visitados = </a:t>
+            </a:r>
             <a:r>
               <a:rPr lang="en-US" sz="1000" dirty="0">
                 <a:solidFill>
-                  <a:srgbClr val="E7E5F7"/>
+                  <a:srgbClr val="2FE6C7"/>
                 </a:solidFill>
                 <a:latin typeface="Courier New" pitchFamily="34" charset="0"/>
                 <a:ea typeface="Courier New" pitchFamily="34" charset="-122"/>
                 <a:cs typeface="Courier New" pitchFamily="34" charset="-120"/>
               </a:rPr>
-              <a:t>    var visitados = </a:t>
-            </a:r>
-            <a:pPr indent="0" marL="0">
-              <a:buNone/>
-            </a:pPr>
+              <a:t>new </a:t>
+            </a:r>
             <a:r>
               <a:rPr lang="en-US" sz="1000" dirty="0">
                 <a:solidFill>
-                  <a:srgbClr val="2FE6C7"/>
+                  <a:srgbClr val="E7E5F7"/>
                 </a:solidFill>
                 <a:latin typeface="Courier New" pitchFamily="34" charset="0"/>
                 <a:ea typeface="Courier New" pitchFamily="34" charset="-122"/>
                 <a:cs typeface="Courier New" pitchFamily="34" charset="-120"/>
               </a:rPr>
-              <a:t>new </a:t>
-            </a:r>
-            <a:pPr indent="0" marL="0">
+              <a:t>HashSet&lt;string&gt; { inicio };</a:t>
+            </a:r>
+            <a:endParaRPr lang="en-US" sz="1000" dirty="0"/>
+          </a:p>
+        </p:txBody>
+      </p:sp>
+      <p:sp>
+        <p:nvSpPr>
+          <p:cNvPr id="15" name="Text 12"/>
+          <p:cNvSpPr/>
+          <p:nvPr/>
+        </p:nvSpPr>
+        <p:spPr>
+          <a:xfrm>
+            <a:off x="932688" y="3246120"/>
+            <a:ext cx="4732020" cy="233172"/>
+          </a:xfrm>
+          <a:prstGeom prst="rect">
+            <a:avLst/>
+          </a:prstGeom>
+          <a:noFill/>
+          <a:ln/>
+        </p:spPr>
+        <p:txBody>
+          <a:bodyPr wrap="square" lIns="0" tIns="0" rIns="0" bIns="0" rtlCol="0" anchor="ctr"/>
+          <a:lstStyle/>
+          <a:p>
+            <a:pPr marL="0" indent="0">
               <a:buNone/>
             </a:pPr>
             <a:r>
@@ -6425,62 +6262,56 @@
                 <a:ea typeface="Courier New" pitchFamily="34" charset="-122"/>
                 <a:cs typeface="Courier New" pitchFamily="34" charset="-120"/>
               </a:rPr>
-              <a:t>HashSet&lt;string&gt; { inicio };</a:t>
-            </a:r>
-            <a:endParaRPr lang="en-US" sz="1000" dirty="0"/>
-          </a:p>
-        </p:txBody>
-      </p:sp>
-      <p:sp>
-        <p:nvSpPr>
-          <p:cNvPr id="15" name="Text 12"/>
-          <p:cNvSpPr/>
-          <p:nvPr/>
-        </p:nvSpPr>
-        <p:spPr>
-          <a:xfrm>
-            <a:off x="932688" y="3246120"/>
-            <a:ext cx="4732020" cy="233172"/>
-          </a:xfrm>
-          <a:prstGeom prst="rect">
-            <a:avLst/>
-          </a:prstGeom>
-          <a:noFill/>
-          <a:ln/>
-        </p:spPr>
-        <p:txBody>
-          <a:bodyPr wrap="square" lIns="0" tIns="0" rIns="0" bIns="0" rtlCol="0" anchor="ctr"/>
-          <a:lstStyle/>
-          <a:p>
-            <a:pPr indent="0" marL="0">
-              <a:buNone/>
-            </a:pPr>
+              <a:t>    var fila = </a:t>
+            </a:r>
             <a:r>
               <a:rPr lang="en-US" sz="1000" dirty="0">
                 <a:solidFill>
-                  <a:srgbClr val="E7E5F7"/>
+                  <a:srgbClr val="2FE6C7"/>
                 </a:solidFill>
                 <a:latin typeface="Courier New" pitchFamily="34" charset="0"/>
                 <a:ea typeface="Courier New" pitchFamily="34" charset="-122"/>
                 <a:cs typeface="Courier New" pitchFamily="34" charset="-120"/>
               </a:rPr>
-              <a:t>    var fila = </a:t>
-            </a:r>
-            <a:pPr indent="0" marL="0">
-              <a:buNone/>
-            </a:pPr>
+              <a:t>new </a:t>
+            </a:r>
             <a:r>
               <a:rPr lang="en-US" sz="1000" dirty="0">
                 <a:solidFill>
-                  <a:srgbClr val="2FE6C7"/>
+                  <a:srgbClr val="E7E5F7"/>
                 </a:solidFill>
                 <a:latin typeface="Courier New" pitchFamily="34" charset="0"/>
                 <a:ea typeface="Courier New" pitchFamily="34" charset="-122"/>
                 <a:cs typeface="Courier New" pitchFamily="34" charset="-120"/>
               </a:rPr>
-              <a:t>new </a:t>
-            </a:r>
-            <a:pPr indent="0" marL="0">
+              <a:t>Queue&lt;string&gt;();</a:t>
+            </a:r>
+            <a:endParaRPr lang="en-US" sz="1000" dirty="0"/>
+          </a:p>
+        </p:txBody>
+      </p:sp>
+      <p:sp>
+        <p:nvSpPr>
+          <p:cNvPr id="16" name="Text 13"/>
+          <p:cNvSpPr/>
+          <p:nvPr/>
+        </p:nvSpPr>
+        <p:spPr>
+          <a:xfrm>
+            <a:off x="932688" y="3479292"/>
+            <a:ext cx="4732020" cy="233172"/>
+          </a:xfrm>
+          <a:prstGeom prst="rect">
+            <a:avLst/>
+          </a:prstGeom>
+          <a:noFill/>
+          <a:ln/>
+        </p:spPr>
+        <p:txBody>
+          <a:bodyPr wrap="square" lIns="0" tIns="0" rIns="0" bIns="0" rtlCol="0" anchor="ctr"/>
+          <a:lstStyle/>
+          <a:p>
+            <a:pPr marL="0" indent="0">
               <a:buNone/>
             </a:pPr>
             <a:r>
@@ -6492,7 +6323,7 @@
                 <a:ea typeface="Courier New" pitchFamily="34" charset="-122"/>
                 <a:cs typeface="Courier New" pitchFamily="34" charset="-120"/>
               </a:rPr>
-              <a:t>Queue&lt;string&gt;();</a:t>
+              <a:t>    fila.Enqueue(inicio);</a:t>
             </a:r>
             <a:endParaRPr lang="en-US" sz="1000" dirty="0"/>
           </a:p>
@@ -6500,13 +6331,13 @@
       </p:sp>
       <p:sp>
         <p:nvSpPr>
-          <p:cNvPr id="16" name="Text 13"/>
-          <p:cNvSpPr/>
-          <p:nvPr/>
-        </p:nvSpPr>
-        <p:spPr>
-          <a:xfrm>
-            <a:off x="932688" y="3479292"/>
+          <p:cNvPr id="17" name="Text 14"/>
+          <p:cNvSpPr/>
+          <p:nvPr/>
+        </p:nvSpPr>
+        <p:spPr>
+          <a:xfrm>
+            <a:off x="932688" y="3712464"/>
             <a:ext cx="4732020" cy="233172"/>
           </a:xfrm>
           <a:prstGeom prst="rect">
@@ -6519,7 +6350,7 @@
           <a:bodyPr wrap="square" lIns="0" tIns="0" rIns="0" bIns="0" rtlCol="0" anchor="ctr"/>
           <a:lstStyle/>
           <a:p>
-            <a:pPr indent="0" marL="0">
+            <a:pPr marL="0" indent="0">
               <a:buNone/>
             </a:pPr>
             <a:r>
@@ -6531,115 +6362,106 @@
                 <a:ea typeface="Courier New" pitchFamily="34" charset="-122"/>
                 <a:cs typeface="Courier New" pitchFamily="34" charset="-120"/>
               </a:rPr>
-              <a:t>    fila.Enqueue(inicio);</a:t>
-            </a:r>
-            <a:endParaRPr lang="en-US" sz="1000" dirty="0"/>
-          </a:p>
-        </p:txBody>
-      </p:sp>
-      <p:sp>
-        <p:nvSpPr>
-          <p:cNvPr id="17" name="Text 14"/>
-          <p:cNvSpPr/>
-          <p:nvPr/>
-        </p:nvSpPr>
-        <p:spPr>
-          <a:xfrm>
-            <a:off x="932688" y="3712464"/>
-            <a:ext cx="4732020" cy="233172"/>
-          </a:xfrm>
-          <a:prstGeom prst="rect">
-            <a:avLst/>
-          </a:prstGeom>
-          <a:noFill/>
-          <a:ln/>
-        </p:spPr>
-        <p:txBody>
-          <a:bodyPr wrap="square" lIns="0" tIns="0" rIns="0" bIns="0" rtlCol="0" anchor="ctr"/>
-          <a:lstStyle/>
-          <a:p>
-            <a:pPr indent="0" marL="0">
-              <a:buNone/>
-            </a:pPr>
+              <a:t>    var ordem = </a:t>
+            </a:r>
             <a:r>
               <a:rPr lang="en-US" sz="1000" dirty="0">
                 <a:solidFill>
-                  <a:srgbClr val="E7E5F7"/>
+                  <a:srgbClr val="2FE6C7"/>
                 </a:solidFill>
                 <a:latin typeface="Courier New" pitchFamily="34" charset="0"/>
                 <a:ea typeface="Courier New" pitchFamily="34" charset="-122"/>
                 <a:cs typeface="Courier New" pitchFamily="34" charset="-120"/>
               </a:rPr>
-              <a:t>    var ordem = </a:t>
-            </a:r>
-            <a:pPr indent="0" marL="0">
-              <a:buNone/>
-            </a:pPr>
+              <a:t>new </a:t>
+            </a:r>
             <a:r>
               <a:rPr lang="en-US" sz="1000" dirty="0">
                 <a:solidFill>
-                  <a:srgbClr val="2FE6C7"/>
+                  <a:srgbClr val="E7E5F7"/>
                 </a:solidFill>
                 <a:latin typeface="Courier New" pitchFamily="34" charset="0"/>
                 <a:ea typeface="Courier New" pitchFamily="34" charset="-122"/>
                 <a:cs typeface="Courier New" pitchFamily="34" charset="-120"/>
               </a:rPr>
-              <a:t>new </a:t>
-            </a:r>
-            <a:pPr indent="0" marL="0">
+              <a:t>List&lt;string&gt;();</a:t>
+            </a:r>
+            <a:endParaRPr lang="en-US" sz="1000" dirty="0"/>
+          </a:p>
+        </p:txBody>
+      </p:sp>
+      <p:sp>
+        <p:nvSpPr>
+          <p:cNvPr id="18" name="Text 15"/>
+          <p:cNvSpPr/>
+          <p:nvPr/>
+        </p:nvSpPr>
+        <p:spPr>
+          <a:xfrm>
+            <a:off x="932688" y="3945636"/>
+            <a:ext cx="4732020" cy="233172"/>
+          </a:xfrm>
+          <a:prstGeom prst="rect">
+            <a:avLst/>
+          </a:prstGeom>
+          <a:noFill/>
+          <a:ln/>
+        </p:spPr>
+        <p:txBody>
+          <a:bodyPr wrap="square" lIns="0" tIns="0" rIns="0" bIns="0" rtlCol="0" anchor="ctr"/>
+          <a:lstStyle/>
+          <a:p>
+            <a:pPr marL="0" indent="0">
               <a:buNone/>
             </a:pPr>
             <a:r>
               <a:rPr lang="en-US" sz="1000" dirty="0">
                 <a:solidFill>
-                  <a:srgbClr val="E7E5F7"/>
+                  <a:srgbClr val="2FE6C7"/>
                 </a:solidFill>
                 <a:latin typeface="Courier New" pitchFamily="34" charset="0"/>
                 <a:ea typeface="Courier New" pitchFamily="34" charset="-122"/>
                 <a:cs typeface="Courier New" pitchFamily="34" charset="-120"/>
               </a:rPr>
-              <a:t>List&lt;string&gt;();</a:t>
-            </a:r>
-            <a:endParaRPr lang="en-US" sz="1000" dirty="0"/>
-          </a:p>
-        </p:txBody>
-      </p:sp>
-      <p:sp>
-        <p:nvSpPr>
-          <p:cNvPr id="18" name="Text 15"/>
-          <p:cNvSpPr/>
-          <p:nvPr/>
-        </p:nvSpPr>
-        <p:spPr>
-          <a:xfrm>
-            <a:off x="932688" y="3945636"/>
-            <a:ext cx="4732020" cy="233172"/>
-          </a:xfrm>
-          <a:prstGeom prst="rect">
-            <a:avLst/>
-          </a:prstGeom>
-          <a:noFill/>
-          <a:ln/>
-        </p:spPr>
-        <p:txBody>
-          <a:bodyPr wrap="square" lIns="0" tIns="0" rIns="0" bIns="0" rtlCol="0" anchor="ctr"/>
-          <a:lstStyle/>
-          <a:p>
-            <a:pPr indent="0" marL="0">
-              <a:buNone/>
-            </a:pPr>
+              <a:t>    while </a:t>
+            </a:r>
             <a:r>
               <a:rPr lang="en-US" sz="1000" dirty="0">
                 <a:solidFill>
-                  <a:srgbClr val="2FE6C7"/>
+                  <a:srgbClr val="E7E5F7"/>
                 </a:solidFill>
                 <a:latin typeface="Courier New" pitchFamily="34" charset="0"/>
                 <a:ea typeface="Courier New" pitchFamily="34" charset="-122"/>
                 <a:cs typeface="Courier New" pitchFamily="34" charset="-120"/>
               </a:rPr>
-              <a:t>    while </a:t>
-            </a:r>
-            <a:pPr indent="0" marL="0">
+              <a:t>(fila.Count &gt; 0) {</a:t>
+            </a:r>
+            <a:endParaRPr lang="en-US" sz="1000" dirty="0"/>
+          </a:p>
+        </p:txBody>
+      </p:sp>
+      <p:sp>
+        <p:nvSpPr>
+          <p:cNvPr id="19" name="Text 16"/>
+          <p:cNvSpPr/>
+          <p:nvPr/>
+        </p:nvSpPr>
+        <p:spPr>
+          <a:xfrm>
+            <a:off x="932688" y="4178808"/>
+            <a:ext cx="4732020" cy="233172"/>
+          </a:xfrm>
+          <a:prstGeom prst="rect">
+            <a:avLst/>
+          </a:prstGeom>
+          <a:noFill/>
+          <a:ln/>
+        </p:spPr>
+        <p:txBody>
+          <a:bodyPr wrap="square" lIns="0" tIns="0" rIns="0" bIns="0" rtlCol="0" anchor="ctr"/>
+          <a:lstStyle/>
+          <a:p>
+            <a:pPr marL="0" indent="0">
               <a:buNone/>
             </a:pPr>
             <a:r>
@@ -6651,7 +6473,7 @@
                 <a:ea typeface="Courier New" pitchFamily="34" charset="-122"/>
                 <a:cs typeface="Courier New" pitchFamily="34" charset="-120"/>
               </a:rPr>
-              <a:t>(fila.Count &gt; 0) {</a:t>
+              <a:t>        var v = fila.Dequeue();</a:t>
             </a:r>
             <a:endParaRPr lang="en-US" sz="1000" dirty="0"/>
           </a:p>
@@ -6659,13 +6481,13 @@
       </p:sp>
       <p:sp>
         <p:nvSpPr>
-          <p:cNvPr id="19" name="Text 16"/>
-          <p:cNvSpPr/>
-          <p:nvPr/>
-        </p:nvSpPr>
-        <p:spPr>
-          <a:xfrm>
-            <a:off x="932688" y="4178808"/>
+          <p:cNvPr id="20" name="Text 17"/>
+          <p:cNvSpPr/>
+          <p:nvPr/>
+        </p:nvSpPr>
+        <p:spPr>
+          <a:xfrm>
+            <a:off x="932688" y="4411980"/>
             <a:ext cx="4732020" cy="233172"/>
           </a:xfrm>
           <a:prstGeom prst="rect">
@@ -6678,7 +6500,7 @@
           <a:bodyPr wrap="square" lIns="0" tIns="0" rIns="0" bIns="0" rtlCol="0" anchor="ctr"/>
           <a:lstStyle/>
           <a:p>
-            <a:pPr indent="0" marL="0">
+            <a:pPr marL="0" indent="0">
               <a:buNone/>
             </a:pPr>
             <a:r>
@@ -6690,7 +6512,7 @@
                 <a:ea typeface="Courier New" pitchFamily="34" charset="-122"/>
                 <a:cs typeface="Courier New" pitchFamily="34" charset="-120"/>
               </a:rPr>
-              <a:t>        var v = fila.Dequeue();</a:t>
+              <a:t>        ordem.Add(v);</a:t>
             </a:r>
             <a:endParaRPr lang="en-US" sz="1000" dirty="0"/>
           </a:p>
@@ -6698,13 +6520,13 @@
       </p:sp>
       <p:sp>
         <p:nvSpPr>
-          <p:cNvPr id="20" name="Text 17"/>
-          <p:cNvSpPr/>
-          <p:nvPr/>
-        </p:nvSpPr>
-        <p:spPr>
-          <a:xfrm>
-            <a:off x="932688" y="4411980"/>
+          <p:cNvPr id="21" name="Text 18"/>
+          <p:cNvSpPr/>
+          <p:nvPr/>
+        </p:nvSpPr>
+        <p:spPr>
+          <a:xfrm>
+            <a:off x="932688" y="4645152"/>
             <a:ext cx="4732020" cy="233172"/>
           </a:xfrm>
           <a:prstGeom prst="rect">
@@ -6717,113 +6539,107 @@
           <a:bodyPr wrap="square" lIns="0" tIns="0" rIns="0" bIns="0" rtlCol="0" anchor="ctr"/>
           <a:lstStyle/>
           <a:p>
-            <a:pPr indent="0" marL="0">
+            <a:pPr marL="0" indent="0">
               <a:buNone/>
             </a:pPr>
             <a:r>
               <a:rPr lang="en-US" sz="1000" dirty="0">
                 <a:solidFill>
-                  <a:srgbClr val="E7E5F7"/>
+                  <a:srgbClr val="2FE6C7"/>
                 </a:solidFill>
                 <a:latin typeface="Courier New" pitchFamily="34" charset="0"/>
                 <a:ea typeface="Courier New" pitchFamily="34" charset="-122"/>
                 <a:cs typeface="Courier New" pitchFamily="34" charset="-120"/>
               </a:rPr>
-              <a:t>        ordem.Add(v);</a:t>
-            </a:r>
-            <a:endParaRPr lang="en-US" sz="1000" dirty="0"/>
-          </a:p>
-        </p:txBody>
-      </p:sp>
-      <p:sp>
-        <p:nvSpPr>
-          <p:cNvPr id="21" name="Text 18"/>
-          <p:cNvSpPr/>
-          <p:nvPr/>
-        </p:nvSpPr>
-        <p:spPr>
-          <a:xfrm>
-            <a:off x="932688" y="4645152"/>
-            <a:ext cx="4732020" cy="233172"/>
-          </a:xfrm>
-          <a:prstGeom prst="rect">
-            <a:avLst/>
-          </a:prstGeom>
-          <a:noFill/>
-          <a:ln/>
-        </p:spPr>
-        <p:txBody>
-          <a:bodyPr wrap="square" lIns="0" tIns="0" rIns="0" bIns="0" rtlCol="0" anchor="ctr"/>
-          <a:lstStyle/>
-          <a:p>
-            <a:pPr indent="0" marL="0">
-              <a:buNone/>
-            </a:pPr>
+              <a:t>        foreach </a:t>
+            </a:r>
             <a:r>
               <a:rPr lang="en-US" sz="1000" dirty="0">
                 <a:solidFill>
-                  <a:srgbClr val="2FE6C7"/>
+                  <a:srgbClr val="E7E5F7"/>
                 </a:solidFill>
                 <a:latin typeface="Courier New" pitchFamily="34" charset="0"/>
                 <a:ea typeface="Courier New" pitchFamily="34" charset="-122"/>
                 <a:cs typeface="Courier New" pitchFamily="34" charset="-120"/>
               </a:rPr>
-              <a:t>        foreach </a:t>
-            </a:r>
-            <a:pPr indent="0" marL="0">
+              <a:t>(var vizinho in grafo[v])</a:t>
+            </a:r>
+            <a:endParaRPr lang="en-US" sz="1000" dirty="0"/>
+          </a:p>
+        </p:txBody>
+      </p:sp>
+      <p:sp>
+        <p:nvSpPr>
+          <p:cNvPr id="22" name="Text 19"/>
+          <p:cNvSpPr/>
+          <p:nvPr/>
+        </p:nvSpPr>
+        <p:spPr>
+          <a:xfrm>
+            <a:off x="932688" y="4878324"/>
+            <a:ext cx="4732020" cy="233172"/>
+          </a:xfrm>
+          <a:prstGeom prst="rect">
+            <a:avLst/>
+          </a:prstGeom>
+          <a:noFill/>
+          <a:ln/>
+        </p:spPr>
+        <p:txBody>
+          <a:bodyPr wrap="square" lIns="0" tIns="0" rIns="0" bIns="0" rtlCol="0" anchor="ctr"/>
+          <a:lstStyle/>
+          <a:p>
+            <a:pPr marL="0" indent="0">
               <a:buNone/>
             </a:pPr>
             <a:r>
               <a:rPr lang="en-US" sz="1000" dirty="0">
                 <a:solidFill>
-                  <a:srgbClr val="E7E5F7"/>
+                  <a:srgbClr val="2FE6C7"/>
                 </a:solidFill>
                 <a:latin typeface="Courier New" pitchFamily="34" charset="0"/>
                 <a:ea typeface="Courier New" pitchFamily="34" charset="-122"/>
                 <a:cs typeface="Courier New" pitchFamily="34" charset="-120"/>
               </a:rPr>
-              <a:t>(var vizinho in grafo[v])</a:t>
-            </a:r>
-            <a:endParaRPr lang="en-US" sz="1000" dirty="0"/>
-          </a:p>
-        </p:txBody>
-      </p:sp>
-      <p:sp>
-        <p:nvSpPr>
-          <p:cNvPr id="22" name="Text 19"/>
-          <p:cNvSpPr/>
-          <p:nvPr/>
-        </p:nvSpPr>
-        <p:spPr>
-          <a:xfrm>
-            <a:off x="932688" y="4878324"/>
-            <a:ext cx="4732020" cy="233172"/>
-          </a:xfrm>
-          <a:prstGeom prst="rect">
-            <a:avLst/>
-          </a:prstGeom>
-          <a:noFill/>
-          <a:ln/>
-        </p:spPr>
-        <p:txBody>
-          <a:bodyPr wrap="square" lIns="0" tIns="0" rIns="0" bIns="0" rtlCol="0" anchor="ctr"/>
-          <a:lstStyle/>
-          <a:p>
-            <a:pPr indent="0" marL="0">
-              <a:buNone/>
-            </a:pPr>
+              <a:t>            if </a:t>
+            </a:r>
             <a:r>
               <a:rPr lang="en-US" sz="1000" dirty="0">
                 <a:solidFill>
-                  <a:srgbClr val="2FE6C7"/>
+                  <a:srgbClr val="E7E5F7"/>
                 </a:solidFill>
                 <a:latin typeface="Courier New" pitchFamily="34" charset="0"/>
                 <a:ea typeface="Courier New" pitchFamily="34" charset="-122"/>
                 <a:cs typeface="Courier New" pitchFamily="34" charset="-120"/>
               </a:rPr>
-              <a:t>            if </a:t>
-            </a:r>
-            <a:pPr indent="0" marL="0">
+              <a:t>(visitados.Add(vizinho))</a:t>
+            </a:r>
+            <a:endParaRPr lang="en-US" sz="1000" dirty="0"/>
+          </a:p>
+        </p:txBody>
+      </p:sp>
+      <p:sp>
+        <p:nvSpPr>
+          <p:cNvPr id="23" name="Text 20"/>
+          <p:cNvSpPr/>
+          <p:nvPr/>
+        </p:nvSpPr>
+        <p:spPr>
+          <a:xfrm>
+            <a:off x="932688" y="5111496"/>
+            <a:ext cx="4732020" cy="233172"/>
+          </a:xfrm>
+          <a:prstGeom prst="rect">
+            <a:avLst/>
+          </a:prstGeom>
+          <a:noFill/>
+          <a:ln/>
+        </p:spPr>
+        <p:txBody>
+          <a:bodyPr wrap="square" lIns="0" tIns="0" rIns="0" bIns="0" rtlCol="0" anchor="ctr"/>
+          <a:lstStyle/>
+          <a:p>
+            <a:pPr marL="0" indent="0">
               <a:buNone/>
             </a:pPr>
             <a:r>
@@ -6835,7 +6651,7 @@
                 <a:ea typeface="Courier New" pitchFamily="34" charset="-122"/>
                 <a:cs typeface="Courier New" pitchFamily="34" charset="-120"/>
               </a:rPr>
-              <a:t>(visitados.Add(vizinho))</a:t>
+              <a:t>                fila.Enqueue(vizinho);</a:t>
             </a:r>
             <a:endParaRPr lang="en-US" sz="1000" dirty="0"/>
           </a:p>
@@ -6843,13 +6659,13 @@
       </p:sp>
       <p:sp>
         <p:nvSpPr>
-          <p:cNvPr id="23" name="Text 20"/>
-          <p:cNvSpPr/>
-          <p:nvPr/>
-        </p:nvSpPr>
-        <p:spPr>
-          <a:xfrm>
-            <a:off x="932688" y="5111496"/>
+          <p:cNvPr id="24" name="Text 21"/>
+          <p:cNvSpPr/>
+          <p:nvPr/>
+        </p:nvSpPr>
+        <p:spPr>
+          <a:xfrm>
+            <a:off x="932688" y="5344668"/>
             <a:ext cx="4732020" cy="233172"/>
           </a:xfrm>
           <a:prstGeom prst="rect">
@@ -6862,7 +6678,7 @@
           <a:bodyPr wrap="square" lIns="0" tIns="0" rIns="0" bIns="0" rtlCol="0" anchor="ctr"/>
           <a:lstStyle/>
           <a:p>
-            <a:pPr indent="0" marL="0">
+            <a:pPr marL="0" indent="0">
               <a:buNone/>
             </a:pPr>
             <a:r>
@@ -6874,7 +6690,7 @@
                 <a:ea typeface="Courier New" pitchFamily="34" charset="-122"/>
                 <a:cs typeface="Courier New" pitchFamily="34" charset="-120"/>
               </a:rPr>
-              <a:t>                fila.Enqueue(vizinho);</a:t>
+              <a:t>    }</a:t>
             </a:r>
             <a:endParaRPr lang="en-US" sz="1000" dirty="0"/>
           </a:p>
@@ -6882,13 +6698,13 @@
       </p:sp>
       <p:sp>
         <p:nvSpPr>
-          <p:cNvPr id="24" name="Text 21"/>
-          <p:cNvSpPr/>
-          <p:nvPr/>
-        </p:nvSpPr>
-        <p:spPr>
-          <a:xfrm>
-            <a:off x="932688" y="5344668"/>
+          <p:cNvPr id="25" name="Text 22"/>
+          <p:cNvSpPr/>
+          <p:nvPr/>
+        </p:nvSpPr>
+        <p:spPr>
+          <a:xfrm>
+            <a:off x="932688" y="5577840"/>
             <a:ext cx="4732020" cy="233172"/>
           </a:xfrm>
           <a:prstGeom prst="rect">
@@ -6901,71 +6717,29 @@
           <a:bodyPr wrap="square" lIns="0" tIns="0" rIns="0" bIns="0" rtlCol="0" anchor="ctr"/>
           <a:lstStyle/>
           <a:p>
-            <a:pPr indent="0" marL="0">
+            <a:pPr marL="0" indent="0">
               <a:buNone/>
             </a:pPr>
             <a:r>
               <a:rPr lang="en-US" sz="1000" dirty="0">
                 <a:solidFill>
-                  <a:srgbClr val="E7E5F7"/>
+                  <a:srgbClr val="2FE6C7"/>
                 </a:solidFill>
                 <a:latin typeface="Courier New" pitchFamily="34" charset="0"/>
                 <a:ea typeface="Courier New" pitchFamily="34" charset="-122"/>
                 <a:cs typeface="Courier New" pitchFamily="34" charset="-120"/>
               </a:rPr>
-              <a:t>    }</a:t>
-            </a:r>
-            <a:endParaRPr lang="en-US" sz="1000" dirty="0"/>
-          </a:p>
-        </p:txBody>
-      </p:sp>
-      <p:sp>
-        <p:nvSpPr>
-          <p:cNvPr id="25" name="Text 22"/>
-          <p:cNvSpPr/>
-          <p:nvPr/>
-        </p:nvSpPr>
-        <p:spPr>
-          <a:xfrm>
-            <a:off x="932688" y="5577840"/>
-            <a:ext cx="4732020" cy="233172"/>
-          </a:xfrm>
-          <a:prstGeom prst="rect">
-            <a:avLst/>
-          </a:prstGeom>
-          <a:noFill/>
-          <a:ln/>
-        </p:spPr>
-        <p:txBody>
-          <a:bodyPr wrap="square" lIns="0" tIns="0" rIns="0" bIns="0" rtlCol="0" anchor="ctr"/>
-          <a:lstStyle/>
-          <a:p>
-            <a:pPr indent="0" marL="0">
-              <a:buNone/>
-            </a:pPr>
+              <a:t>    return </a:t>
+            </a:r>
             <a:r>
               <a:rPr lang="en-US" sz="1000" dirty="0">
                 <a:solidFill>
-                  <a:srgbClr val="2FE6C7"/>
+                  <a:srgbClr val="E7E5F7"/>
                 </a:solidFill>
                 <a:latin typeface="Courier New" pitchFamily="34" charset="0"/>
                 <a:ea typeface="Courier New" pitchFamily="34" charset="-122"/>
                 <a:cs typeface="Courier New" pitchFamily="34" charset="-120"/>
               </a:rPr>
-              <a:t>    return </a:t>
-            </a:r>
-            <a:pPr indent="0" marL="0">
-              <a:buNone/>
-            </a:pPr>
-            <a:r>
-              <a:rPr lang="en-US" sz="1000" dirty="0">
-                <a:solidFill>
-                  <a:srgbClr val="E7E5F7"/>
-                </a:solidFill>
-                <a:latin typeface="Courier New" pitchFamily="34" charset="0"/>
-                <a:ea typeface="Courier New" pitchFamily="34" charset="-122"/>
-                <a:cs typeface="Courier New" pitchFamily="34" charset="-120"/>
-              </a:rPr>
               <a:t>ordem;</a:t>
             </a:r>
             <a:endParaRPr lang="en-US" sz="1000" dirty="0"/>
@@ -6993,7 +6767,7 @@
           <a:bodyPr wrap="square" lIns="0" tIns="0" rIns="0" bIns="0" rtlCol="0" anchor="ctr"/>
           <a:lstStyle/>
           <a:p>
-            <a:pPr indent="0" marL="0">
+            <a:pPr marL="0" indent="0">
               <a:buNone/>
             </a:pPr>
             <a:r>
@@ -7114,7 +6888,7 @@
           <a:bodyPr wrap="square" lIns="0" tIns="0" rIns="0" bIns="0" rtlCol="0" anchor="ctr"/>
           <a:lstStyle/>
           <a:p>
-            <a:pPr indent="0" marL="0">
+            <a:pPr marL="0" indent="0">
               <a:buNone/>
             </a:pPr>
             <a:r>
@@ -7134,14 +6908,14 @@
       </p:sp>
       <p:pic>
         <p:nvPicPr>
-          <p:cNvPr id="32" name="Image 1" descr="preencoded.png">    </p:cNvPr>
+          <p:cNvPr id="32" name="Image 1" descr="preencoded.png"/>
           <p:cNvPicPr>
             <a:picLocks noChangeAspect="1"/>
           </p:cNvPicPr>
           <p:nvPr/>
         </p:nvPicPr>
         <p:blipFill>
-          <a:blip r:embed="rId2"/>
+          <a:blip r:embed="rId4"/>
           <a:stretch>
             <a:fillRect/>
           </a:stretch>
@@ -7177,7 +6951,7 @@
           <a:bodyPr wrap="square" lIns="0" tIns="0" rIns="0" bIns="0" rtlCol="0" anchor="ctr"/>
           <a:lstStyle/>
           <a:p>
-            <a:pPr indent="0" marL="0">
+            <a:pPr marL="0" indent="0">
               <a:buNone/>
             </a:pPr>
             <a:r>
@@ -7191,9 +6965,6 @@
               </a:rPr>
               <a:t>from </a:t>
             </a:r>
-            <a:pPr indent="0" marL="0">
-              <a:buNone/>
-            </a:pPr>
             <a:r>
               <a:rPr lang="en-US" sz="1000" dirty="0">
                 <a:solidFill>
@@ -7205,9 +6976,6 @@
               </a:rPr>
               <a:t>collections </a:t>
             </a:r>
-            <a:pPr indent="0" marL="0">
-              <a:buNone/>
-            </a:pPr>
             <a:r>
               <a:rPr lang="en-US" sz="1000" dirty="0">
                 <a:solidFill>
@@ -7219,9 +6987,6 @@
               </a:rPr>
               <a:t>import </a:t>
             </a:r>
-            <a:pPr indent="0" marL="0">
-              <a:buNone/>
-            </a:pPr>
             <a:r>
               <a:rPr lang="en-US" sz="1000" dirty="0">
                 <a:solidFill>
@@ -7258,7 +7023,7 @@
           <a:bodyPr wrap="square" lIns="0" tIns="0" rIns="0" bIns="0" rtlCol="0" anchor="ctr"/>
           <a:lstStyle/>
           <a:p>
-            <a:pPr indent="0" marL="0">
+            <a:pPr marL="0" indent="0">
               <a:buNone/>
             </a:pPr>
             <a:r>
@@ -7297,7 +7062,7 @@
           <a:bodyPr wrap="square" lIns="0" tIns="0" rIns="0" bIns="0" rtlCol="0" anchor="ctr"/>
           <a:lstStyle/>
           <a:p>
-            <a:pPr indent="0" marL="0">
+            <a:pPr marL="0" indent="0">
               <a:buNone/>
             </a:pPr>
             <a:r>
@@ -7311,9 +7076,6 @@
               </a:rPr>
               <a:t>def </a:t>
             </a:r>
-            <a:pPr indent="0" marL="0">
-              <a:buNone/>
-            </a:pPr>
             <a:r>
               <a:rPr lang="en-US" sz="1000" dirty="0">
                 <a:solidFill>
@@ -7350,7 +7112,7 @@
           <a:bodyPr wrap="square" lIns="0" tIns="0" rIns="0" bIns="0" rtlCol="0" anchor="ctr"/>
           <a:lstStyle/>
           <a:p>
-            <a:pPr indent="0" marL="0">
+            <a:pPr marL="0" indent="0">
               <a:buNone/>
             </a:pPr>
             <a:r>
@@ -7389,7 +7151,7 @@
           <a:bodyPr wrap="square" lIns="0" tIns="0" rIns="0" bIns="0" rtlCol="0" anchor="ctr"/>
           <a:lstStyle/>
           <a:p>
-            <a:pPr indent="0" marL="0">
+            <a:pPr marL="0" indent="0">
               <a:buNone/>
             </a:pPr>
             <a:r>
@@ -7428,7 +7190,7 @@
           <a:bodyPr wrap="square" lIns="0" tIns="0" rIns="0" bIns="0" rtlCol="0" anchor="ctr"/>
           <a:lstStyle/>
           <a:p>
-            <a:pPr indent="0" marL="0">
+            <a:pPr marL="0" indent="0">
               <a:buNone/>
             </a:pPr>
             <a:r>
@@ -7467,7 +7229,7 @@
           <a:bodyPr wrap="square" lIns="0" tIns="0" rIns="0" bIns="0" rtlCol="0" anchor="ctr"/>
           <a:lstStyle/>
           <a:p>
-            <a:pPr indent="0" marL="0">
+            <a:pPr marL="0" indent="0">
               <a:buNone/>
             </a:pPr>
             <a:r>
@@ -7481,9 +7243,6 @@
               </a:rPr>
               <a:t>    while </a:t>
             </a:r>
-            <a:pPr indent="0" marL="0">
-              <a:buNone/>
-            </a:pPr>
             <a:r>
               <a:rPr lang="en-US" sz="1000" dirty="0">
                 <a:solidFill>
@@ -7520,7 +7279,7 @@
           <a:bodyPr wrap="square" lIns="0" tIns="0" rIns="0" bIns="0" rtlCol="0" anchor="ctr"/>
           <a:lstStyle/>
           <a:p>
-            <a:pPr indent="0" marL="0">
+            <a:pPr marL="0" indent="0">
               <a:buNone/>
             </a:pPr>
             <a:r>
@@ -7559,7 +7318,7 @@
           <a:bodyPr wrap="square" lIns="0" tIns="0" rIns="0" bIns="0" rtlCol="0" anchor="ctr"/>
           <a:lstStyle/>
           <a:p>
-            <a:pPr indent="0" marL="0">
+            <a:pPr marL="0" indent="0">
               <a:buNone/>
             </a:pPr>
             <a:r>
@@ -7598,7 +7357,7 @@
           <a:bodyPr wrap="square" lIns="0" tIns="0" rIns="0" bIns="0" rtlCol="0" anchor="ctr"/>
           <a:lstStyle/>
           <a:p>
-            <a:pPr indent="0" marL="0">
+            <a:pPr marL="0" indent="0">
               <a:buNone/>
             </a:pPr>
             <a:r>
@@ -7612,9 +7371,6 @@
               </a:rPr>
               <a:t>        for </a:t>
             </a:r>
-            <a:pPr indent="0" marL="0">
-              <a:buNone/>
-            </a:pPr>
             <a:r>
               <a:rPr lang="en-US" sz="1000" dirty="0">
                 <a:solidFill>
@@ -7626,9 +7382,6 @@
               </a:rPr>
               <a:t>vizinho </a:t>
             </a:r>
-            <a:pPr indent="0" marL="0">
-              <a:buNone/>
-            </a:pPr>
             <a:r>
               <a:rPr lang="en-US" sz="1000" dirty="0">
                 <a:solidFill>
@@ -7640,9 +7393,6 @@
               </a:rPr>
               <a:t>in </a:t>
             </a:r>
-            <a:pPr indent="0" marL="0">
-              <a:buNone/>
-            </a:pPr>
             <a:r>
               <a:rPr lang="en-US" sz="1000" dirty="0">
                 <a:solidFill>
@@ -7679,7 +7429,7 @@
           <a:bodyPr wrap="square" lIns="0" tIns="0" rIns="0" bIns="0" rtlCol="0" anchor="ctr"/>
           <a:lstStyle/>
           <a:p>
-            <a:pPr indent="0" marL="0">
+            <a:pPr marL="0" indent="0">
               <a:buNone/>
             </a:pPr>
             <a:r>
@@ -7693,9 +7443,6 @@
               </a:rPr>
               <a:t>            if </a:t>
             </a:r>
-            <a:pPr indent="0" marL="0">
-              <a:buNone/>
-            </a:pPr>
             <a:r>
               <a:rPr lang="en-US" sz="1000" dirty="0">
                 <a:solidFill>
@@ -7707,9 +7454,6 @@
               </a:rPr>
               <a:t>vizinho </a:t>
             </a:r>
-            <a:pPr indent="0" marL="0">
-              <a:buNone/>
-            </a:pPr>
             <a:r>
               <a:rPr lang="en-US" sz="1000" dirty="0">
                 <a:solidFill>
@@ -7721,9 +7465,6 @@
               </a:rPr>
               <a:t>not in </a:t>
             </a:r>
-            <a:pPr indent="0" marL="0">
-              <a:buNone/>
-            </a:pPr>
             <a:r>
               <a:rPr lang="en-US" sz="1000" dirty="0">
                 <a:solidFill>
@@ -7760,7 +7501,7 @@
           <a:bodyPr wrap="square" lIns="0" tIns="0" rIns="0" bIns="0" rtlCol="0" anchor="ctr"/>
           <a:lstStyle/>
           <a:p>
-            <a:pPr indent="0" marL="0">
+            <a:pPr marL="0" indent="0">
               <a:buNone/>
             </a:pPr>
             <a:r>
@@ -7799,7 +7540,7 @@
           <a:bodyPr wrap="square" lIns="0" tIns="0" rIns="0" bIns="0" rtlCol="0" anchor="ctr"/>
           <a:lstStyle/>
           <a:p>
-            <a:pPr indent="0" marL="0">
+            <a:pPr marL="0" indent="0">
               <a:buNone/>
             </a:pPr>
             <a:r>
@@ -7838,7 +7579,7 @@
           <a:bodyPr wrap="square" lIns="0" tIns="0" rIns="0" bIns="0" rtlCol="0" anchor="ctr"/>
           <a:lstStyle/>
           <a:p>
-            <a:pPr indent="0" marL="0">
+            <a:pPr marL="0" indent="0">
               <a:buNone/>
             </a:pPr>
             <a:r>
@@ -7852,9 +7593,6 @@
               </a:rPr>
               <a:t>    return </a:t>
             </a:r>
-            <a:pPr indent="0" marL="0">
-              <a:buNone/>
-            </a:pPr>
             <a:r>
               <a:rPr lang="en-US" sz="1000" dirty="0">
                 <a:solidFill>
@@ -7891,7 +7629,7 @@
           <a:bodyPr wrap="square" lIns="0" tIns="0" rIns="0" bIns="0" rtlCol="0" anchor="ctr"/>
           <a:lstStyle/>
           <a:p>
-            <a:pPr algn="r" indent="0" marL="0">
+            <a:pPr marL="0" indent="0" algn="r">
               <a:buNone/>
             </a:pPr>
             <a:r>
@@ -7925,6 +7663,7 @@
         <a:solidFill>
           <a:srgbClr val="FFFFFF"/>
         </a:solidFill>
+        <a:effectLst/>
       </p:bgPr>
     </p:bg>
     <p:spTree>
@@ -7962,11 +7701,11 @@
           <a:bodyPr wrap="square" lIns="0" tIns="0" rIns="0" bIns="0" rtlCol="0" anchor="ctr"/>
           <a:lstStyle/>
           <a:p>
-            <a:pPr algn="l" indent="0" marL="0">
-              <a:buNone/>
-            </a:pPr>
-            <a:r>
-              <a:rPr lang="en-US" sz="1200" b="1" spc="200" kern="0" dirty="0">
+            <a:pPr marL="0" indent="0" algn="l">
+              <a:buNone/>
+            </a:pPr>
+            <a:r>
+              <a:rPr lang="en-US" sz="1200" b="1" kern="0" spc="200" dirty="0">
                 <a:solidFill>
                   <a:srgbClr val="6C4BC1"/>
                 </a:solidFill>
@@ -8001,7 +7740,7 @@
           <a:bodyPr wrap="square" lIns="0" tIns="0" rIns="0" bIns="0" rtlCol="0" anchor="ctr"/>
           <a:lstStyle/>
           <a:p>
-            <a:pPr indent="0" marL="0">
+            <a:pPr marL="0" indent="0">
               <a:buNone/>
             </a:pPr>
             <a:r>
@@ -8040,7 +7779,7 @@
           <a:bodyPr wrap="square" lIns="0" tIns="0" rIns="0" bIns="0" rtlCol="0" anchor="ctr"/>
           <a:lstStyle/>
           <a:p>
-            <a:pPr indent="0" marL="0">
+            <a:pPr marL="0" indent="0">
               <a:buNone/>
             </a:pPr>
             <a:r>
@@ -8080,263 +7819,7 @@
       </p:sp>
       <p:pic>
         <p:nvPicPr>
-          <p:cNvPr id="6" name="Image 0" descr="preencoded.png">    </p:cNvPr>
-          <p:cNvPicPr>
-            <a:picLocks noChangeAspect="1"/>
-          </p:cNvPicPr>
-          <p:nvPr/>
-        </p:nvPicPr>
-        <p:blipFill>
-          <a:blip r:embed="rId1"/>
-          <a:stretch>
-            <a:fillRect/>
-          </a:stretch>
-        </p:blipFill>
-        <p:spPr>
-          <a:xfrm>
-            <a:off x="786384" y="2478024"/>
-            <a:ext cx="310896" cy="310896"/>
-          </a:xfrm>
-          <a:prstGeom prst="rect">
-            <a:avLst/>
-          </a:prstGeom>
-        </p:spPr>
-      </p:pic>
-      <p:sp>
-        <p:nvSpPr>
-          <p:cNvPr id="7" name="Text 4"/>
-          <p:cNvSpPr/>
-          <p:nvPr/>
-        </p:nvSpPr>
-        <p:spPr>
-          <a:xfrm>
-            <a:off x="1508760" y="2286000"/>
-            <a:ext cx="9692640" cy="457200"/>
-          </a:xfrm>
-          <a:prstGeom prst="rect">
-            <a:avLst/>
-          </a:prstGeom>
-          <a:noFill/>
-          <a:ln/>
-        </p:spPr>
-        <p:txBody>
-          <a:bodyPr wrap="square" lIns="0" tIns="0" rIns="0" bIns="0" rtlCol="0" anchor="ctr"/>
-          <a:lstStyle/>
-          <a:p>
-            <a:pPr indent="0" marL="0">
-              <a:lnSpc>
-                <a:spcPts val="1900"/>
-              </a:lnSpc>
-              <a:buNone/>
-            </a:pPr>
-            <a:r>
-              <a:rPr lang="en-US" sz="1650" b="1" dirty="0">
-                <a:solidFill>
-                  <a:srgbClr val="1B1B2F"/>
-                </a:solidFill>
-                <a:latin typeface="Calibri" pitchFamily="34" charset="0"/>
-                <a:ea typeface="Calibri" pitchFamily="34" charset="-122"/>
-                <a:cs typeface="Calibri" pitchFamily="34" charset="-120"/>
-              </a:rPr>
-              <a:t>Formalizar notação O com mais rigor</a:t>
-            </a:r>
-            <a:endParaRPr lang="en-US" sz="1650" dirty="0"/>
-          </a:p>
-        </p:txBody>
-      </p:sp>
-      <p:sp>
-        <p:nvSpPr>
-          <p:cNvPr id="8" name="Text 5"/>
-          <p:cNvSpPr/>
-          <p:nvPr/>
-        </p:nvSpPr>
-        <p:spPr>
-          <a:xfrm>
-            <a:off x="1508760" y="2752344"/>
-            <a:ext cx="9692640" cy="457200"/>
-          </a:xfrm>
-          <a:prstGeom prst="rect">
-            <a:avLst/>
-          </a:prstGeom>
-          <a:noFill/>
-          <a:ln/>
-        </p:spPr>
-        <p:txBody>
-          <a:bodyPr wrap="square" lIns="0" tIns="0" rIns="0" bIns="0" rtlCol="0" anchor="ctr"/>
-          <a:lstStyle/>
-          <a:p>
-            <a:pPr indent="0" marL="0">
-              <a:lnSpc>
-                <a:spcPts val="1700"/>
-              </a:lnSpc>
-              <a:buNone/>
-            </a:pPr>
-            <a:r>
-              <a:rPr lang="en-US" sz="1300" dirty="0">
-                <a:solidFill>
-                  <a:srgbClr val="6B6B80"/>
-                </a:solidFill>
-                <a:latin typeface="Calibri" pitchFamily="34" charset="0"/>
-                <a:ea typeface="Calibri" pitchFamily="34" charset="-122"/>
-                <a:cs typeface="Calibri" pitchFamily="34" charset="-120"/>
-              </a:rPr>
-              <a:t>Limites, casos melhor/médio/pior — o que hoje vimos de forma intuitiva.</a:t>
-            </a:r>
-            <a:endParaRPr lang="en-US" sz="1300" dirty="0"/>
-          </a:p>
-        </p:txBody>
-      </p:sp>
-      <p:sp>
-        <p:nvSpPr>
-          <p:cNvPr id="9" name="Shape 6"/>
-          <p:cNvSpPr/>
-          <p:nvPr/>
-        </p:nvSpPr>
-        <p:spPr>
-          <a:xfrm>
-            <a:off x="640080" y="3657600"/>
-            <a:ext cx="603504" cy="603504"/>
-          </a:xfrm>
-          <a:prstGeom prst="ellipse">
-            <a:avLst/>
-          </a:prstGeom>
-          <a:solidFill>
-            <a:srgbClr val="6C4BC1"/>
-          </a:solidFill>
-          <a:ln/>
-        </p:spPr>
-      </p:sp>
-      <p:pic>
-        <p:nvPicPr>
-          <p:cNvPr id="10" name="Image 1" descr="preencoded.png">    </p:cNvPr>
-          <p:cNvPicPr>
-            <a:picLocks noChangeAspect="1"/>
-          </p:cNvPicPr>
-          <p:nvPr/>
-        </p:nvPicPr>
-        <p:blipFill>
-          <a:blip r:embed="rId2"/>
-          <a:stretch>
-            <a:fillRect/>
-          </a:stretch>
-        </p:blipFill>
-        <p:spPr>
-          <a:xfrm>
-            <a:off x="786384" y="3803904"/>
-            <a:ext cx="310896" cy="310896"/>
-          </a:xfrm>
-          <a:prstGeom prst="rect">
-            <a:avLst/>
-          </a:prstGeom>
-        </p:spPr>
-      </p:pic>
-      <p:sp>
-        <p:nvSpPr>
-          <p:cNvPr id="11" name="Text 7"/>
-          <p:cNvSpPr/>
-          <p:nvPr/>
-        </p:nvSpPr>
-        <p:spPr>
-          <a:xfrm>
-            <a:off x="1508760" y="3611880"/>
-            <a:ext cx="9692640" cy="457200"/>
-          </a:xfrm>
-          <a:prstGeom prst="rect">
-            <a:avLst/>
-          </a:prstGeom>
-          <a:noFill/>
-          <a:ln/>
-        </p:spPr>
-        <p:txBody>
-          <a:bodyPr wrap="square" lIns="0" tIns="0" rIns="0" bIns="0" rtlCol="0" anchor="ctr"/>
-          <a:lstStyle/>
-          <a:p>
-            <a:pPr indent="0" marL="0">
-              <a:lnSpc>
-                <a:spcPts val="1900"/>
-              </a:lnSpc>
-              <a:buNone/>
-            </a:pPr>
-            <a:r>
-              <a:rPr lang="en-US" sz="1650" b="1" dirty="0">
-                <a:solidFill>
-                  <a:srgbClr val="1B1B2F"/>
-                </a:solidFill>
-                <a:latin typeface="Calibri" pitchFamily="34" charset="0"/>
-                <a:ea typeface="Calibri" pitchFamily="34" charset="-122"/>
-                <a:cs typeface="Calibri" pitchFamily="34" charset="-120"/>
-              </a:rPr>
-              <a:t>Implementar como código de produção</a:t>
-            </a:r>
-            <a:endParaRPr lang="en-US" sz="1650" dirty="0"/>
-          </a:p>
-        </p:txBody>
-      </p:sp>
-      <p:sp>
-        <p:nvSpPr>
-          <p:cNvPr id="12" name="Text 8"/>
-          <p:cNvSpPr/>
-          <p:nvPr/>
-        </p:nvSpPr>
-        <p:spPr>
-          <a:xfrm>
-            <a:off x="1508760" y="4078224"/>
-            <a:ext cx="9692640" cy="457200"/>
-          </a:xfrm>
-          <a:prstGeom prst="rect">
-            <a:avLst/>
-          </a:prstGeom>
-          <a:noFill/>
-          <a:ln/>
-        </p:spPr>
-        <p:txBody>
-          <a:bodyPr wrap="square" lIns="0" tIns="0" rIns="0" bIns="0" rtlCol="0" anchor="ctr"/>
-          <a:lstStyle/>
-          <a:p>
-            <a:pPr indent="0" marL="0">
-              <a:lnSpc>
-                <a:spcPts val="1700"/>
-              </a:lnSpc>
-              <a:buNone/>
-            </a:pPr>
-            <a:r>
-              <a:rPr lang="en-US" sz="1300" dirty="0">
-                <a:solidFill>
-                  <a:srgbClr val="6B6B80"/>
-                </a:solidFill>
-                <a:latin typeface="Calibri" pitchFamily="34" charset="0"/>
-                <a:ea typeface="Calibri" pitchFamily="34" charset="-122"/>
-                <a:cs typeface="Calibri" pitchFamily="34" charset="-120"/>
-              </a:rPr>
-              <a:t>Pilhas, filas, listas ligadas, árvores balanceadas e grafos, não só conceito.</a:t>
-            </a:r>
-            <a:endParaRPr lang="en-US" sz="1300" dirty="0"/>
-          </a:p>
-        </p:txBody>
-      </p:sp>
-      <p:sp>
-        <p:nvSpPr>
-          <p:cNvPr id="13" name="Shape 9"/>
-          <p:cNvSpPr/>
-          <p:nvPr/>
-        </p:nvSpPr>
-        <p:spPr>
-          <a:xfrm>
-            <a:off x="640080" y="4983480"/>
-            <a:ext cx="603504" cy="603504"/>
-          </a:xfrm>
-          <a:prstGeom prst="ellipse">
-            <a:avLst/>
-          </a:prstGeom>
-          <a:solidFill>
-            <a:srgbClr val="6C4BC1"/>
-          </a:solidFill>
-          <a:ln/>
-        </p:spPr>
-      </p:sp>
-      <p:pic>
-        <p:nvPicPr>
-          <p:cNvPr id="14" name="Image 2" descr="preencoded.png">    </p:cNvPr>
+          <p:cNvPr id="6" name="Image 0" descr="preencoded.png"/>
           <p:cNvPicPr>
             <a:picLocks noChangeAspect="1"/>
           </p:cNvPicPr>
@@ -8350,7 +7833,7 @@
         </p:blipFill>
         <p:spPr>
           <a:xfrm>
-            <a:off x="786384" y="5129784"/>
+            <a:off x="786384" y="2478024"/>
             <a:ext cx="310896" cy="310896"/>
           </a:xfrm>
           <a:prstGeom prst="rect">
@@ -8360,13 +7843,13 @@
       </p:pic>
       <p:sp>
         <p:nvSpPr>
-          <p:cNvPr id="15" name="Text 10"/>
-          <p:cNvSpPr/>
-          <p:nvPr/>
-        </p:nvSpPr>
-        <p:spPr>
-          <a:xfrm>
-            <a:off x="1508760" y="4937760"/>
+          <p:cNvPr id="7" name="Text 4"/>
+          <p:cNvSpPr/>
+          <p:nvPr/>
+        </p:nvSpPr>
+        <p:spPr>
+          <a:xfrm>
+            <a:off x="1508760" y="2286000"/>
             <a:ext cx="9692640" cy="457200"/>
           </a:xfrm>
           <a:prstGeom prst="rect">
@@ -8379,7 +7862,7 @@
           <a:bodyPr wrap="square" lIns="0" tIns="0" rIns="0" bIns="0" rtlCol="0" anchor="ctr"/>
           <a:lstStyle/>
           <a:p>
-            <a:pPr indent="0" marL="0">
+            <a:pPr marL="0" indent="0">
               <a:lnSpc>
                 <a:spcPts val="1900"/>
               </a:lnSpc>
@@ -8394,7 +7877,7 @@
                 <a:ea typeface="Calibri" pitchFamily="34" charset="-122"/>
                 <a:cs typeface="Calibri" pitchFamily="34" charset="-120"/>
               </a:rPr>
-              <a:t>Provar que um algoritmo está correto</a:t>
+              <a:t>Formalizar notação O com mais rigor</a:t>
             </a:r>
             <a:endParaRPr lang="en-US" sz="1650" dirty="0"/>
           </a:p>
@@ -8402,13 +7885,13 @@
       </p:sp>
       <p:sp>
         <p:nvSpPr>
-          <p:cNvPr id="16" name="Text 11"/>
-          <p:cNvSpPr/>
-          <p:nvPr/>
-        </p:nvSpPr>
-        <p:spPr>
-          <a:xfrm>
-            <a:off x="1508760" y="5404104"/>
+          <p:cNvPr id="8" name="Text 5"/>
+          <p:cNvSpPr/>
+          <p:nvPr/>
+        </p:nvSpPr>
+        <p:spPr>
+          <a:xfrm>
+            <a:off x="1508760" y="2752344"/>
             <a:ext cx="9692640" cy="457200"/>
           </a:xfrm>
           <a:prstGeom prst="rect">
@@ -8421,7 +7904,7 @@
           <a:bodyPr wrap="square" lIns="0" tIns="0" rIns="0" bIns="0" rtlCol="0" anchor="ctr"/>
           <a:lstStyle/>
           <a:p>
-            <a:pPr indent="0" marL="0">
+            <a:pPr marL="0" indent="0">
               <a:lnSpc>
                 <a:spcPts val="1700"/>
               </a:lnSpc>
@@ -8436,6 +7919,262 @@
                 <a:ea typeface="Calibri" pitchFamily="34" charset="-122"/>
                 <a:cs typeface="Calibri" pitchFamily="34" charset="-120"/>
               </a:rPr>
+              <a:t>Limites, casos melhor/médio/pior — o que hoje vimos de forma intuitiva.</a:t>
+            </a:r>
+            <a:endParaRPr lang="en-US" sz="1300" dirty="0"/>
+          </a:p>
+        </p:txBody>
+      </p:sp>
+      <p:sp>
+        <p:nvSpPr>
+          <p:cNvPr id="9" name="Shape 6"/>
+          <p:cNvSpPr/>
+          <p:nvPr/>
+        </p:nvSpPr>
+        <p:spPr>
+          <a:xfrm>
+            <a:off x="640080" y="3657600"/>
+            <a:ext cx="603504" cy="603504"/>
+          </a:xfrm>
+          <a:prstGeom prst="ellipse">
+            <a:avLst/>
+          </a:prstGeom>
+          <a:solidFill>
+            <a:srgbClr val="6C4BC1"/>
+          </a:solidFill>
+          <a:ln/>
+        </p:spPr>
+      </p:sp>
+      <p:pic>
+        <p:nvPicPr>
+          <p:cNvPr id="10" name="Image 1" descr="preencoded.png"/>
+          <p:cNvPicPr>
+            <a:picLocks noChangeAspect="1"/>
+          </p:cNvPicPr>
+          <p:nvPr/>
+        </p:nvPicPr>
+        <p:blipFill>
+          <a:blip r:embed="rId4"/>
+          <a:stretch>
+            <a:fillRect/>
+          </a:stretch>
+        </p:blipFill>
+        <p:spPr>
+          <a:xfrm>
+            <a:off x="786384" y="3803904"/>
+            <a:ext cx="310896" cy="310896"/>
+          </a:xfrm>
+          <a:prstGeom prst="rect">
+            <a:avLst/>
+          </a:prstGeom>
+        </p:spPr>
+      </p:pic>
+      <p:sp>
+        <p:nvSpPr>
+          <p:cNvPr id="11" name="Text 7"/>
+          <p:cNvSpPr/>
+          <p:nvPr/>
+        </p:nvSpPr>
+        <p:spPr>
+          <a:xfrm>
+            <a:off x="1508760" y="3611880"/>
+            <a:ext cx="9692640" cy="457200"/>
+          </a:xfrm>
+          <a:prstGeom prst="rect">
+            <a:avLst/>
+          </a:prstGeom>
+          <a:noFill/>
+          <a:ln/>
+        </p:spPr>
+        <p:txBody>
+          <a:bodyPr wrap="square" lIns="0" tIns="0" rIns="0" bIns="0" rtlCol="0" anchor="ctr"/>
+          <a:lstStyle/>
+          <a:p>
+            <a:pPr marL="0" indent="0">
+              <a:lnSpc>
+                <a:spcPts val="1900"/>
+              </a:lnSpc>
+              <a:buNone/>
+            </a:pPr>
+            <a:r>
+              <a:rPr lang="en-US" sz="1650" b="1" dirty="0">
+                <a:solidFill>
+                  <a:srgbClr val="1B1B2F"/>
+                </a:solidFill>
+                <a:latin typeface="Calibri" pitchFamily="34" charset="0"/>
+                <a:ea typeface="Calibri" pitchFamily="34" charset="-122"/>
+                <a:cs typeface="Calibri" pitchFamily="34" charset="-120"/>
+              </a:rPr>
+              <a:t>Implementar como código de produção</a:t>
+            </a:r>
+            <a:endParaRPr lang="en-US" sz="1650" dirty="0"/>
+          </a:p>
+        </p:txBody>
+      </p:sp>
+      <p:sp>
+        <p:nvSpPr>
+          <p:cNvPr id="12" name="Text 8"/>
+          <p:cNvSpPr/>
+          <p:nvPr/>
+        </p:nvSpPr>
+        <p:spPr>
+          <a:xfrm>
+            <a:off x="1508760" y="4078224"/>
+            <a:ext cx="9692640" cy="457200"/>
+          </a:xfrm>
+          <a:prstGeom prst="rect">
+            <a:avLst/>
+          </a:prstGeom>
+          <a:noFill/>
+          <a:ln/>
+        </p:spPr>
+        <p:txBody>
+          <a:bodyPr wrap="square" lIns="0" tIns="0" rIns="0" bIns="0" rtlCol="0" anchor="ctr"/>
+          <a:lstStyle/>
+          <a:p>
+            <a:pPr marL="0" indent="0">
+              <a:lnSpc>
+                <a:spcPts val="1700"/>
+              </a:lnSpc>
+              <a:buNone/>
+            </a:pPr>
+            <a:r>
+              <a:rPr lang="en-US" sz="1300" dirty="0">
+                <a:solidFill>
+                  <a:srgbClr val="6B6B80"/>
+                </a:solidFill>
+                <a:latin typeface="Calibri" pitchFamily="34" charset="0"/>
+                <a:ea typeface="Calibri" pitchFamily="34" charset="-122"/>
+                <a:cs typeface="Calibri" pitchFamily="34" charset="-120"/>
+              </a:rPr>
+              <a:t>Pilhas, filas, listas ligadas, árvores balanceadas e grafos, não só conceito.</a:t>
+            </a:r>
+            <a:endParaRPr lang="en-US" sz="1300" dirty="0"/>
+          </a:p>
+        </p:txBody>
+      </p:sp>
+      <p:sp>
+        <p:nvSpPr>
+          <p:cNvPr id="13" name="Shape 9"/>
+          <p:cNvSpPr/>
+          <p:nvPr/>
+        </p:nvSpPr>
+        <p:spPr>
+          <a:xfrm>
+            <a:off x="640080" y="4983480"/>
+            <a:ext cx="603504" cy="603504"/>
+          </a:xfrm>
+          <a:prstGeom prst="ellipse">
+            <a:avLst/>
+          </a:prstGeom>
+          <a:solidFill>
+            <a:srgbClr val="6C4BC1"/>
+          </a:solidFill>
+          <a:ln/>
+        </p:spPr>
+      </p:sp>
+      <p:pic>
+        <p:nvPicPr>
+          <p:cNvPr id="14" name="Image 2" descr="preencoded.png"/>
+          <p:cNvPicPr>
+            <a:picLocks noChangeAspect="1"/>
+          </p:cNvPicPr>
+          <p:nvPr/>
+        </p:nvPicPr>
+        <p:blipFill>
+          <a:blip r:embed="rId5"/>
+          <a:stretch>
+            <a:fillRect/>
+          </a:stretch>
+        </p:blipFill>
+        <p:spPr>
+          <a:xfrm>
+            <a:off x="786384" y="5129784"/>
+            <a:ext cx="310896" cy="310896"/>
+          </a:xfrm>
+          <a:prstGeom prst="rect">
+            <a:avLst/>
+          </a:prstGeom>
+        </p:spPr>
+      </p:pic>
+      <p:sp>
+        <p:nvSpPr>
+          <p:cNvPr id="15" name="Text 10"/>
+          <p:cNvSpPr/>
+          <p:nvPr/>
+        </p:nvSpPr>
+        <p:spPr>
+          <a:xfrm>
+            <a:off x="1508760" y="4937760"/>
+            <a:ext cx="9692640" cy="457200"/>
+          </a:xfrm>
+          <a:prstGeom prst="rect">
+            <a:avLst/>
+          </a:prstGeom>
+          <a:noFill/>
+          <a:ln/>
+        </p:spPr>
+        <p:txBody>
+          <a:bodyPr wrap="square" lIns="0" tIns="0" rIns="0" bIns="0" rtlCol="0" anchor="ctr"/>
+          <a:lstStyle/>
+          <a:p>
+            <a:pPr marL="0" indent="0">
+              <a:lnSpc>
+                <a:spcPts val="1900"/>
+              </a:lnSpc>
+              <a:buNone/>
+            </a:pPr>
+            <a:r>
+              <a:rPr lang="en-US" sz="1650" b="1" dirty="0">
+                <a:solidFill>
+                  <a:srgbClr val="1B1B2F"/>
+                </a:solidFill>
+                <a:latin typeface="Calibri" pitchFamily="34" charset="0"/>
+                <a:ea typeface="Calibri" pitchFamily="34" charset="-122"/>
+                <a:cs typeface="Calibri" pitchFamily="34" charset="-120"/>
+              </a:rPr>
+              <a:t>Provar que um algoritmo está correto</a:t>
+            </a:r>
+            <a:endParaRPr lang="en-US" sz="1650" dirty="0"/>
+          </a:p>
+        </p:txBody>
+      </p:sp>
+      <p:sp>
+        <p:nvSpPr>
+          <p:cNvPr id="16" name="Text 11"/>
+          <p:cNvSpPr/>
+          <p:nvPr/>
+        </p:nvSpPr>
+        <p:spPr>
+          <a:xfrm>
+            <a:off x="1508760" y="5404104"/>
+            <a:ext cx="9692640" cy="457200"/>
+          </a:xfrm>
+          <a:prstGeom prst="rect">
+            <a:avLst/>
+          </a:prstGeom>
+          <a:noFill/>
+          <a:ln/>
+        </p:spPr>
+        <p:txBody>
+          <a:bodyPr wrap="square" lIns="0" tIns="0" rIns="0" bIns="0" rtlCol="0" anchor="ctr"/>
+          <a:lstStyle/>
+          <a:p>
+            <a:pPr marL="0" indent="0">
+              <a:lnSpc>
+                <a:spcPts val="1700"/>
+              </a:lnSpc>
+              <a:buNone/>
+            </a:pPr>
+            <a:r>
+              <a:rPr lang="en-US" sz="1300" dirty="0">
+                <a:solidFill>
+                  <a:srgbClr val="6B6B80"/>
+                </a:solidFill>
+                <a:latin typeface="Calibri" pitchFamily="34" charset="0"/>
+                <a:ea typeface="Calibri" pitchFamily="34" charset="-122"/>
+                <a:cs typeface="Calibri" pitchFamily="34" charset="-120"/>
+              </a:rPr>
               <a:t>Invariantes de laço — a mesma lógica formal da Aula 04, aplicada a loops.</a:t>
             </a:r>
             <a:endParaRPr lang="en-US" sz="1300" dirty="0"/>
@@ -8463,7 +8202,7 @@
           <a:bodyPr wrap="square" lIns="0" tIns="0" rIns="0" bIns="0" rtlCol="0" anchor="ctr"/>
           <a:lstStyle/>
           <a:p>
-            <a:pPr algn="r" indent="0" marL="0">
+            <a:pPr marL="0" indent="0" algn="r">
               <a:buNone/>
             </a:pPr>
             <a:r>
@@ -8497,6 +8236,7 @@
         <a:solidFill>
           <a:srgbClr val="FFFFFF"/>
         </a:solidFill>
+        <a:effectLst/>
       </p:bgPr>
     </p:bg>
     <p:spTree>
@@ -8535,14 +8275,14 @@
       </p:sp>
       <p:pic>
         <p:nvPicPr>
-          <p:cNvPr id="3" name="Image 0" descr="preencoded.png">    </p:cNvPr>
+          <p:cNvPr id="3" name="Image 0" descr="preencoded.png"/>
           <p:cNvPicPr>
             <a:picLocks noChangeAspect="1"/>
           </p:cNvPicPr>
           <p:nvPr/>
         </p:nvPicPr>
         <p:blipFill>
-          <a:blip r:embed="rId1"/>
+          <a:blip r:embed="rId3"/>
           <a:stretch>
             <a:fillRect/>
           </a:stretch>
@@ -8578,11 +8318,11 @@
           <a:bodyPr wrap="square" lIns="0" tIns="0" rIns="0" bIns="0" rtlCol="0" anchor="ctr"/>
           <a:lstStyle/>
           <a:p>
-            <a:pPr indent="0" marL="0">
-              <a:buNone/>
-            </a:pPr>
-            <a:r>
-              <a:rPr lang="en-US" sz="1200" b="1" spc="150" kern="0" dirty="0">
+            <a:pPr marL="0" indent="0">
+              <a:buNone/>
+            </a:pPr>
+            <a:r>
+              <a:rPr lang="en-US" sz="1200" b="1" kern="0" spc="150" dirty="0">
                 <a:solidFill>
                   <a:srgbClr val="6C4BC1"/>
                 </a:solidFill>
@@ -8617,7 +8357,7 @@
           <a:bodyPr wrap="square" lIns="0" tIns="0" rIns="0" bIns="0" rtlCol="0" anchor="ctr"/>
           <a:lstStyle/>
           <a:p>
-            <a:pPr indent="0" marL="0">
+            <a:pPr marL="0" indent="0">
               <a:buNone/>
             </a:pPr>
             <a:r>
@@ -8656,7 +8396,7 @@
           <a:bodyPr wrap="square" lIns="0" tIns="0" rIns="0" bIns="0" rtlCol="0" anchor="ctr"/>
           <a:lstStyle/>
           <a:p>
-            <a:pPr indent="0" marL="0">
+            <a:pPr marL="0" indent="0">
               <a:lnSpc>
                 <a:spcPts val="2000"/>
               </a:lnSpc>
@@ -8790,7 +8530,7 @@
           <a:bodyPr wrap="square" lIns="0" tIns="0" rIns="0" bIns="0" rtlCol="0" anchor="ctr"/>
           <a:lstStyle/>
           <a:p>
-            <a:pPr algn="r" indent="0" marL="0">
+            <a:pPr marL="0" indent="0" algn="r">
               <a:buNone/>
             </a:pPr>
             <a:r>
@@ -8824,6 +8564,7 @@
         <a:solidFill>
           <a:srgbClr val="FFFFFF"/>
         </a:solidFill>
+        <a:effectLst/>
       </p:bgPr>
     </p:bg>
     <p:spTree>
@@ -8861,11 +8602,11 @@
           <a:bodyPr wrap="square" lIns="0" tIns="0" rIns="0" bIns="0" rtlCol="0" anchor="ctr"/>
           <a:lstStyle/>
           <a:p>
-            <a:pPr algn="l" indent="0" marL="0">
-              <a:buNone/>
-            </a:pPr>
-            <a:r>
-              <a:rPr lang="en-US" sz="1200" b="1" spc="200" kern="0" dirty="0">
+            <a:pPr marL="0" indent="0" algn="l">
+              <a:buNone/>
+            </a:pPr>
+            <a:r>
+              <a:rPr lang="en-US" sz="1200" b="1" kern="0" spc="200" dirty="0">
                 <a:solidFill>
                   <a:srgbClr val="6C4BC1"/>
                 </a:solidFill>
@@ -8900,7 +8641,7 @@
           <a:bodyPr wrap="square" lIns="0" tIns="0" rIns="0" bIns="0" rtlCol="0" anchor="ctr"/>
           <a:lstStyle/>
           <a:p>
-            <a:pPr indent="0" marL="0">
+            <a:pPr marL="0" indent="0">
               <a:buNone/>
             </a:pPr>
             <a:r>
@@ -8939,7 +8680,7 @@
           <a:bodyPr wrap="square" lIns="0" tIns="0" rIns="0" bIns="0" rtlCol="0" anchor="ctr"/>
           <a:lstStyle/>
           <a:p>
-            <a:pPr indent="0" marL="0">
+            <a:pPr marL="0" indent="0">
               <a:buNone/>
             </a:pPr>
             <a:r>
@@ -9001,307 +8742,7 @@
       </p:sp>
       <p:pic>
         <p:nvPicPr>
-          <p:cNvPr id="7" name="Image 0" descr="preencoded.png">    </p:cNvPr>
-          <p:cNvPicPr>
-            <a:picLocks noChangeAspect="1"/>
-          </p:cNvPicPr>
-          <p:nvPr/>
-        </p:nvPicPr>
-        <p:blipFill>
-          <a:blip r:embed="rId1"/>
-          <a:stretch>
-            <a:fillRect/>
-          </a:stretch>
-        </p:blipFill>
-        <p:spPr>
-          <a:xfrm>
-            <a:off x="1060704" y="2478024"/>
-            <a:ext cx="301752" cy="301752"/>
-          </a:xfrm>
-          <a:prstGeom prst="rect">
-            <a:avLst/>
-          </a:prstGeom>
-        </p:spPr>
-      </p:pic>
-      <p:sp>
-        <p:nvSpPr>
-          <p:cNvPr id="8" name="Text 5"/>
-          <p:cNvSpPr/>
-          <p:nvPr/>
-        </p:nvSpPr>
-        <p:spPr>
-          <a:xfrm>
-            <a:off x="914400" y="3246120"/>
-            <a:ext cx="2990088" cy="502920"/>
-          </a:xfrm>
-          <a:prstGeom prst="rect">
-            <a:avLst/>
-          </a:prstGeom>
-          <a:noFill/>
-          <a:ln/>
-        </p:spPr>
-        <p:txBody>
-          <a:bodyPr wrap="square" lIns="0" tIns="0" rIns="0" bIns="0" rtlCol="0" anchor="ctr"/>
-          <a:lstStyle/>
-          <a:p>
-            <a:pPr indent="0" marL="0">
-              <a:lnSpc>
-                <a:spcPts val="1700"/>
-              </a:lnSpc>
-              <a:buNone/>
-            </a:pPr>
-            <a:r>
-              <a:rPr lang="en-US" sz="1400" b="1" dirty="0">
-                <a:solidFill>
-                  <a:srgbClr val="1B1B2F"/>
-                </a:solidFill>
-                <a:latin typeface="Calibri" pitchFamily="34" charset="0"/>
-                <a:ea typeface="Calibri" pitchFamily="34" charset="-122"/>
-                <a:cs typeface="Calibri" pitchFamily="34" charset="-120"/>
-              </a:rPr>
-              <a:t>CORMEN, T. H. et al.</a:t>
-            </a:r>
-            <a:endParaRPr lang="en-US" sz="1400" dirty="0"/>
-          </a:p>
-        </p:txBody>
-      </p:sp>
-      <p:sp>
-        <p:nvSpPr>
-          <p:cNvPr id="9" name="Text 6"/>
-          <p:cNvSpPr/>
-          <p:nvPr/>
-        </p:nvSpPr>
-        <p:spPr>
-          <a:xfrm>
-            <a:off x="914400" y="3886200"/>
-            <a:ext cx="2990088" cy="1920240"/>
-          </a:xfrm>
-          <a:prstGeom prst="rect">
-            <a:avLst/>
-          </a:prstGeom>
-          <a:noFill/>
-          <a:ln/>
-        </p:spPr>
-        <p:txBody>
-          <a:bodyPr wrap="square" lIns="0" tIns="0" rIns="0" bIns="0" rtlCol="0" anchor="ctr"/>
-          <a:lstStyle/>
-          <a:p>
-            <a:pPr indent="0" marL="0">
-              <a:lnSpc>
-                <a:spcPts val="1700"/>
-              </a:lnSpc>
-              <a:buNone/>
-            </a:pPr>
-            <a:r>
-              <a:rPr lang="en-US" sz="1250" dirty="0">
-                <a:solidFill>
-                  <a:srgbClr val="6B6B80"/>
-                </a:solidFill>
-                <a:latin typeface="Calibri" pitchFamily="34" charset="0"/>
-                <a:ea typeface="Calibri" pitchFamily="34" charset="-122"/>
-                <a:cs typeface="Calibri" pitchFamily="34" charset="-120"/>
-              </a:rPr>
-              <a:t>Algoritmos: Teoria e Prática (CLRS). Elsevier — caps. introdutórios sobre notação assintótica e análise de algoritmos.</a:t>
-            </a:r>
-            <a:endParaRPr lang="en-US" sz="1250" dirty="0"/>
-          </a:p>
-        </p:txBody>
-      </p:sp>
-      <p:sp>
-        <p:nvSpPr>
-          <p:cNvPr id="10" name="Shape 7"/>
-          <p:cNvSpPr/>
-          <p:nvPr/>
-        </p:nvSpPr>
-        <p:spPr>
-          <a:xfrm>
-            <a:off x="4379976" y="2057400"/>
-            <a:ext cx="3538728" cy="4023360"/>
-          </a:xfrm>
-          <a:prstGeom prst="roundRect">
-            <a:avLst>
-              <a:gd name="adj" fmla="val 3101"/>
-            </a:avLst>
-          </a:prstGeom>
-          <a:solidFill>
-            <a:srgbClr val="F3F1FB"/>
-          </a:solidFill>
-          <a:ln/>
-        </p:spPr>
-      </p:sp>
-      <p:sp>
-        <p:nvSpPr>
-          <p:cNvPr id="11" name="Shape 8"/>
-          <p:cNvSpPr/>
-          <p:nvPr/>
-        </p:nvSpPr>
-        <p:spPr>
-          <a:xfrm>
-            <a:off x="4654296" y="2331720"/>
-            <a:ext cx="594360" cy="594360"/>
-          </a:xfrm>
-          <a:prstGeom prst="ellipse">
-            <a:avLst/>
-          </a:prstGeom>
-          <a:solidFill>
-            <a:srgbClr val="6C4BC1"/>
-          </a:solidFill>
-          <a:ln/>
-        </p:spPr>
-      </p:sp>
-      <p:pic>
-        <p:nvPicPr>
-          <p:cNvPr id="12" name="Image 1" descr="preencoded.png">    </p:cNvPr>
-          <p:cNvPicPr>
-            <a:picLocks noChangeAspect="1"/>
-          </p:cNvPicPr>
-          <p:nvPr/>
-        </p:nvPicPr>
-        <p:blipFill>
-          <a:blip r:embed="rId2"/>
-          <a:stretch>
-            <a:fillRect/>
-          </a:stretch>
-        </p:blipFill>
-        <p:spPr>
-          <a:xfrm>
-            <a:off x="4800600" y="2478024"/>
-            <a:ext cx="301752" cy="301752"/>
-          </a:xfrm>
-          <a:prstGeom prst="rect">
-            <a:avLst/>
-          </a:prstGeom>
-        </p:spPr>
-      </p:pic>
-      <p:sp>
-        <p:nvSpPr>
-          <p:cNvPr id="13" name="Text 9"/>
-          <p:cNvSpPr/>
-          <p:nvPr/>
-        </p:nvSpPr>
-        <p:spPr>
-          <a:xfrm>
-            <a:off x="4654296" y="3246120"/>
-            <a:ext cx="2990088" cy="502920"/>
-          </a:xfrm>
-          <a:prstGeom prst="rect">
-            <a:avLst/>
-          </a:prstGeom>
-          <a:noFill/>
-          <a:ln/>
-        </p:spPr>
-        <p:txBody>
-          <a:bodyPr wrap="square" lIns="0" tIns="0" rIns="0" bIns="0" rtlCol="0" anchor="ctr"/>
-          <a:lstStyle/>
-          <a:p>
-            <a:pPr indent="0" marL="0">
-              <a:lnSpc>
-                <a:spcPts val="1700"/>
-              </a:lnSpc>
-              <a:buNone/>
-            </a:pPr>
-            <a:r>
-              <a:rPr lang="en-US" sz="1400" b="1" dirty="0">
-                <a:solidFill>
-                  <a:srgbClr val="1B1B2F"/>
-                </a:solidFill>
-                <a:latin typeface="Calibri" pitchFamily="34" charset="0"/>
-                <a:ea typeface="Calibri" pitchFamily="34" charset="-122"/>
-                <a:cs typeface="Calibri" pitchFamily="34" charset="-120"/>
-              </a:rPr>
-              <a:t>GOODRICH, M. T.; TAMASSIA, R.</a:t>
-            </a:r>
-            <a:endParaRPr lang="en-US" sz="1400" dirty="0"/>
-          </a:p>
-        </p:txBody>
-      </p:sp>
-      <p:sp>
-        <p:nvSpPr>
-          <p:cNvPr id="14" name="Text 10"/>
-          <p:cNvSpPr/>
-          <p:nvPr/>
-        </p:nvSpPr>
-        <p:spPr>
-          <a:xfrm>
-            <a:off x="4654296" y="3886200"/>
-            <a:ext cx="2990088" cy="1920240"/>
-          </a:xfrm>
-          <a:prstGeom prst="rect">
-            <a:avLst/>
-          </a:prstGeom>
-          <a:noFill/>
-          <a:ln/>
-        </p:spPr>
-        <p:txBody>
-          <a:bodyPr wrap="square" lIns="0" tIns="0" rIns="0" bIns="0" rtlCol="0" anchor="ctr"/>
-          <a:lstStyle/>
-          <a:p>
-            <a:pPr indent="0" marL="0">
-              <a:lnSpc>
-                <a:spcPts val="1700"/>
-              </a:lnSpc>
-              <a:buNone/>
-            </a:pPr>
-            <a:r>
-              <a:rPr lang="en-US" sz="1250" dirty="0">
-                <a:solidFill>
-                  <a:srgbClr val="6B6B80"/>
-                </a:solidFill>
-                <a:latin typeface="Calibri" pitchFamily="34" charset="0"/>
-                <a:ea typeface="Calibri" pitchFamily="34" charset="-122"/>
-                <a:cs typeface="Calibri" pitchFamily="34" charset="-120"/>
-              </a:rPr>
-              <a:t>Estruturas de Dados e Algoritmos em Python. Bookman — visão geral de estruturas e sua análise de custo.</a:t>
-            </a:r>
-            <a:endParaRPr lang="en-US" sz="1250" dirty="0"/>
-          </a:p>
-        </p:txBody>
-      </p:sp>
-      <p:sp>
-        <p:nvSpPr>
-          <p:cNvPr id="15" name="Shape 11"/>
-          <p:cNvSpPr/>
-          <p:nvPr/>
-        </p:nvSpPr>
-        <p:spPr>
-          <a:xfrm>
-            <a:off x="8119872" y="2057400"/>
-            <a:ext cx="3538728" cy="4023360"/>
-          </a:xfrm>
-          <a:prstGeom prst="roundRect">
-            <a:avLst>
-              <a:gd name="adj" fmla="val 3101"/>
-            </a:avLst>
-          </a:prstGeom>
-          <a:solidFill>
-            <a:srgbClr val="F3F1FB"/>
-          </a:solidFill>
-          <a:ln/>
-        </p:spPr>
-      </p:sp>
-      <p:sp>
-        <p:nvSpPr>
-          <p:cNvPr id="16" name="Shape 12"/>
-          <p:cNvSpPr/>
-          <p:nvPr/>
-        </p:nvSpPr>
-        <p:spPr>
-          <a:xfrm>
-            <a:off x="8394192" y="2331720"/>
-            <a:ext cx="594360" cy="594360"/>
-          </a:xfrm>
-          <a:prstGeom prst="ellipse">
-            <a:avLst/>
-          </a:prstGeom>
-          <a:solidFill>
-            <a:srgbClr val="6C4BC1"/>
-          </a:solidFill>
-          <a:ln/>
-        </p:spPr>
-      </p:sp>
-      <p:pic>
-        <p:nvPicPr>
-          <p:cNvPr id="17" name="Image 2" descr="preencoded.png">    </p:cNvPr>
+          <p:cNvPr id="7" name="Image 0" descr="preencoded.png"/>
           <p:cNvPicPr>
             <a:picLocks noChangeAspect="1"/>
           </p:cNvPicPr>
@@ -9315,7 +8756,7 @@
         </p:blipFill>
         <p:spPr>
           <a:xfrm>
-            <a:off x="8540496" y="2478024"/>
+            <a:off x="1060704" y="2478024"/>
             <a:ext cx="301752" cy="301752"/>
           </a:xfrm>
           <a:prstGeom prst="rect">
@@ -9325,13 +8766,13 @@
       </p:pic>
       <p:sp>
         <p:nvSpPr>
-          <p:cNvPr id="18" name="Text 13"/>
-          <p:cNvSpPr/>
-          <p:nvPr/>
-        </p:nvSpPr>
-        <p:spPr>
-          <a:xfrm>
-            <a:off x="8394192" y="3246120"/>
+          <p:cNvPr id="8" name="Text 5"/>
+          <p:cNvSpPr/>
+          <p:nvPr/>
+        </p:nvSpPr>
+        <p:spPr>
+          <a:xfrm>
+            <a:off x="914400" y="3246120"/>
             <a:ext cx="2990088" cy="502920"/>
           </a:xfrm>
           <a:prstGeom prst="rect">
@@ -9344,7 +8785,7 @@
           <a:bodyPr wrap="square" lIns="0" tIns="0" rIns="0" bIns="0" rtlCol="0" anchor="ctr"/>
           <a:lstStyle/>
           <a:p>
-            <a:pPr indent="0" marL="0">
+            <a:pPr marL="0" indent="0">
               <a:lnSpc>
                 <a:spcPts val="1700"/>
               </a:lnSpc>
@@ -9359,7 +8800,7 @@
                 <a:ea typeface="Calibri" pitchFamily="34" charset="-122"/>
                 <a:cs typeface="Calibri" pitchFamily="34" charset="-120"/>
               </a:rPr>
-              <a:t>ROSEN, K. H.</a:t>
+              <a:t>CORMEN, T. H. et al.</a:t>
             </a:r>
             <a:endParaRPr lang="en-US" sz="1400" dirty="0"/>
           </a:p>
@@ -9367,13 +8808,13 @@
       </p:sp>
       <p:sp>
         <p:nvSpPr>
-          <p:cNvPr id="19" name="Text 14"/>
-          <p:cNvSpPr/>
-          <p:nvPr/>
-        </p:nvSpPr>
-        <p:spPr>
-          <a:xfrm>
-            <a:off x="8394192" y="3886200"/>
+          <p:cNvPr id="9" name="Text 6"/>
+          <p:cNvSpPr/>
+          <p:nvPr/>
+        </p:nvSpPr>
+        <p:spPr>
+          <a:xfrm>
+            <a:off x="914400" y="3886200"/>
             <a:ext cx="2990088" cy="1920240"/>
           </a:xfrm>
           <a:prstGeom prst="rect">
@@ -9386,7 +8827,7 @@
           <a:bodyPr wrap="square" lIns="0" tIns="0" rIns="0" bIns="0" rtlCol="0" anchor="ctr"/>
           <a:lstStyle/>
           <a:p>
-            <a:pPr indent="0" marL="0">
+            <a:pPr marL="0" indent="0">
               <a:lnSpc>
                 <a:spcPts val="1700"/>
               </a:lnSpc>
@@ -9401,6 +8842,306 @@
                 <a:ea typeface="Calibri" pitchFamily="34" charset="-122"/>
                 <a:cs typeface="Calibri" pitchFamily="34" charset="-120"/>
               </a:rPr>
+              <a:t>Algoritmos: Teoria e Prática (CLRS). Elsevier — caps. introdutórios sobre notação assintótica e análise de algoritmos.</a:t>
+            </a:r>
+            <a:endParaRPr lang="en-US" sz="1250" dirty="0"/>
+          </a:p>
+        </p:txBody>
+      </p:sp>
+      <p:sp>
+        <p:nvSpPr>
+          <p:cNvPr id="10" name="Shape 7"/>
+          <p:cNvSpPr/>
+          <p:nvPr/>
+        </p:nvSpPr>
+        <p:spPr>
+          <a:xfrm>
+            <a:off x="4379976" y="2057400"/>
+            <a:ext cx="3538728" cy="4023360"/>
+          </a:xfrm>
+          <a:prstGeom prst="roundRect">
+            <a:avLst>
+              <a:gd name="adj" fmla="val 3101"/>
+            </a:avLst>
+          </a:prstGeom>
+          <a:solidFill>
+            <a:srgbClr val="F3F1FB"/>
+          </a:solidFill>
+          <a:ln/>
+        </p:spPr>
+      </p:sp>
+      <p:sp>
+        <p:nvSpPr>
+          <p:cNvPr id="11" name="Shape 8"/>
+          <p:cNvSpPr/>
+          <p:nvPr/>
+        </p:nvSpPr>
+        <p:spPr>
+          <a:xfrm>
+            <a:off x="4654296" y="2331720"/>
+            <a:ext cx="594360" cy="594360"/>
+          </a:xfrm>
+          <a:prstGeom prst="ellipse">
+            <a:avLst/>
+          </a:prstGeom>
+          <a:solidFill>
+            <a:srgbClr val="6C4BC1"/>
+          </a:solidFill>
+          <a:ln/>
+        </p:spPr>
+      </p:sp>
+      <p:pic>
+        <p:nvPicPr>
+          <p:cNvPr id="12" name="Image 1" descr="preencoded.png"/>
+          <p:cNvPicPr>
+            <a:picLocks noChangeAspect="1"/>
+          </p:cNvPicPr>
+          <p:nvPr/>
+        </p:nvPicPr>
+        <p:blipFill>
+          <a:blip r:embed="rId3"/>
+          <a:stretch>
+            <a:fillRect/>
+          </a:stretch>
+        </p:blipFill>
+        <p:spPr>
+          <a:xfrm>
+            <a:off x="4800600" y="2478024"/>
+            <a:ext cx="301752" cy="301752"/>
+          </a:xfrm>
+          <a:prstGeom prst="rect">
+            <a:avLst/>
+          </a:prstGeom>
+        </p:spPr>
+      </p:pic>
+      <p:sp>
+        <p:nvSpPr>
+          <p:cNvPr id="13" name="Text 9"/>
+          <p:cNvSpPr/>
+          <p:nvPr/>
+        </p:nvSpPr>
+        <p:spPr>
+          <a:xfrm>
+            <a:off x="4654296" y="3246120"/>
+            <a:ext cx="2990088" cy="502920"/>
+          </a:xfrm>
+          <a:prstGeom prst="rect">
+            <a:avLst/>
+          </a:prstGeom>
+          <a:noFill/>
+          <a:ln/>
+        </p:spPr>
+        <p:txBody>
+          <a:bodyPr wrap="square" lIns="0" tIns="0" rIns="0" bIns="0" rtlCol="0" anchor="ctr"/>
+          <a:lstStyle/>
+          <a:p>
+            <a:pPr marL="0" indent="0">
+              <a:lnSpc>
+                <a:spcPts val="1700"/>
+              </a:lnSpc>
+              <a:buNone/>
+            </a:pPr>
+            <a:r>
+              <a:rPr lang="en-US" sz="1400" b="1" dirty="0">
+                <a:solidFill>
+                  <a:srgbClr val="1B1B2F"/>
+                </a:solidFill>
+                <a:latin typeface="Calibri" pitchFamily="34" charset="0"/>
+                <a:ea typeface="Calibri" pitchFamily="34" charset="-122"/>
+                <a:cs typeface="Calibri" pitchFamily="34" charset="-120"/>
+              </a:rPr>
+              <a:t>GOODRICH, M. T.; TAMASSIA, R.</a:t>
+            </a:r>
+            <a:endParaRPr lang="en-US" sz="1400" dirty="0"/>
+          </a:p>
+        </p:txBody>
+      </p:sp>
+      <p:sp>
+        <p:nvSpPr>
+          <p:cNvPr id="14" name="Text 10"/>
+          <p:cNvSpPr/>
+          <p:nvPr/>
+        </p:nvSpPr>
+        <p:spPr>
+          <a:xfrm>
+            <a:off x="4654296" y="3886200"/>
+            <a:ext cx="2990088" cy="1920240"/>
+          </a:xfrm>
+          <a:prstGeom prst="rect">
+            <a:avLst/>
+          </a:prstGeom>
+          <a:noFill/>
+          <a:ln/>
+        </p:spPr>
+        <p:txBody>
+          <a:bodyPr wrap="square" lIns="0" tIns="0" rIns="0" bIns="0" rtlCol="0" anchor="ctr"/>
+          <a:lstStyle/>
+          <a:p>
+            <a:pPr marL="0" indent="0">
+              <a:lnSpc>
+                <a:spcPts val="1700"/>
+              </a:lnSpc>
+              <a:buNone/>
+            </a:pPr>
+            <a:r>
+              <a:rPr lang="en-US" sz="1250" dirty="0">
+                <a:solidFill>
+                  <a:srgbClr val="6B6B80"/>
+                </a:solidFill>
+                <a:latin typeface="Calibri" pitchFamily="34" charset="0"/>
+                <a:ea typeface="Calibri" pitchFamily="34" charset="-122"/>
+                <a:cs typeface="Calibri" pitchFamily="34" charset="-120"/>
+              </a:rPr>
+              <a:t>Estruturas de Dados e Algoritmos em Python. Bookman — visão geral de estruturas e sua análise de custo.</a:t>
+            </a:r>
+            <a:endParaRPr lang="en-US" sz="1250" dirty="0"/>
+          </a:p>
+        </p:txBody>
+      </p:sp>
+      <p:sp>
+        <p:nvSpPr>
+          <p:cNvPr id="15" name="Shape 11"/>
+          <p:cNvSpPr/>
+          <p:nvPr/>
+        </p:nvSpPr>
+        <p:spPr>
+          <a:xfrm>
+            <a:off x="8119872" y="2057400"/>
+            <a:ext cx="3538728" cy="4023360"/>
+          </a:xfrm>
+          <a:prstGeom prst="roundRect">
+            <a:avLst>
+              <a:gd name="adj" fmla="val 3101"/>
+            </a:avLst>
+          </a:prstGeom>
+          <a:solidFill>
+            <a:srgbClr val="F3F1FB"/>
+          </a:solidFill>
+          <a:ln/>
+        </p:spPr>
+      </p:sp>
+      <p:sp>
+        <p:nvSpPr>
+          <p:cNvPr id="16" name="Shape 12"/>
+          <p:cNvSpPr/>
+          <p:nvPr/>
+        </p:nvSpPr>
+        <p:spPr>
+          <a:xfrm>
+            <a:off x="8394192" y="2331720"/>
+            <a:ext cx="594360" cy="594360"/>
+          </a:xfrm>
+          <a:prstGeom prst="ellipse">
+            <a:avLst/>
+          </a:prstGeom>
+          <a:solidFill>
+            <a:srgbClr val="6C4BC1"/>
+          </a:solidFill>
+          <a:ln/>
+        </p:spPr>
+      </p:sp>
+      <p:pic>
+        <p:nvPicPr>
+          <p:cNvPr id="17" name="Image 2" descr="preencoded.png"/>
+          <p:cNvPicPr>
+            <a:picLocks noChangeAspect="1"/>
+          </p:cNvPicPr>
+          <p:nvPr/>
+        </p:nvPicPr>
+        <p:blipFill>
+          <a:blip r:embed="rId3"/>
+          <a:stretch>
+            <a:fillRect/>
+          </a:stretch>
+        </p:blipFill>
+        <p:spPr>
+          <a:xfrm>
+            <a:off x="8540496" y="2478024"/>
+            <a:ext cx="301752" cy="301752"/>
+          </a:xfrm>
+          <a:prstGeom prst="rect">
+            <a:avLst/>
+          </a:prstGeom>
+        </p:spPr>
+      </p:pic>
+      <p:sp>
+        <p:nvSpPr>
+          <p:cNvPr id="18" name="Text 13"/>
+          <p:cNvSpPr/>
+          <p:nvPr/>
+        </p:nvSpPr>
+        <p:spPr>
+          <a:xfrm>
+            <a:off x="8394192" y="3246120"/>
+            <a:ext cx="2990088" cy="502920"/>
+          </a:xfrm>
+          <a:prstGeom prst="rect">
+            <a:avLst/>
+          </a:prstGeom>
+          <a:noFill/>
+          <a:ln/>
+        </p:spPr>
+        <p:txBody>
+          <a:bodyPr wrap="square" lIns="0" tIns="0" rIns="0" bIns="0" rtlCol="0" anchor="ctr"/>
+          <a:lstStyle/>
+          <a:p>
+            <a:pPr marL="0" indent="0">
+              <a:lnSpc>
+                <a:spcPts val="1700"/>
+              </a:lnSpc>
+              <a:buNone/>
+            </a:pPr>
+            <a:r>
+              <a:rPr lang="en-US" sz="1400" b="1" dirty="0">
+                <a:solidFill>
+                  <a:srgbClr val="1B1B2F"/>
+                </a:solidFill>
+                <a:latin typeface="Calibri" pitchFamily="34" charset="0"/>
+                <a:ea typeface="Calibri" pitchFamily="34" charset="-122"/>
+                <a:cs typeface="Calibri" pitchFamily="34" charset="-120"/>
+              </a:rPr>
+              <a:t>ROSEN, K. H.</a:t>
+            </a:r>
+            <a:endParaRPr lang="en-US" sz="1400" dirty="0"/>
+          </a:p>
+        </p:txBody>
+      </p:sp>
+      <p:sp>
+        <p:nvSpPr>
+          <p:cNvPr id="19" name="Text 14"/>
+          <p:cNvSpPr/>
+          <p:nvPr/>
+        </p:nvSpPr>
+        <p:spPr>
+          <a:xfrm>
+            <a:off x="8394192" y="3886200"/>
+            <a:ext cx="2990088" cy="1920240"/>
+          </a:xfrm>
+          <a:prstGeom prst="rect">
+            <a:avLst/>
+          </a:prstGeom>
+          <a:noFill/>
+          <a:ln/>
+        </p:spPr>
+        <p:txBody>
+          <a:bodyPr wrap="square" lIns="0" tIns="0" rIns="0" bIns="0" rtlCol="0" anchor="ctr"/>
+          <a:lstStyle/>
+          <a:p>
+            <a:pPr marL="0" indent="0">
+              <a:lnSpc>
+                <a:spcPts val="1700"/>
+              </a:lnSpc>
+              <a:buNone/>
+            </a:pPr>
+            <a:r>
+              <a:rPr lang="en-US" sz="1250" dirty="0">
+                <a:solidFill>
+                  <a:srgbClr val="6B6B80"/>
+                </a:solidFill>
+                <a:latin typeface="Calibri" pitchFamily="34" charset="0"/>
+                <a:ea typeface="Calibri" pitchFamily="34" charset="-122"/>
+                <a:cs typeface="Calibri" pitchFamily="34" charset="-120"/>
+              </a:rPr>
               <a:t>Matemática Discreta e suas Aplicações. 7. ed. AMGH/McGraw-Hill — cap. Algoritmos (introdução à complexidade).</a:t>
             </a:r>
             <a:endParaRPr lang="en-US" sz="1250" dirty="0"/>
@@ -9428,7 +9169,7 @@
           <a:bodyPr wrap="square" lIns="0" tIns="0" rIns="0" bIns="0" rtlCol="0" anchor="ctr"/>
           <a:lstStyle/>
           <a:p>
-            <a:pPr algn="r" indent="0" marL="0">
+            <a:pPr marL="0" indent="0" algn="r">
               <a:buNone/>
             </a:pPr>
             <a:r>
@@ -9462,6 +9203,7 @@
         <a:solidFill>
           <a:srgbClr val="FFFFFF"/>
         </a:solidFill>
+        <a:effectLst/>
       </p:bgPr>
     </p:bg>
     <p:spTree>
@@ -9499,11 +9241,11 @@
           <a:bodyPr wrap="square" lIns="0" tIns="0" rIns="0" bIns="0" rtlCol="0" anchor="ctr"/>
           <a:lstStyle/>
           <a:p>
-            <a:pPr algn="l" indent="0" marL="0">
-              <a:buNone/>
-            </a:pPr>
-            <a:r>
-              <a:rPr lang="en-US" sz="1200" b="1" spc="200" kern="0" dirty="0">
+            <a:pPr marL="0" indent="0" algn="l">
+              <a:buNone/>
+            </a:pPr>
+            <a:r>
+              <a:rPr lang="en-US" sz="1200" b="1" kern="0" spc="200" dirty="0">
                 <a:solidFill>
                   <a:srgbClr val="6C4BC1"/>
                 </a:solidFill>
@@ -9538,7 +9280,7 @@
           <a:bodyPr wrap="square" lIns="0" tIns="0" rIns="0" bIns="0" rtlCol="0" anchor="ctr"/>
           <a:lstStyle/>
           <a:p>
-            <a:pPr indent="0" marL="0">
+            <a:pPr marL="0" indent="0">
               <a:buNone/>
             </a:pPr>
             <a:r>
@@ -9600,14 +9342,14 @@
       </p:sp>
       <p:pic>
         <p:nvPicPr>
-          <p:cNvPr id="6" name="Image 0" descr="preencoded.png">    </p:cNvPr>
+          <p:cNvPr id="6" name="Image 0" descr="preencoded.png"/>
           <p:cNvPicPr>
             <a:picLocks noChangeAspect="1"/>
           </p:cNvPicPr>
           <p:nvPr/>
         </p:nvPicPr>
         <p:blipFill>
-          <a:blip r:embed="rId1"/>
+          <a:blip r:embed="rId3"/>
           <a:stretch>
             <a:fillRect/>
           </a:stretch>
@@ -9643,7 +9385,7 @@
           <a:bodyPr wrap="square" lIns="0" tIns="0" rIns="0" bIns="0" rtlCol="0" anchor="ctr"/>
           <a:lstStyle/>
           <a:p>
-            <a:pPr indent="0" marL="0">
+            <a:pPr marL="0" indent="0">
               <a:buNone/>
             </a:pPr>
             <a:r>
@@ -9682,7 +9424,7 @@
           <a:bodyPr wrap="square" lIns="0" tIns="0" rIns="0" bIns="0" rtlCol="0" anchor="ctr"/>
           <a:lstStyle/>
           <a:p>
-            <a:pPr indent="0" marL="0">
+            <a:pPr marL="0" indent="0">
               <a:lnSpc>
                 <a:spcPts val="1800"/>
               </a:lnSpc>
@@ -9696,7 +9438,7 @@
                 <a:latin typeface="Calibri" pitchFamily="34" charset="0"/>
                 <a:ea typeface="Calibri" pitchFamily="34" charset="-122"/>
                 <a:cs typeface="Calibri" pitchFamily="34" charset="-120"/>
-                <a:hlinkClick r:id="rId2" invalidUrl="" action="" tgtFrame="" tooltip="" history="1" highlightClick="0" endSnd="0">
+                <a:hlinkClick r:id="rId4">
                   <a:extLst>
                     <a:ext uri="{A12FA001-AC4F-418D-AE19-62706E023703}">
                       <ahyp:hlinkClr xmlns:ahyp="http://schemas.microsoft.com/office/drawing/2018/hyperlinkcolor" val="tx"/>
@@ -9706,63 +9448,57 @@
               </a:rPr>
               <a:t>collections.deque</a:t>
             </a:r>
-            <a:pPr indent="0" marL="0">
+            <a:r>
+              <a:rPr lang="en-US" sz="1300" dirty="0">
+                <a:solidFill>
+                  <a:srgbClr val="6B6B80"/>
+                </a:solidFill>
+                <a:latin typeface="Calibri" pitchFamily="34" charset="0"/>
+                <a:ea typeface="Calibri" pitchFamily="34" charset="-122"/>
+                <a:cs typeface="Calibri" pitchFamily="34" charset="-120"/>
+              </a:rPr>
+              <a:t> — fila eficiente, usada no BFS.</a:t>
+            </a:r>
+            <a:endParaRPr lang="en-US" sz="1300" dirty="0"/>
+          </a:p>
+        </p:txBody>
+      </p:sp>
+      <p:sp>
+        <p:nvSpPr>
+          <p:cNvPr id="9" name="Text 6"/>
+          <p:cNvSpPr/>
+          <p:nvPr/>
+        </p:nvSpPr>
+        <p:spPr>
+          <a:xfrm>
+            <a:off x="914400" y="4800600"/>
+            <a:ext cx="4663440" cy="640080"/>
+          </a:xfrm>
+          <a:prstGeom prst="rect">
+            <a:avLst/>
+          </a:prstGeom>
+          <a:noFill/>
+          <a:ln/>
+        </p:spPr>
+        <p:txBody>
+          <a:bodyPr wrap="square" lIns="0" tIns="0" rIns="0" bIns="0" rtlCol="0" anchor="ctr"/>
+          <a:lstStyle/>
+          <a:p>
+            <a:pPr marL="0" indent="0">
               <a:lnSpc>
                 <a:spcPts val="1800"/>
               </a:lnSpc>
               <a:buNone/>
             </a:pPr>
             <a:r>
-              <a:rPr lang="en-US" sz="1300" dirty="0">
+              <a:rPr lang="en-US" sz="1300" u="sng" dirty="0">
                 <a:solidFill>
                   <a:srgbClr val="6B6B80"/>
                 </a:solidFill>
                 <a:latin typeface="Calibri" pitchFamily="34" charset="0"/>
                 <a:ea typeface="Calibri" pitchFamily="34" charset="-122"/>
                 <a:cs typeface="Calibri" pitchFamily="34" charset="-120"/>
-              </a:rPr>
-              <a:t> — fila eficiente, usada no BFS.</a:t>
-            </a:r>
-            <a:endParaRPr lang="en-US" sz="1300" dirty="0"/>
-          </a:p>
-        </p:txBody>
-      </p:sp>
-      <p:sp>
-        <p:nvSpPr>
-          <p:cNvPr id="9" name="Text 6"/>
-          <p:cNvSpPr/>
-          <p:nvPr/>
-        </p:nvSpPr>
-        <p:spPr>
-          <a:xfrm>
-            <a:off x="914400" y="4800600"/>
-            <a:ext cx="4663440" cy="640080"/>
-          </a:xfrm>
-          <a:prstGeom prst="rect">
-            <a:avLst/>
-          </a:prstGeom>
-          <a:noFill/>
-          <a:ln/>
-        </p:spPr>
-        <p:txBody>
-          <a:bodyPr wrap="square" lIns="0" tIns="0" rIns="0" bIns="0" rtlCol="0" anchor="ctr"/>
-          <a:lstStyle/>
-          <a:p>
-            <a:pPr indent="0" marL="0">
-              <a:lnSpc>
-                <a:spcPts val="1800"/>
-              </a:lnSpc>
-              <a:buNone/>
-            </a:pPr>
-            <a:r>
-              <a:rPr lang="en-US" sz="1300" u="sng" dirty="0">
-                <a:solidFill>
-                  <a:srgbClr val="6B6B80"/>
-                </a:solidFill>
-                <a:latin typeface="Calibri" pitchFamily="34" charset="0"/>
-                <a:ea typeface="Calibri" pitchFamily="34" charset="-122"/>
-                <a:cs typeface="Calibri" pitchFamily="34" charset="-120"/>
-                <a:hlinkClick r:id="rId3" invalidUrl="" action="" tgtFrame="" tooltip="" history="1" highlightClick="0" endSnd="0">
+                <a:hlinkClick r:id="rId5">
                   <a:extLst>
                     <a:ext uri="{A12FA001-AC4F-418D-AE19-62706E023703}">
                       <ahyp:hlinkClr xmlns:ahyp="http://schemas.microsoft.com/office/drawing/2018/hyperlinkcolor" val="tx"/>
@@ -9772,12 +9508,6 @@
               </a:rPr>
               <a:t>Big-O Cheat Sheet</a:t>
             </a:r>
-            <a:pPr indent="0" marL="0">
-              <a:lnSpc>
-                <a:spcPts val="1800"/>
-              </a:lnSpc>
-              <a:buNone/>
-            </a:pPr>
             <a:r>
               <a:rPr lang="en-US" sz="1300" dirty="0">
                 <a:solidFill>
@@ -9837,14 +9567,14 @@
       </p:sp>
       <p:pic>
         <p:nvPicPr>
-          <p:cNvPr id="12" name="Image 1" descr="preencoded.png">    </p:cNvPr>
+          <p:cNvPr id="12" name="Image 1" descr="preencoded.png"/>
           <p:cNvPicPr>
             <a:picLocks noChangeAspect="1"/>
           </p:cNvPicPr>
           <p:nvPr/>
         </p:nvPicPr>
         <p:blipFill>
-          <a:blip r:embed="rId4"/>
+          <a:blip r:embed="rId6"/>
           <a:stretch>
             <a:fillRect/>
           </a:stretch>
@@ -9880,7 +9610,7 @@
           <a:bodyPr wrap="square" lIns="0" tIns="0" rIns="0" bIns="0" rtlCol="0" anchor="ctr"/>
           <a:lstStyle/>
           <a:p>
-            <a:pPr indent="0" marL="0">
+            <a:pPr marL="0" indent="0">
               <a:buNone/>
             </a:pPr>
             <a:r>
@@ -9919,7 +9649,7 @@
           <a:bodyPr wrap="square" lIns="0" tIns="0" rIns="0" bIns="0" rtlCol="0" anchor="ctr"/>
           <a:lstStyle/>
           <a:p>
-            <a:pPr indent="0" marL="0">
+            <a:pPr marL="0" indent="0">
               <a:lnSpc>
                 <a:spcPts val="1800"/>
               </a:lnSpc>
@@ -9933,7 +9663,7 @@
                 <a:latin typeface="Calibri" pitchFamily="34" charset="0"/>
                 <a:ea typeface="Calibri" pitchFamily="34" charset="-122"/>
                 <a:cs typeface="Calibri" pitchFamily="34" charset="-120"/>
-                <a:hlinkClick r:id="rId5" invalidUrl="" action="" tgtFrame="" tooltip="" history="1" highlightClick="0" endSnd="0">
+                <a:hlinkClick r:id="rId7">
                   <a:extLst>
                     <a:ext uri="{A12FA001-AC4F-418D-AE19-62706E023703}">
                       <ahyp:hlinkClr xmlns:ahyp="http://schemas.microsoft.com/office/drawing/2018/hyperlinkcolor" val="tx"/>
@@ -9968,7 +9698,7 @@
           <a:bodyPr wrap="square" lIns="0" tIns="0" rIns="0" bIns="0" rtlCol="0" anchor="ctr"/>
           <a:lstStyle/>
           <a:p>
-            <a:pPr indent="0" marL="0">
+            <a:pPr marL="0" indent="0">
               <a:lnSpc>
                 <a:spcPts val="1800"/>
               </a:lnSpc>
@@ -9982,7 +9712,7 @@
                 <a:latin typeface="Calibri" pitchFamily="34" charset="0"/>
                 <a:ea typeface="Calibri" pitchFamily="34" charset="-122"/>
                 <a:cs typeface="Calibri" pitchFamily="34" charset="-120"/>
-                <a:hlinkClick r:id="rId6" invalidUrl="" action="" tgtFrame="" tooltip="" history="1" highlightClick="0" endSnd="0">
+                <a:hlinkClick r:id="rId8">
                   <a:extLst>
                     <a:ext uri="{A12FA001-AC4F-418D-AE19-62706E023703}">
                       <ahyp:hlinkClr xmlns:ahyp="http://schemas.microsoft.com/office/drawing/2018/hyperlinkcolor" val="tx"/>
@@ -10017,7 +9747,7 @@
           <a:bodyPr wrap="square" lIns="0" tIns="0" rIns="0" bIns="0" rtlCol="0" anchor="ctr"/>
           <a:lstStyle/>
           <a:p>
-            <a:pPr indent="0" marL="0">
+            <a:pPr marL="0" indent="0">
               <a:lnSpc>
                 <a:spcPts val="1800"/>
               </a:lnSpc>
@@ -10031,7 +9761,7 @@
                 <a:latin typeface="Calibri" pitchFamily="34" charset="0"/>
                 <a:ea typeface="Calibri" pitchFamily="34" charset="-122"/>
                 <a:cs typeface="Calibri" pitchFamily="34" charset="-120"/>
-                <a:hlinkClick r:id="rId7" invalidUrl="" action="" tgtFrame="" tooltip="" history="1" highlightClick="0" endSnd="0">
+                <a:hlinkClick r:id="rId9">
                   <a:extLst>
                     <a:ext uri="{A12FA001-AC4F-418D-AE19-62706E023703}">
                       <ahyp:hlinkClr xmlns:ahyp="http://schemas.microsoft.com/office/drawing/2018/hyperlinkcolor" val="tx"/>
@@ -10066,7 +9796,7 @@
           <a:bodyPr wrap="square" lIns="0" tIns="0" rIns="0" bIns="0" rtlCol="0" anchor="ctr"/>
           <a:lstStyle/>
           <a:p>
-            <a:pPr algn="r" indent="0" marL="0">
+            <a:pPr marL="0" indent="0" algn="r">
               <a:buNone/>
             </a:pPr>
             <a:r>
@@ -10100,6 +9830,7 @@
         <a:solidFill>
           <a:srgbClr val="FFFFFF"/>
         </a:solidFill>
+        <a:effectLst/>
       </p:bgPr>
     </p:bg>
     <p:spTree>
@@ -10137,11 +9868,11 @@
           <a:bodyPr wrap="square" lIns="0" tIns="0" rIns="0" bIns="0" rtlCol="0" anchor="ctr"/>
           <a:lstStyle/>
           <a:p>
-            <a:pPr algn="l" indent="0" marL="0">
-              <a:buNone/>
-            </a:pPr>
-            <a:r>
-              <a:rPr lang="en-US" sz="1200" b="1" spc="200" kern="0" dirty="0">
+            <a:pPr marL="0" indent="0" algn="l">
+              <a:buNone/>
+            </a:pPr>
+            <a:r>
+              <a:rPr lang="en-US" sz="1200" b="1" kern="0" spc="200" dirty="0">
                 <a:solidFill>
                   <a:srgbClr val="6C4BC1"/>
                 </a:solidFill>
@@ -10176,7 +9907,7 @@
           <a:bodyPr wrap="square" lIns="0" tIns="0" rIns="0" bIns="0" rtlCol="0" anchor="ctr"/>
           <a:lstStyle/>
           <a:p>
-            <a:pPr indent="0" marL="0">
+            <a:pPr marL="0" indent="0">
               <a:buNone/>
             </a:pPr>
             <a:r>
@@ -10216,263 +9947,7 @@
       </p:sp>
       <p:pic>
         <p:nvPicPr>
-          <p:cNvPr id="5" name="Image 0" descr="preencoded.png">    </p:cNvPr>
-          <p:cNvPicPr>
-            <a:picLocks noChangeAspect="1"/>
-          </p:cNvPicPr>
-          <p:nvPr/>
-        </p:nvPicPr>
-        <p:blipFill>
-          <a:blip r:embed="rId1"/>
-          <a:stretch>
-            <a:fillRect/>
-          </a:stretch>
-        </p:blipFill>
-        <p:spPr>
-          <a:xfrm>
-            <a:off x="786384" y="2249424"/>
-            <a:ext cx="329184" cy="329184"/>
-          </a:xfrm>
-          <a:prstGeom prst="rect">
-            <a:avLst/>
-          </a:prstGeom>
-        </p:spPr>
-      </p:pic>
-      <p:sp>
-        <p:nvSpPr>
-          <p:cNvPr id="6" name="Text 3"/>
-          <p:cNvSpPr/>
-          <p:nvPr/>
-        </p:nvSpPr>
-        <p:spPr>
-          <a:xfrm>
-            <a:off x="1536192" y="2057400"/>
-            <a:ext cx="9692640" cy="457200"/>
-          </a:xfrm>
-          <a:prstGeom prst="rect">
-            <a:avLst/>
-          </a:prstGeom>
-          <a:noFill/>
-          <a:ln/>
-        </p:spPr>
-        <p:txBody>
-          <a:bodyPr wrap="square" lIns="0" tIns="0" rIns="0" bIns="0" rtlCol="0" anchor="ctr"/>
-          <a:lstStyle/>
-          <a:p>
-            <a:pPr indent="0" marL="0">
-              <a:lnSpc>
-                <a:spcPts val="2000"/>
-              </a:lnSpc>
-              <a:buNone/>
-            </a:pPr>
-            <a:r>
-              <a:rPr lang="en-US" sz="1700" b="1" dirty="0">
-                <a:solidFill>
-                  <a:srgbClr val="1B1B2F"/>
-                </a:solidFill>
-                <a:latin typeface="Calibri" pitchFamily="34" charset="0"/>
-                <a:ea typeface="Calibri" pitchFamily="34" charset="-122"/>
-                <a:cs typeface="Calibri" pitchFamily="34" charset="-120"/>
-              </a:rPr>
-              <a:t>Como tudo vira estrutura de dados</a:t>
-            </a:r>
-            <a:endParaRPr lang="en-US" sz="1700" dirty="0"/>
-          </a:p>
-        </p:txBody>
-      </p:sp>
-      <p:sp>
-        <p:nvSpPr>
-          <p:cNvPr id="7" name="Text 4"/>
-          <p:cNvSpPr/>
-          <p:nvPr/>
-        </p:nvSpPr>
-        <p:spPr>
-          <a:xfrm>
-            <a:off x="1536192" y="2542032"/>
-            <a:ext cx="9692640" cy="502920"/>
-          </a:xfrm>
-          <a:prstGeom prst="rect">
-            <a:avLst/>
-          </a:prstGeom>
-          <a:noFill/>
-          <a:ln/>
-        </p:spPr>
-        <p:txBody>
-          <a:bodyPr wrap="square" lIns="0" tIns="0" rIns="0" bIns="0" rtlCol="0" anchor="ctr"/>
-          <a:lstStyle/>
-          <a:p>
-            <a:pPr indent="0" marL="0">
-              <a:lnSpc>
-                <a:spcPts val="1700"/>
-              </a:lnSpc>
-              <a:buNone/>
-            </a:pPr>
-            <a:r>
-              <a:rPr lang="en-US" sz="1300" dirty="0">
-                <a:solidFill>
-                  <a:srgbClr val="6B6B80"/>
-                </a:solidFill>
-                <a:latin typeface="Calibri" pitchFamily="34" charset="0"/>
-                <a:ea typeface="Calibri" pitchFamily="34" charset="-122"/>
-                <a:cs typeface="Calibri" pitchFamily="34" charset="-120"/>
-              </a:rPr>
-              <a:t>Lógica, álgebra booleana, grafos e árvores, todos formalizados de novo em código.</a:t>
-            </a:r>
-            <a:endParaRPr lang="en-US" sz="1300" dirty="0"/>
-          </a:p>
-        </p:txBody>
-      </p:sp>
-      <p:sp>
-        <p:nvSpPr>
-          <p:cNvPr id="8" name="Shape 5"/>
-          <p:cNvSpPr/>
-          <p:nvPr/>
-        </p:nvSpPr>
-        <p:spPr>
-          <a:xfrm>
-            <a:off x="640080" y="3611880"/>
-            <a:ext cx="621792" cy="621792"/>
-          </a:xfrm>
-          <a:prstGeom prst="ellipse">
-            <a:avLst/>
-          </a:prstGeom>
-          <a:solidFill>
-            <a:srgbClr val="6C4BC1"/>
-          </a:solidFill>
-          <a:ln/>
-        </p:spPr>
-      </p:sp>
-      <p:pic>
-        <p:nvPicPr>
-          <p:cNvPr id="9" name="Image 1" descr="preencoded.png">    </p:cNvPr>
-          <p:cNvPicPr>
-            <a:picLocks noChangeAspect="1"/>
-          </p:cNvPicPr>
-          <p:nvPr/>
-        </p:nvPicPr>
-        <p:blipFill>
-          <a:blip r:embed="rId2"/>
-          <a:stretch>
-            <a:fillRect/>
-          </a:stretch>
-        </p:blipFill>
-        <p:spPr>
-          <a:xfrm>
-            <a:off x="786384" y="3758184"/>
-            <a:ext cx="329184" cy="329184"/>
-          </a:xfrm>
-          <a:prstGeom prst="rect">
-            <a:avLst/>
-          </a:prstGeom>
-        </p:spPr>
-      </p:pic>
-      <p:sp>
-        <p:nvSpPr>
-          <p:cNvPr id="10" name="Text 6"/>
-          <p:cNvSpPr/>
-          <p:nvPr/>
-        </p:nvSpPr>
-        <p:spPr>
-          <a:xfrm>
-            <a:off x="1536192" y="3566160"/>
-            <a:ext cx="9692640" cy="457200"/>
-          </a:xfrm>
-          <a:prstGeom prst="rect">
-            <a:avLst/>
-          </a:prstGeom>
-          <a:noFill/>
-          <a:ln/>
-        </p:spPr>
-        <p:txBody>
-          <a:bodyPr wrap="square" lIns="0" tIns="0" rIns="0" bIns="0" rtlCol="0" anchor="ctr"/>
-          <a:lstStyle/>
-          <a:p>
-            <a:pPr indent="0" marL="0">
-              <a:lnSpc>
-                <a:spcPts val="2000"/>
-              </a:lnSpc>
-              <a:buNone/>
-            </a:pPr>
-            <a:r>
-              <a:rPr lang="en-US" sz="1700" b="1" dirty="0">
-                <a:solidFill>
-                  <a:srgbClr val="1B1B2F"/>
-                </a:solidFill>
-                <a:latin typeface="Calibri" pitchFamily="34" charset="0"/>
-                <a:ea typeface="Calibri" pitchFamily="34" charset="-122"/>
-                <a:cs typeface="Calibri" pitchFamily="34" charset="-120"/>
-              </a:rPr>
-              <a:t>Uma primeira ideia de complexidade</a:t>
-            </a:r>
-            <a:endParaRPr lang="en-US" sz="1700" dirty="0"/>
-          </a:p>
-        </p:txBody>
-      </p:sp>
-      <p:sp>
-        <p:nvSpPr>
-          <p:cNvPr id="11" name="Text 7"/>
-          <p:cNvSpPr/>
-          <p:nvPr/>
-        </p:nvSpPr>
-        <p:spPr>
-          <a:xfrm>
-            <a:off x="1536192" y="4050792"/>
-            <a:ext cx="9692640" cy="502920"/>
-          </a:xfrm>
-          <a:prstGeom prst="rect">
-            <a:avLst/>
-          </a:prstGeom>
-          <a:noFill/>
-          <a:ln/>
-        </p:spPr>
-        <p:txBody>
-          <a:bodyPr wrap="square" lIns="0" tIns="0" rIns="0" bIns="0" rtlCol="0" anchor="ctr"/>
-          <a:lstStyle/>
-          <a:p>
-            <a:pPr indent="0" marL="0">
-              <a:lnSpc>
-                <a:spcPts val="1700"/>
-              </a:lnSpc>
-              <a:buNone/>
-            </a:pPr>
-            <a:r>
-              <a:rPr lang="en-US" sz="1300" dirty="0">
-                <a:solidFill>
-                  <a:srgbClr val="6B6B80"/>
-                </a:solidFill>
-                <a:latin typeface="Calibri" pitchFamily="34" charset="0"/>
-                <a:ea typeface="Calibri" pitchFamily="34" charset="-122"/>
-                <a:cs typeface="Calibri" pitchFamily="34" charset="-120"/>
-              </a:rPr>
-              <a:t>A notação O — como comparar dois algoritmos que resolvem o mesmo problema.</a:t>
-            </a:r>
-            <a:endParaRPr lang="en-US" sz="1300" dirty="0"/>
-          </a:p>
-        </p:txBody>
-      </p:sp>
-      <p:sp>
-        <p:nvSpPr>
-          <p:cNvPr id="12" name="Shape 8"/>
-          <p:cNvSpPr/>
-          <p:nvPr/>
-        </p:nvSpPr>
-        <p:spPr>
-          <a:xfrm>
-            <a:off x="640080" y="5120640"/>
-            <a:ext cx="621792" cy="621792"/>
-          </a:xfrm>
-          <a:prstGeom prst="ellipse">
-            <a:avLst/>
-          </a:prstGeom>
-          <a:solidFill>
-            <a:srgbClr val="6C4BC1"/>
-          </a:solidFill>
-          <a:ln/>
-        </p:spPr>
-      </p:sp>
-      <p:pic>
-        <p:nvPicPr>
-          <p:cNvPr id="13" name="Image 2" descr="preencoded.png">    </p:cNvPr>
+          <p:cNvPr id="5" name="Image 0" descr="preencoded.png"/>
           <p:cNvPicPr>
             <a:picLocks noChangeAspect="1"/>
           </p:cNvPicPr>
@@ -10486,7 +9961,7 @@
         </p:blipFill>
         <p:spPr>
           <a:xfrm>
-            <a:off x="786384" y="5266944"/>
+            <a:off x="786384" y="2249424"/>
             <a:ext cx="329184" cy="329184"/>
           </a:xfrm>
           <a:prstGeom prst="rect">
@@ -10496,13 +9971,13 @@
       </p:pic>
       <p:sp>
         <p:nvSpPr>
-          <p:cNvPr id="14" name="Text 9"/>
-          <p:cNvSpPr/>
-          <p:nvPr/>
-        </p:nvSpPr>
-        <p:spPr>
-          <a:xfrm>
-            <a:off x="1536192" y="5074920"/>
+          <p:cNvPr id="6" name="Text 3"/>
+          <p:cNvSpPr/>
+          <p:nvPr/>
+        </p:nvSpPr>
+        <p:spPr>
+          <a:xfrm>
+            <a:off x="1536192" y="2057400"/>
             <a:ext cx="9692640" cy="457200"/>
           </a:xfrm>
           <a:prstGeom prst="rect">
@@ -10515,7 +9990,7 @@
           <a:bodyPr wrap="square" lIns="0" tIns="0" rIns="0" bIns="0" rtlCol="0" anchor="ctr"/>
           <a:lstStyle/>
           <a:p>
-            <a:pPr indent="0" marL="0">
+            <a:pPr marL="0" indent="0">
               <a:lnSpc>
                 <a:spcPts val="2000"/>
               </a:lnSpc>
@@ -10530,7 +10005,7 @@
                 <a:ea typeface="Calibri" pitchFamily="34" charset="-122"/>
                 <a:cs typeface="Calibri" pitchFamily="34" charset="-120"/>
               </a:rPr>
-              <a:t>Fechamento da disciplina</a:t>
+              <a:t>Como tudo vira estrutura de dados</a:t>
             </a:r>
             <a:endParaRPr lang="en-US" sz="1700" dirty="0"/>
           </a:p>
@@ -10538,13 +10013,13 @@
       </p:sp>
       <p:sp>
         <p:nvSpPr>
-          <p:cNvPr id="15" name="Text 10"/>
-          <p:cNvSpPr/>
-          <p:nvPr/>
-        </p:nvSpPr>
-        <p:spPr>
-          <a:xfrm>
-            <a:off x="1536192" y="5559552"/>
+          <p:cNvPr id="7" name="Text 4"/>
+          <p:cNvSpPr/>
+          <p:nvPr/>
+        </p:nvSpPr>
+        <p:spPr>
+          <a:xfrm>
+            <a:off x="1536192" y="2542032"/>
             <a:ext cx="9692640" cy="502920"/>
           </a:xfrm>
           <a:prstGeom prst="rect">
@@ -10557,7 +10032,7 @@
           <a:bodyPr wrap="square" lIns="0" tIns="0" rIns="0" bIns="0" rtlCol="0" anchor="ctr"/>
           <a:lstStyle/>
           <a:p>
-            <a:pPr indent="0" marL="0">
+            <a:pPr marL="0" indent="0">
               <a:lnSpc>
                 <a:spcPts val="1700"/>
               </a:lnSpc>
@@ -10572,6 +10047,262 @@
                 <a:ea typeface="Calibri" pitchFamily="34" charset="-122"/>
                 <a:cs typeface="Calibri" pitchFamily="34" charset="-120"/>
               </a:rPr>
+              <a:t>Lógica, álgebra booleana, grafos e árvores, todos formalizados de novo em código.</a:t>
+            </a:r>
+            <a:endParaRPr lang="en-US" sz="1300" dirty="0"/>
+          </a:p>
+        </p:txBody>
+      </p:sp>
+      <p:sp>
+        <p:nvSpPr>
+          <p:cNvPr id="8" name="Shape 5"/>
+          <p:cNvSpPr/>
+          <p:nvPr/>
+        </p:nvSpPr>
+        <p:spPr>
+          <a:xfrm>
+            <a:off x="640080" y="3611880"/>
+            <a:ext cx="621792" cy="621792"/>
+          </a:xfrm>
+          <a:prstGeom prst="ellipse">
+            <a:avLst/>
+          </a:prstGeom>
+          <a:solidFill>
+            <a:srgbClr val="6C4BC1"/>
+          </a:solidFill>
+          <a:ln/>
+        </p:spPr>
+      </p:sp>
+      <p:pic>
+        <p:nvPicPr>
+          <p:cNvPr id="9" name="Image 1" descr="preencoded.png"/>
+          <p:cNvPicPr>
+            <a:picLocks noChangeAspect="1"/>
+          </p:cNvPicPr>
+          <p:nvPr/>
+        </p:nvPicPr>
+        <p:blipFill>
+          <a:blip r:embed="rId4"/>
+          <a:stretch>
+            <a:fillRect/>
+          </a:stretch>
+        </p:blipFill>
+        <p:spPr>
+          <a:xfrm>
+            <a:off x="786384" y="3758184"/>
+            <a:ext cx="329184" cy="329184"/>
+          </a:xfrm>
+          <a:prstGeom prst="rect">
+            <a:avLst/>
+          </a:prstGeom>
+        </p:spPr>
+      </p:pic>
+      <p:sp>
+        <p:nvSpPr>
+          <p:cNvPr id="10" name="Text 6"/>
+          <p:cNvSpPr/>
+          <p:nvPr/>
+        </p:nvSpPr>
+        <p:spPr>
+          <a:xfrm>
+            <a:off x="1536192" y="3566160"/>
+            <a:ext cx="9692640" cy="457200"/>
+          </a:xfrm>
+          <a:prstGeom prst="rect">
+            <a:avLst/>
+          </a:prstGeom>
+          <a:noFill/>
+          <a:ln/>
+        </p:spPr>
+        <p:txBody>
+          <a:bodyPr wrap="square" lIns="0" tIns="0" rIns="0" bIns="0" rtlCol="0" anchor="ctr"/>
+          <a:lstStyle/>
+          <a:p>
+            <a:pPr marL="0" indent="0">
+              <a:lnSpc>
+                <a:spcPts val="2000"/>
+              </a:lnSpc>
+              <a:buNone/>
+            </a:pPr>
+            <a:r>
+              <a:rPr lang="en-US" sz="1700" b="1" dirty="0">
+                <a:solidFill>
+                  <a:srgbClr val="1B1B2F"/>
+                </a:solidFill>
+                <a:latin typeface="Calibri" pitchFamily="34" charset="0"/>
+                <a:ea typeface="Calibri" pitchFamily="34" charset="-122"/>
+                <a:cs typeface="Calibri" pitchFamily="34" charset="-120"/>
+              </a:rPr>
+              <a:t>Uma primeira ideia de complexidade</a:t>
+            </a:r>
+            <a:endParaRPr lang="en-US" sz="1700" dirty="0"/>
+          </a:p>
+        </p:txBody>
+      </p:sp>
+      <p:sp>
+        <p:nvSpPr>
+          <p:cNvPr id="11" name="Text 7"/>
+          <p:cNvSpPr/>
+          <p:nvPr/>
+        </p:nvSpPr>
+        <p:spPr>
+          <a:xfrm>
+            <a:off x="1536192" y="4050792"/>
+            <a:ext cx="9692640" cy="502920"/>
+          </a:xfrm>
+          <a:prstGeom prst="rect">
+            <a:avLst/>
+          </a:prstGeom>
+          <a:noFill/>
+          <a:ln/>
+        </p:spPr>
+        <p:txBody>
+          <a:bodyPr wrap="square" lIns="0" tIns="0" rIns="0" bIns="0" rtlCol="0" anchor="ctr"/>
+          <a:lstStyle/>
+          <a:p>
+            <a:pPr marL="0" indent="0">
+              <a:lnSpc>
+                <a:spcPts val="1700"/>
+              </a:lnSpc>
+              <a:buNone/>
+            </a:pPr>
+            <a:r>
+              <a:rPr lang="en-US" sz="1300" dirty="0">
+                <a:solidFill>
+                  <a:srgbClr val="6B6B80"/>
+                </a:solidFill>
+                <a:latin typeface="Calibri" pitchFamily="34" charset="0"/>
+                <a:ea typeface="Calibri" pitchFamily="34" charset="-122"/>
+                <a:cs typeface="Calibri" pitchFamily="34" charset="-120"/>
+              </a:rPr>
+              <a:t>A notação O — como comparar dois algoritmos que resolvem o mesmo problema.</a:t>
+            </a:r>
+            <a:endParaRPr lang="en-US" sz="1300" dirty="0"/>
+          </a:p>
+        </p:txBody>
+      </p:sp>
+      <p:sp>
+        <p:nvSpPr>
+          <p:cNvPr id="12" name="Shape 8"/>
+          <p:cNvSpPr/>
+          <p:nvPr/>
+        </p:nvSpPr>
+        <p:spPr>
+          <a:xfrm>
+            <a:off x="640080" y="5120640"/>
+            <a:ext cx="621792" cy="621792"/>
+          </a:xfrm>
+          <a:prstGeom prst="ellipse">
+            <a:avLst/>
+          </a:prstGeom>
+          <a:solidFill>
+            <a:srgbClr val="6C4BC1"/>
+          </a:solidFill>
+          <a:ln/>
+        </p:spPr>
+      </p:sp>
+      <p:pic>
+        <p:nvPicPr>
+          <p:cNvPr id="13" name="Image 2" descr="preencoded.png"/>
+          <p:cNvPicPr>
+            <a:picLocks noChangeAspect="1"/>
+          </p:cNvPicPr>
+          <p:nvPr/>
+        </p:nvPicPr>
+        <p:blipFill>
+          <a:blip r:embed="rId5"/>
+          <a:stretch>
+            <a:fillRect/>
+          </a:stretch>
+        </p:blipFill>
+        <p:spPr>
+          <a:xfrm>
+            <a:off x="786384" y="5266944"/>
+            <a:ext cx="329184" cy="329184"/>
+          </a:xfrm>
+          <a:prstGeom prst="rect">
+            <a:avLst/>
+          </a:prstGeom>
+        </p:spPr>
+      </p:pic>
+      <p:sp>
+        <p:nvSpPr>
+          <p:cNvPr id="14" name="Text 9"/>
+          <p:cNvSpPr/>
+          <p:nvPr/>
+        </p:nvSpPr>
+        <p:spPr>
+          <a:xfrm>
+            <a:off x="1536192" y="5074920"/>
+            <a:ext cx="9692640" cy="457200"/>
+          </a:xfrm>
+          <a:prstGeom prst="rect">
+            <a:avLst/>
+          </a:prstGeom>
+          <a:noFill/>
+          <a:ln/>
+        </p:spPr>
+        <p:txBody>
+          <a:bodyPr wrap="square" lIns="0" tIns="0" rIns="0" bIns="0" rtlCol="0" anchor="ctr"/>
+          <a:lstStyle/>
+          <a:p>
+            <a:pPr marL="0" indent="0">
+              <a:lnSpc>
+                <a:spcPts val="2000"/>
+              </a:lnSpc>
+              <a:buNone/>
+            </a:pPr>
+            <a:r>
+              <a:rPr lang="en-US" sz="1700" b="1" dirty="0">
+                <a:solidFill>
+                  <a:srgbClr val="1B1B2F"/>
+                </a:solidFill>
+                <a:latin typeface="Calibri" pitchFamily="34" charset="0"/>
+                <a:ea typeface="Calibri" pitchFamily="34" charset="-122"/>
+                <a:cs typeface="Calibri" pitchFamily="34" charset="-120"/>
+              </a:rPr>
+              <a:t>Fechamento da disciplina</a:t>
+            </a:r>
+            <a:endParaRPr lang="en-US" sz="1700" dirty="0"/>
+          </a:p>
+        </p:txBody>
+      </p:sp>
+      <p:sp>
+        <p:nvSpPr>
+          <p:cNvPr id="15" name="Text 10"/>
+          <p:cNvSpPr/>
+          <p:nvPr/>
+        </p:nvSpPr>
+        <p:spPr>
+          <a:xfrm>
+            <a:off x="1536192" y="5559552"/>
+            <a:ext cx="9692640" cy="502920"/>
+          </a:xfrm>
+          <a:prstGeom prst="rect">
+            <a:avLst/>
+          </a:prstGeom>
+          <a:noFill/>
+          <a:ln/>
+        </p:spPr>
+        <p:txBody>
+          <a:bodyPr wrap="square" lIns="0" tIns="0" rIns="0" bIns="0" rtlCol="0" anchor="ctr"/>
+          <a:lstStyle/>
+          <a:p>
+            <a:pPr marL="0" indent="0">
+              <a:lnSpc>
+                <a:spcPts val="1700"/>
+              </a:lnSpc>
+              <a:buNone/>
+            </a:pPr>
+            <a:r>
+              <a:rPr lang="en-US" sz="1300" dirty="0">
+                <a:solidFill>
+                  <a:srgbClr val="6B6B80"/>
+                </a:solidFill>
+                <a:latin typeface="Calibri" pitchFamily="34" charset="0"/>
+                <a:ea typeface="Calibri" pitchFamily="34" charset="-122"/>
+                <a:cs typeface="Calibri" pitchFamily="34" charset="-120"/>
+              </a:rPr>
               <a:t>O que vem a seguir nas próximas disciplinas do curso.</a:t>
             </a:r>
             <a:endParaRPr lang="en-US" sz="1300" dirty="0"/>
@@ -10599,7 +10330,7 @@
           <a:bodyPr wrap="square" lIns="0" tIns="0" rIns="0" bIns="0" rtlCol="0" anchor="ctr"/>
           <a:lstStyle/>
           <a:p>
-            <a:pPr algn="r" indent="0" marL="0">
+            <a:pPr marL="0" indent="0" algn="r">
               <a:buNone/>
             </a:pPr>
             <a:r>
@@ -10633,6 +10364,7 @@
         <a:solidFill>
           <a:srgbClr val="141B41"/>
         </a:solidFill>
+        <a:effectLst/>
       </p:bgPr>
     </p:bg>
     <p:spTree>
@@ -10719,14 +10451,14 @@
       </p:sp>
       <p:pic>
         <p:nvPicPr>
-          <p:cNvPr id="5" name="Image 0" descr="preencoded.png">    </p:cNvPr>
+          <p:cNvPr id="5" name="Image 0" descr="preencoded.png"/>
           <p:cNvPicPr>
             <a:picLocks noChangeAspect="1"/>
           </p:cNvPicPr>
           <p:nvPr/>
         </p:nvPicPr>
         <p:blipFill>
-          <a:blip r:embed="rId1"/>
+          <a:blip r:embed="rId3"/>
           <a:stretch>
             <a:fillRect/>
           </a:stretch>
@@ -10762,11 +10494,11 @@
           <a:bodyPr wrap="square" lIns="0" tIns="0" rIns="0" bIns="0" rtlCol="0" anchor="ctr"/>
           <a:lstStyle/>
           <a:p>
-            <a:pPr indent="0" marL="0">
-              <a:buNone/>
-            </a:pPr>
-            <a:r>
-              <a:rPr lang="en-US" sz="1200" b="1" spc="200" kern="0" dirty="0">
+            <a:pPr marL="0" indent="0">
+              <a:buNone/>
+            </a:pPr>
+            <a:r>
+              <a:rPr lang="en-US" sz="1200" b="1" kern="0" spc="200" dirty="0">
                 <a:solidFill>
                   <a:srgbClr val="2FE6C7"/>
                 </a:solidFill>
@@ -10801,7 +10533,7 @@
           <a:bodyPr wrap="square" lIns="0" tIns="0" rIns="0" bIns="0" rtlCol="0" anchor="ctr"/>
           <a:lstStyle/>
           <a:p>
-            <a:pPr indent="0" marL="0">
+            <a:pPr marL="0" indent="0">
               <a:buNone/>
             </a:pPr>
             <a:r>
@@ -11095,7 +10827,7 @@
           <a:bodyPr wrap="square" lIns="0" tIns="0" rIns="0" bIns="0" rtlCol="0" anchor="ctr"/>
           <a:lstStyle/>
           <a:p>
-            <a:pPr algn="ctr" indent="0" marL="0">
+            <a:pPr marL="0" indent="0" algn="ctr">
               <a:buNone/>
             </a:pPr>
             <a:r>
@@ -11159,7 +10891,7 @@
           <a:bodyPr wrap="square" lIns="0" tIns="0" rIns="0" bIns="0" rtlCol="0" anchor="ctr"/>
           <a:lstStyle/>
           <a:p>
-            <a:pPr algn="ctr" indent="0" marL="0">
+            <a:pPr marL="0" indent="0" algn="ctr">
               <a:buNone/>
             </a:pPr>
             <a:r>
@@ -11223,7 +10955,7 @@
           <a:bodyPr wrap="square" lIns="0" tIns="0" rIns="0" bIns="0" rtlCol="0" anchor="ctr"/>
           <a:lstStyle/>
           <a:p>
-            <a:pPr algn="ctr" indent="0" marL="0">
+            <a:pPr marL="0" indent="0" algn="ctr">
               <a:buNone/>
             </a:pPr>
             <a:r>
@@ -11287,7 +11019,7 @@
           <a:bodyPr wrap="square" lIns="0" tIns="0" rIns="0" bIns="0" rtlCol="0" anchor="ctr"/>
           <a:lstStyle/>
           <a:p>
-            <a:pPr algn="ctr" indent="0" marL="0">
+            <a:pPr marL="0" indent="0" algn="ctr">
               <a:buNone/>
             </a:pPr>
             <a:r>
@@ -11351,7 +11083,7 @@
           <a:bodyPr wrap="square" lIns="0" tIns="0" rIns="0" bIns="0" rtlCol="0" anchor="ctr"/>
           <a:lstStyle/>
           <a:p>
-            <a:pPr algn="ctr" indent="0" marL="0">
+            <a:pPr marL="0" indent="0" algn="ctr">
               <a:buNone/>
             </a:pPr>
             <a:r>
@@ -11415,7 +11147,7 @@
           <a:bodyPr wrap="square" lIns="0" tIns="0" rIns="0" bIns="0" rtlCol="0" anchor="ctr"/>
           <a:lstStyle/>
           <a:p>
-            <a:pPr algn="ctr" indent="0" marL="0">
+            <a:pPr marL="0" indent="0" algn="ctr">
               <a:buNone/>
             </a:pPr>
             <a:r>
@@ -11479,7 +11211,7 @@
           <a:bodyPr wrap="square" lIns="0" tIns="0" rIns="0" bIns="0" rtlCol="0" anchor="ctr"/>
           <a:lstStyle/>
           <a:p>
-            <a:pPr algn="ctr" indent="0" marL="0">
+            <a:pPr marL="0" indent="0" algn="ctr">
               <a:buNone/>
             </a:pPr>
             <a:r>
@@ -11543,7 +11275,7 @@
           <a:bodyPr wrap="square" lIns="0" tIns="0" rIns="0" bIns="0" rtlCol="0" anchor="ctr"/>
           <a:lstStyle/>
           <a:p>
-            <a:pPr algn="ctr" indent="0" marL="0">
+            <a:pPr marL="0" indent="0" algn="ctr">
               <a:buNone/>
             </a:pPr>
             <a:r>
@@ -11607,7 +11339,7 @@
           <a:bodyPr wrap="square" lIns="0" tIns="0" rIns="0" bIns="0" rtlCol="0" anchor="ctr"/>
           <a:lstStyle/>
           <a:p>
-            <a:pPr algn="ctr" indent="0" marL="0">
+            <a:pPr marL="0" indent="0" algn="ctr">
               <a:buNone/>
             </a:pPr>
             <a:r>
@@ -11671,7 +11403,7 @@
           <a:bodyPr wrap="square" lIns="0" tIns="0" rIns="0" bIns="0" rtlCol="0" anchor="ctr"/>
           <a:lstStyle/>
           <a:p>
-            <a:pPr algn="ctr" indent="0" marL="0">
+            <a:pPr marL="0" indent="0" algn="ctr">
               <a:buNone/>
             </a:pPr>
             <a:r>
@@ -11735,7 +11467,7 @@
           <a:bodyPr wrap="square" lIns="0" tIns="0" rIns="0" bIns="0" rtlCol="0" anchor="ctr"/>
           <a:lstStyle/>
           <a:p>
-            <a:pPr algn="ctr" indent="0" marL="0">
+            <a:pPr marL="0" indent="0" algn="ctr">
               <a:buNone/>
             </a:pPr>
             <a:r>
@@ -11774,7 +11506,7 @@
           <a:bodyPr wrap="square" lIns="0" tIns="0" rIns="0" bIns="0" rtlCol="0" anchor="ctr"/>
           <a:lstStyle/>
           <a:p>
-            <a:pPr algn="ctr" indent="0" marL="0">
+            <a:pPr marL="0" indent="0" algn="ctr">
               <a:lnSpc>
                 <a:spcPts val="3400"/>
               </a:lnSpc>
@@ -11816,7 +11548,7 @@
           <a:bodyPr wrap="square" lIns="0" tIns="0" rIns="0" bIns="0" rtlCol="0" anchor="ctr"/>
           <a:lstStyle/>
           <a:p>
-            <a:pPr algn="ctr" indent="0" marL="0">
+            <a:pPr marL="0" indent="0" algn="ctr">
               <a:lnSpc>
                 <a:spcPts val="2000"/>
               </a:lnSpc>
@@ -11858,11 +11590,11 @@
           <a:bodyPr wrap="square" lIns="0" tIns="0" rIns="0" bIns="0" rtlCol="0" anchor="ctr"/>
           <a:lstStyle/>
           <a:p>
-            <a:pPr indent="0" marL="0">
-              <a:buNone/>
-            </a:pPr>
-            <a:r>
-              <a:rPr lang="en-US" sz="1100" spc="100" kern="0" dirty="0">
+            <a:pPr marL="0" indent="0">
+              <a:buNone/>
+            </a:pPr>
+            <a:r>
+              <a:rPr lang="en-US" sz="1100" kern="0" spc="100" dirty="0">
                 <a:solidFill>
                   <a:srgbClr val="6F76B0"/>
                 </a:solidFill>
@@ -11892,6 +11624,7 @@
         <a:solidFill>
           <a:srgbClr val="FFFFFF"/>
         </a:solidFill>
+        <a:effectLst/>
       </p:bgPr>
     </p:bg>
     <p:spTree>
@@ -11929,11 +11662,11 @@
           <a:bodyPr wrap="square" lIns="0" tIns="0" rIns="0" bIns="0" rtlCol="0" anchor="ctr"/>
           <a:lstStyle/>
           <a:p>
-            <a:pPr algn="l" indent="0" marL="0">
-              <a:buNone/>
-            </a:pPr>
-            <a:r>
-              <a:rPr lang="en-US" sz="1200" b="1" spc="200" kern="0" dirty="0">
+            <a:pPr marL="0" indent="0" algn="l">
+              <a:buNone/>
+            </a:pPr>
+            <a:r>
+              <a:rPr lang="en-US" sz="1200" b="1" kern="0" spc="200" dirty="0">
                 <a:solidFill>
                   <a:srgbClr val="6C4BC1"/>
                 </a:solidFill>
@@ -11969,14 +11702,14 @@
       </p:sp>
       <p:pic>
         <p:nvPicPr>
-          <p:cNvPr id="4" name="Image 0" descr="preencoded.png">    </p:cNvPr>
+          <p:cNvPr id="4" name="Image 0" descr="preencoded.png"/>
           <p:cNvPicPr>
             <a:picLocks noChangeAspect="1"/>
           </p:cNvPicPr>
           <p:nvPr/>
         </p:nvPicPr>
         <p:blipFill>
-          <a:blip r:embed="rId1"/>
+          <a:blip r:embed="rId3"/>
           <a:stretch>
             <a:fillRect/>
           </a:stretch>
@@ -12012,7 +11745,7 @@
           <a:bodyPr wrap="square" lIns="0" tIns="0" rIns="0" bIns="0" rtlCol="0" anchor="ctr"/>
           <a:lstStyle/>
           <a:p>
-            <a:pPr indent="0" marL="0">
+            <a:pPr marL="0" indent="0">
               <a:buNone/>
             </a:pPr>
             <a:r>
@@ -12051,7 +11784,7 @@
           <a:bodyPr wrap="square" lIns="0" tIns="0" rIns="0" bIns="0" rtlCol="0" anchor="ctr"/>
           <a:lstStyle/>
           <a:p>
-            <a:pPr indent="0" marL="0">
+            <a:pPr marL="0" indent="0">
               <a:lnSpc>
                 <a:spcPts val="1800"/>
               </a:lnSpc>
@@ -12074,7 +11807,7 @@
       </p:sp>
       <p:graphicFrame>
         <p:nvGraphicFramePr>
-          <p:cNvPr id="4" name="Table 0"/>
+          <p:cNvPr id="7" name="Table 0"/>
           <p:cNvGraphicFramePr>
             <a:graphicFrameLocks noGrp="1"/>
           </p:cNvGraphicFramePr>
@@ -12095,8 +11828,20 @@
             <a:tbl>
               <a:tblPr/>
               <a:tblGrid>
-                <a:gridCol w="3108960"/>
-                <a:gridCol w="7772400"/>
+                <a:gridCol w="3108960">
+                  <a:extLst>
+                    <a:ext uri="{9D8B030D-6E8A-4147-A177-3AD203B41FA5}">
+                      <a16:colId xmlns:a16="http://schemas.microsoft.com/office/drawing/2014/main" val="20000"/>
+                    </a:ext>
+                  </a:extLst>
+                </a:gridCol>
+                <a:gridCol w="7772400">
+                  <a:extLst>
+                    <a:ext uri="{9D8B030D-6E8A-4147-A177-3AD203B41FA5}">
+                      <a16:colId xmlns:a16="http://schemas.microsoft.com/office/drawing/2014/main" val="20001"/>
+                    </a:ext>
+                  </a:extLst>
+                </a:gridCol>
               </a:tblGrid>
               <a:tr h="411480">
                 <a:tc>
@@ -12104,7 +11849,7 @@
                     <a:bodyPr/>
                     <a:lstStyle/>
                     <a:p>
-                      <a:pPr indent="0" marL="0">
+                      <a:pPr marL="0" indent="0">
                         <a:buNone/>
                       </a:pPr>
                       <a:r>
@@ -12172,7 +11917,7 @@
                     <a:bodyPr/>
                     <a:lstStyle/>
                     <a:p>
-                      <a:pPr indent="0" marL="0">
+                      <a:pPr marL="0" indent="0">
                         <a:buNone/>
                       </a:pPr>
                       <a:r>
@@ -12235,6 +11980,11 @@
                     </a:solidFill>
                   </a:tcPr>
                 </a:tc>
+                <a:extLst>
+                  <a:ext uri="{0D108BD9-81ED-4DB2-BD59-A6C34878D82A}">
+                    <a16:rowId xmlns:a16="http://schemas.microsoft.com/office/drawing/2014/main" val="10000"/>
+                  </a:ext>
+                </a:extLst>
               </a:tr>
               <a:tr h="621792">
                 <a:tc>
@@ -12242,7 +11992,7 @@
                     <a:bodyPr/>
                     <a:lstStyle/>
                     <a:p>
-                      <a:pPr indent="0" marL="0">
+                      <a:pPr marL="0" indent="0">
                         <a:buNone/>
                       </a:pPr>
                       <a:r>
@@ -12310,7 +12060,7 @@
                     <a:bodyPr/>
                     <a:lstStyle/>
                     <a:p>
-                      <a:pPr indent="0" marL="0">
+                      <a:pPr marL="0" indent="0">
                         <a:buNone/>
                       </a:pPr>
                       <a:r>
@@ -12373,6 +12123,11 @@
                     </a:solidFill>
                   </a:tcPr>
                 </a:tc>
+                <a:extLst>
+                  <a:ext uri="{0D108BD9-81ED-4DB2-BD59-A6C34878D82A}">
+                    <a16:rowId xmlns:a16="http://schemas.microsoft.com/office/drawing/2014/main" val="10001"/>
+                  </a:ext>
+                </a:extLst>
               </a:tr>
               <a:tr h="621792">
                 <a:tc>
@@ -12380,7 +12135,7 @@
                     <a:bodyPr/>
                     <a:lstStyle/>
                     <a:p>
-                      <a:pPr indent="0" marL="0">
+                      <a:pPr marL="0" indent="0">
                         <a:buNone/>
                       </a:pPr>
                       <a:r>
@@ -12448,7 +12203,7 @@
                     <a:bodyPr/>
                     <a:lstStyle/>
                     <a:p>
-                      <a:pPr indent="0" marL="0">
+                      <a:pPr marL="0" indent="0">
                         <a:buNone/>
                       </a:pPr>
                       <a:r>
@@ -12511,6 +12266,11 @@
                     </a:solidFill>
                   </a:tcPr>
                 </a:tc>
+                <a:extLst>
+                  <a:ext uri="{0D108BD9-81ED-4DB2-BD59-A6C34878D82A}">
+                    <a16:rowId xmlns:a16="http://schemas.microsoft.com/office/drawing/2014/main" val="10002"/>
+                  </a:ext>
+                </a:extLst>
               </a:tr>
               <a:tr h="621792">
                 <a:tc>
@@ -12518,7 +12278,7 @@
                     <a:bodyPr/>
                     <a:lstStyle/>
                     <a:p>
-                      <a:pPr indent="0" marL="0">
+                      <a:pPr marL="0" indent="0">
                         <a:buNone/>
                       </a:pPr>
                       <a:r>
@@ -12586,7 +12346,7 @@
                     <a:bodyPr/>
                     <a:lstStyle/>
                     <a:p>
-                      <a:pPr indent="0" marL="0">
+                      <a:pPr marL="0" indent="0">
                         <a:buNone/>
                       </a:pPr>
                       <a:r>
@@ -12649,6 +12409,11 @@
                     </a:solidFill>
                   </a:tcPr>
                 </a:tc>
+                <a:extLst>
+                  <a:ext uri="{0D108BD9-81ED-4DB2-BD59-A6C34878D82A}">
+                    <a16:rowId xmlns:a16="http://schemas.microsoft.com/office/drawing/2014/main" val="10003"/>
+                  </a:ext>
+                </a:extLst>
               </a:tr>
               <a:tr h="621792">
                 <a:tc>
@@ -12656,7 +12421,7 @@
                     <a:bodyPr/>
                     <a:lstStyle/>
                     <a:p>
-                      <a:pPr indent="0" marL="0">
+                      <a:pPr marL="0" indent="0">
                         <a:buNone/>
                       </a:pPr>
                       <a:r>
@@ -12724,7 +12489,7 @@
                     <a:bodyPr/>
                     <a:lstStyle/>
                     <a:p>
-                      <a:pPr indent="0" marL="0">
+                      <a:pPr marL="0" indent="0">
                         <a:buNone/>
                       </a:pPr>
                       <a:r>
@@ -12787,6 +12552,11 @@
                     </a:solidFill>
                   </a:tcPr>
                 </a:tc>
+                <a:extLst>
+                  <a:ext uri="{0D108BD9-81ED-4DB2-BD59-A6C34878D82A}">
+                    <a16:rowId xmlns:a16="http://schemas.microsoft.com/office/drawing/2014/main" val="10004"/>
+                  </a:ext>
+                </a:extLst>
               </a:tr>
               <a:tr h="621792">
                 <a:tc>
@@ -12794,7 +12564,7 @@
                     <a:bodyPr/>
                     <a:lstStyle/>
                     <a:p>
-                      <a:pPr indent="0" marL="0">
+                      <a:pPr marL="0" indent="0">
                         <a:buNone/>
                       </a:pPr>
                       <a:r>
@@ -12862,7 +12632,7 @@
                     <a:bodyPr/>
                     <a:lstStyle/>
                     <a:p>
-                      <a:pPr indent="0" marL="0">
+                      <a:pPr marL="0" indent="0">
                         <a:buNone/>
                       </a:pPr>
                       <a:r>
@@ -12925,6 +12695,11 @@
                     </a:solidFill>
                   </a:tcPr>
                 </a:tc>
+                <a:extLst>
+                  <a:ext uri="{0D108BD9-81ED-4DB2-BD59-A6C34878D82A}">
+                    <a16:rowId xmlns:a16="http://schemas.microsoft.com/office/drawing/2014/main" val="10005"/>
+                  </a:ext>
+                </a:extLst>
               </a:tr>
             </a:tbl>
           </a:graphicData>
@@ -12951,7 +12726,7 @@
           <a:bodyPr wrap="square" lIns="0" tIns="0" rIns="0" bIns="0" rtlCol="0" anchor="ctr"/>
           <a:lstStyle/>
           <a:p>
-            <a:pPr algn="r" indent="0" marL="0">
+            <a:pPr marL="0" indent="0" algn="r">
               <a:buNone/>
             </a:pPr>
             <a:r>
@@ -12985,6 +12760,7 @@
         <a:solidFill>
           <a:srgbClr val="FFFFFF"/>
         </a:solidFill>
+        <a:effectLst/>
       </p:bgPr>
     </p:bg>
     <p:spTree>
@@ -13022,11 +12798,11 @@
           <a:bodyPr wrap="square" lIns="0" tIns="0" rIns="0" bIns="0" rtlCol="0" anchor="ctr"/>
           <a:lstStyle/>
           <a:p>
-            <a:pPr algn="l" indent="0" marL="0">
-              <a:buNone/>
-            </a:pPr>
-            <a:r>
-              <a:rPr lang="en-US" sz="1200" b="1" spc="200" kern="0" dirty="0">
+            <a:pPr marL="0" indent="0" algn="l">
+              <a:buNone/>
+            </a:pPr>
+            <a:r>
+              <a:rPr lang="en-US" sz="1200" b="1" kern="0" spc="200" dirty="0">
                 <a:solidFill>
                   <a:srgbClr val="6C4BC1"/>
                 </a:solidFill>
@@ -13062,304 +12838,7 @@
       </p:sp>
       <p:pic>
         <p:nvPicPr>
-          <p:cNvPr id="4" name="Image 0" descr="preencoded.png">    </p:cNvPr>
-          <p:cNvPicPr>
-            <a:picLocks noChangeAspect="1"/>
-          </p:cNvPicPr>
-          <p:nvPr/>
-        </p:nvPicPr>
-        <p:blipFill>
-          <a:blip r:embed="rId1"/>
-          <a:stretch>
-            <a:fillRect/>
-          </a:stretch>
-        </p:blipFill>
-        <p:spPr>
-          <a:xfrm>
-            <a:off x="786384" y="896112"/>
-            <a:ext cx="256032" cy="256032"/>
-          </a:xfrm>
-          <a:prstGeom prst="rect">
-            <a:avLst/>
-          </a:prstGeom>
-        </p:spPr>
-      </p:pic>
-      <p:sp>
-        <p:nvSpPr>
-          <p:cNvPr id="5" name="Text 2"/>
-          <p:cNvSpPr/>
-          <p:nvPr/>
-        </p:nvSpPr>
-        <p:spPr>
-          <a:xfrm>
-            <a:off x="1417320" y="777240"/>
-            <a:ext cx="9601200" cy="548640"/>
-          </a:xfrm>
-          <a:prstGeom prst="rect">
-            <a:avLst/>
-          </a:prstGeom>
-          <a:noFill/>
-          <a:ln/>
-        </p:spPr>
-        <p:txBody>
-          <a:bodyPr wrap="square" lIns="0" tIns="0" rIns="0" bIns="0" rtlCol="0" anchor="ctr"/>
-          <a:lstStyle/>
-          <a:p>
-            <a:pPr indent="0" marL="0">
-              <a:buNone/>
-            </a:pPr>
-            <a:r>
-              <a:rPr lang="en-US" sz="2200" b="1" dirty="0">
-                <a:solidFill>
-                  <a:srgbClr val="1B1B2F"/>
-                </a:solidFill>
-                <a:latin typeface="Cambria" pitchFamily="34" charset="0"/>
-                <a:ea typeface="Cambria" pitchFamily="34" charset="-122"/>
-                <a:cs typeface="Cambria" pitchFamily="34" charset="-120"/>
-              </a:rPr>
-              <a:t>De grafos e árvores a estruturas de dados</a:t>
-            </a:r>
-            <a:endParaRPr lang="en-US" sz="2200" dirty="0"/>
-          </a:p>
-        </p:txBody>
-      </p:sp>
-      <p:sp>
-        <p:nvSpPr>
-          <p:cNvPr id="6" name="Text 3"/>
-          <p:cNvSpPr/>
-          <p:nvPr/>
-        </p:nvSpPr>
-        <p:spPr>
-          <a:xfrm>
-            <a:off x="640080" y="1463040"/>
-            <a:ext cx="10515600" cy="594360"/>
-          </a:xfrm>
-          <a:prstGeom prst="rect">
-            <a:avLst/>
-          </a:prstGeom>
-          <a:noFill/>
-          <a:ln/>
-        </p:spPr>
-        <p:txBody>
-          <a:bodyPr wrap="square" lIns="0" tIns="0" rIns="0" bIns="0" rtlCol="0" anchor="ctr"/>
-          <a:lstStyle/>
-          <a:p>
-            <a:pPr indent="0" marL="0">
-              <a:lnSpc>
-                <a:spcPts val="1800"/>
-              </a:lnSpc>
-              <a:buNone/>
-            </a:pPr>
-            <a:r>
-              <a:rPr lang="en-US" sz="1300" dirty="0">
-                <a:solidFill>
-                  <a:srgbClr val="6B6B80"/>
-                </a:solidFill>
-                <a:latin typeface="Calibri" pitchFamily="34" charset="0"/>
-                <a:ea typeface="Calibri" pitchFamily="34" charset="-122"/>
-                <a:cs typeface="Calibri" pitchFamily="34" charset="-120"/>
-              </a:rPr>
-              <a:t>Uma estrutura de dados é uma forma organizada de guardar informação para que certas operações sejam rápidas. Muitas das mais usadas são grafos ou árvores por baixo dos panos:</a:t>
-            </a:r>
-            <a:endParaRPr lang="en-US" sz="1300" dirty="0"/>
-          </a:p>
-        </p:txBody>
-      </p:sp>
-      <p:sp>
-        <p:nvSpPr>
-          <p:cNvPr id="7" name="Shape 4"/>
-          <p:cNvSpPr/>
-          <p:nvPr/>
-        </p:nvSpPr>
-        <p:spPr>
-          <a:xfrm>
-            <a:off x="640080" y="2331720"/>
-            <a:ext cx="3429000" cy="3246120"/>
-          </a:xfrm>
-          <a:prstGeom prst="roundRect">
-            <a:avLst>
-              <a:gd name="adj" fmla="val 3944"/>
-            </a:avLst>
-          </a:prstGeom>
-          <a:solidFill>
-            <a:srgbClr val="F3F1FB"/>
-          </a:solidFill>
-          <a:ln/>
-        </p:spPr>
-      </p:sp>
-      <p:sp>
-        <p:nvSpPr>
-          <p:cNvPr id="8" name="Shape 5"/>
-          <p:cNvSpPr/>
-          <p:nvPr/>
-        </p:nvSpPr>
-        <p:spPr>
-          <a:xfrm>
-            <a:off x="2007108" y="2624328"/>
-            <a:ext cx="694944" cy="694944"/>
-          </a:xfrm>
-          <a:prstGeom prst="ellipse">
-            <a:avLst/>
-          </a:prstGeom>
-          <a:solidFill>
-            <a:srgbClr val="6C4BC1"/>
-          </a:solidFill>
-          <a:ln/>
-        </p:spPr>
-      </p:sp>
-      <p:pic>
-        <p:nvPicPr>
-          <p:cNvPr id="9" name="Image 1" descr="preencoded.png">    </p:cNvPr>
-          <p:cNvPicPr>
-            <a:picLocks noChangeAspect="1"/>
-          </p:cNvPicPr>
-          <p:nvPr/>
-        </p:nvPicPr>
-        <p:blipFill>
-          <a:blip r:embed="rId2"/>
-          <a:stretch>
-            <a:fillRect/>
-          </a:stretch>
-        </p:blipFill>
-        <p:spPr>
-          <a:xfrm>
-            <a:off x="2153412" y="2770632"/>
-            <a:ext cx="402336" cy="402336"/>
-          </a:xfrm>
-          <a:prstGeom prst="rect">
-            <a:avLst/>
-          </a:prstGeom>
-        </p:spPr>
-      </p:pic>
-      <p:sp>
-        <p:nvSpPr>
-          <p:cNvPr id="10" name="Text 6"/>
-          <p:cNvSpPr/>
-          <p:nvPr/>
-        </p:nvSpPr>
-        <p:spPr>
-          <a:xfrm>
-            <a:off x="822960" y="3538728"/>
-            <a:ext cx="3063240" cy="548640"/>
-          </a:xfrm>
-          <a:prstGeom prst="rect">
-            <a:avLst/>
-          </a:prstGeom>
-          <a:noFill/>
-          <a:ln/>
-        </p:spPr>
-        <p:txBody>
-          <a:bodyPr wrap="square" lIns="0" tIns="0" rIns="0" bIns="0" rtlCol="0" anchor="ctr"/>
-          <a:lstStyle/>
-          <a:p>
-            <a:pPr algn="ctr" indent="0" marL="0">
-              <a:lnSpc>
-                <a:spcPts val="1800"/>
-              </a:lnSpc>
-              <a:buNone/>
-            </a:pPr>
-            <a:r>
-              <a:rPr lang="en-US" sz="1550" b="1" dirty="0">
-                <a:solidFill>
-                  <a:srgbClr val="1B1B2F"/>
-                </a:solidFill>
-                <a:latin typeface="Calibri" pitchFamily="34" charset="0"/>
-                <a:ea typeface="Calibri" pitchFamily="34" charset="-122"/>
-                <a:cs typeface="Calibri" pitchFamily="34" charset="-120"/>
-              </a:rPr>
-              <a:t>Lista / pilha / fila</a:t>
-            </a:r>
-            <a:endParaRPr lang="en-US" sz="1550" dirty="0"/>
-          </a:p>
-        </p:txBody>
-      </p:sp>
-      <p:sp>
-        <p:nvSpPr>
-          <p:cNvPr id="11" name="Text 7"/>
-          <p:cNvSpPr/>
-          <p:nvPr/>
-        </p:nvSpPr>
-        <p:spPr>
-          <a:xfrm>
-            <a:off x="914400" y="4160520"/>
-            <a:ext cx="2880360" cy="1280160"/>
-          </a:xfrm>
-          <a:prstGeom prst="rect">
-            <a:avLst/>
-          </a:prstGeom>
-          <a:noFill/>
-          <a:ln/>
-        </p:spPr>
-        <p:txBody>
-          <a:bodyPr wrap="square" lIns="0" tIns="0" rIns="0" bIns="0" rtlCol="0" anchor="ctr"/>
-          <a:lstStyle/>
-          <a:p>
-            <a:pPr algn="ctr" indent="0" marL="0">
-              <a:lnSpc>
-                <a:spcPts val="1600"/>
-              </a:lnSpc>
-              <a:buNone/>
-            </a:pPr>
-            <a:r>
-              <a:rPr lang="en-US" sz="1200" dirty="0">
-                <a:solidFill>
-                  <a:srgbClr val="1B1B2F"/>
-                </a:solidFill>
-                <a:latin typeface="Calibri" pitchFamily="34" charset="0"/>
-                <a:ea typeface="Calibri" pitchFamily="34" charset="-122"/>
-                <a:cs typeface="Calibri" pitchFamily="34" charset="-120"/>
-              </a:rPr>
-              <a:t>Sequências lineares — o caso mais simples de grafo: cada elemento aponta só para o próximo.</a:t>
-            </a:r>
-            <a:endParaRPr lang="en-US" sz="1200" dirty="0"/>
-          </a:p>
-        </p:txBody>
-      </p:sp>
-      <p:sp>
-        <p:nvSpPr>
-          <p:cNvPr id="12" name="Shape 8"/>
-          <p:cNvSpPr/>
-          <p:nvPr/>
-        </p:nvSpPr>
-        <p:spPr>
-          <a:xfrm>
-            <a:off x="4361688" y="2331720"/>
-            <a:ext cx="3429000" cy="3246120"/>
-          </a:xfrm>
-          <a:prstGeom prst="roundRect">
-            <a:avLst>
-              <a:gd name="adj" fmla="val 3944"/>
-            </a:avLst>
-          </a:prstGeom>
-          <a:solidFill>
-            <a:srgbClr val="F3F1FB"/>
-          </a:solidFill>
-          <a:ln/>
-        </p:spPr>
-      </p:sp>
-      <p:sp>
-        <p:nvSpPr>
-          <p:cNvPr id="13" name="Shape 9"/>
-          <p:cNvSpPr/>
-          <p:nvPr/>
-        </p:nvSpPr>
-        <p:spPr>
-          <a:xfrm>
-            <a:off x="5728716" y="2624328"/>
-            <a:ext cx="694944" cy="694944"/>
-          </a:xfrm>
-          <a:prstGeom prst="ellipse">
-            <a:avLst/>
-          </a:prstGeom>
-          <a:solidFill>
-            <a:srgbClr val="6C4BC1"/>
-          </a:solidFill>
-          <a:ln/>
-        </p:spPr>
-      </p:sp>
-      <p:pic>
-        <p:nvPicPr>
-          <p:cNvPr id="14" name="Image 2" descr="preencoded.png">    </p:cNvPr>
+          <p:cNvPr id="4" name="Image 0" descr="preencoded.png"/>
           <p:cNvPicPr>
             <a:picLocks noChangeAspect="1"/>
           </p:cNvPicPr>
@@ -13373,8 +12852,8 @@
         </p:blipFill>
         <p:spPr>
           <a:xfrm>
-            <a:off x="5875020" y="2770632"/>
-            <a:ext cx="402336" cy="402336"/>
+            <a:off x="786384" y="896112"/>
+            <a:ext cx="256032" cy="256032"/>
           </a:xfrm>
           <a:prstGeom prst="rect">
             <a:avLst/>
@@ -13383,97 +12862,94 @@
       </p:pic>
       <p:sp>
         <p:nvSpPr>
-          <p:cNvPr id="15" name="Text 10"/>
-          <p:cNvSpPr/>
-          <p:nvPr/>
-        </p:nvSpPr>
-        <p:spPr>
-          <a:xfrm>
-            <a:off x="4544568" y="3538728"/>
-            <a:ext cx="3063240" cy="548640"/>
-          </a:xfrm>
-          <a:prstGeom prst="rect">
-            <a:avLst/>
-          </a:prstGeom>
-          <a:noFill/>
-          <a:ln/>
-        </p:spPr>
-        <p:txBody>
-          <a:bodyPr wrap="square" lIns="0" tIns="0" rIns="0" bIns="0" rtlCol="0" anchor="ctr"/>
-          <a:lstStyle/>
-          <a:p>
-            <a:pPr algn="ctr" indent="0" marL="0">
+          <p:cNvPr id="5" name="Text 2"/>
+          <p:cNvSpPr/>
+          <p:nvPr/>
+        </p:nvSpPr>
+        <p:spPr>
+          <a:xfrm>
+            <a:off x="1417320" y="777240"/>
+            <a:ext cx="9601200" cy="548640"/>
+          </a:xfrm>
+          <a:prstGeom prst="rect">
+            <a:avLst/>
+          </a:prstGeom>
+          <a:noFill/>
+          <a:ln/>
+        </p:spPr>
+        <p:txBody>
+          <a:bodyPr wrap="square" lIns="0" tIns="0" rIns="0" bIns="0" rtlCol="0" anchor="ctr"/>
+          <a:lstStyle/>
+          <a:p>
+            <a:pPr marL="0" indent="0">
+              <a:buNone/>
+            </a:pPr>
+            <a:r>
+              <a:rPr lang="en-US" sz="2200" b="1" dirty="0">
+                <a:solidFill>
+                  <a:srgbClr val="1B1B2F"/>
+                </a:solidFill>
+                <a:latin typeface="Cambria" pitchFamily="34" charset="0"/>
+                <a:ea typeface="Cambria" pitchFamily="34" charset="-122"/>
+                <a:cs typeface="Cambria" pitchFamily="34" charset="-120"/>
+              </a:rPr>
+              <a:t>De grafos e árvores a estruturas de dados</a:t>
+            </a:r>
+            <a:endParaRPr lang="en-US" sz="2200" dirty="0"/>
+          </a:p>
+        </p:txBody>
+      </p:sp>
+      <p:sp>
+        <p:nvSpPr>
+          <p:cNvPr id="6" name="Text 3"/>
+          <p:cNvSpPr/>
+          <p:nvPr/>
+        </p:nvSpPr>
+        <p:spPr>
+          <a:xfrm>
+            <a:off x="640080" y="1463040"/>
+            <a:ext cx="10515600" cy="594360"/>
+          </a:xfrm>
+          <a:prstGeom prst="rect">
+            <a:avLst/>
+          </a:prstGeom>
+          <a:noFill/>
+          <a:ln/>
+        </p:spPr>
+        <p:txBody>
+          <a:bodyPr wrap="square" lIns="0" tIns="0" rIns="0" bIns="0" rtlCol="0" anchor="ctr"/>
+          <a:lstStyle/>
+          <a:p>
+            <a:pPr marL="0" indent="0">
               <a:lnSpc>
                 <a:spcPts val="1800"/>
               </a:lnSpc>
               <a:buNone/>
             </a:pPr>
             <a:r>
-              <a:rPr lang="en-US" sz="1550" b="1" dirty="0">
-                <a:solidFill>
-                  <a:srgbClr val="1B1B2F"/>
+              <a:rPr lang="en-US" sz="1300" dirty="0">
+                <a:solidFill>
+                  <a:srgbClr val="6B6B80"/>
                 </a:solidFill>
                 <a:latin typeface="Calibri" pitchFamily="34" charset="0"/>
                 <a:ea typeface="Calibri" pitchFamily="34" charset="-122"/>
                 <a:cs typeface="Calibri" pitchFamily="34" charset="-120"/>
               </a:rPr>
-              <a:t>Árvore binária de busca</a:t>
-            </a:r>
-            <a:endParaRPr lang="en-US" sz="1550" dirty="0"/>
-          </a:p>
-        </p:txBody>
-      </p:sp>
-      <p:sp>
-        <p:nvSpPr>
-          <p:cNvPr id="16" name="Text 11"/>
-          <p:cNvSpPr/>
-          <p:nvPr/>
-        </p:nvSpPr>
-        <p:spPr>
-          <a:xfrm>
-            <a:off x="4636008" y="4160520"/>
-            <a:ext cx="2880360" cy="1280160"/>
-          </a:xfrm>
-          <a:prstGeom prst="rect">
-            <a:avLst/>
-          </a:prstGeom>
-          <a:noFill/>
-          <a:ln/>
-        </p:spPr>
-        <p:txBody>
-          <a:bodyPr wrap="square" lIns="0" tIns="0" rIns="0" bIns="0" rtlCol="0" anchor="ctr"/>
-          <a:lstStyle/>
-          <a:p>
-            <a:pPr algn="ctr" indent="0" marL="0">
-              <a:lnSpc>
-                <a:spcPts val="1600"/>
-              </a:lnSpc>
-              <a:buNone/>
-            </a:pPr>
-            <a:r>
-              <a:rPr lang="en-US" sz="1200" dirty="0">
-                <a:solidFill>
-                  <a:srgbClr val="1B1B2F"/>
-                </a:solidFill>
-                <a:latin typeface="Calibri" pitchFamily="34" charset="0"/>
-                <a:ea typeface="Calibri" pitchFamily="34" charset="-122"/>
-                <a:cs typeface="Calibri" pitchFamily="34" charset="-120"/>
-              </a:rPr>
-              <a:t>Busca, inserção e remoção em O(log n) no caso médio, contra O(n) de uma lista (Aula 14).</a:t>
-            </a:r>
-            <a:endParaRPr lang="en-US" sz="1200" dirty="0"/>
-          </a:p>
-        </p:txBody>
-      </p:sp>
-      <p:sp>
-        <p:nvSpPr>
-          <p:cNvPr id="17" name="Shape 12"/>
-          <p:cNvSpPr/>
-          <p:nvPr/>
-        </p:nvSpPr>
-        <p:spPr>
-          <a:xfrm>
-            <a:off x="8083296" y="2331720"/>
+              <a:t>Uma estrutura de dados é uma forma organizada de guardar informação para que certas operações sejam rápidas. Muitas das mais usadas são grafos ou árvores por baixo dos panos:</a:t>
+            </a:r>
+            <a:endParaRPr lang="en-US" sz="1300" dirty="0"/>
+          </a:p>
+        </p:txBody>
+      </p:sp>
+      <p:sp>
+        <p:nvSpPr>
+          <p:cNvPr id="7" name="Shape 4"/>
+          <p:cNvSpPr/>
+          <p:nvPr/>
+        </p:nvSpPr>
+        <p:spPr>
+          <a:xfrm>
+            <a:off x="640080" y="2331720"/>
             <a:ext cx="3429000" cy="3246120"/>
           </a:xfrm>
           <a:prstGeom prst="roundRect">
@@ -13489,13 +12965,13 @@
       </p:sp>
       <p:sp>
         <p:nvSpPr>
-          <p:cNvPr id="18" name="Shape 13"/>
-          <p:cNvSpPr/>
-          <p:nvPr/>
-        </p:nvSpPr>
-        <p:spPr>
-          <a:xfrm>
-            <a:off x="9450324" y="2624328"/>
+          <p:cNvPr id="8" name="Shape 5"/>
+          <p:cNvSpPr/>
+          <p:nvPr/>
+        </p:nvSpPr>
+        <p:spPr>
+          <a:xfrm>
+            <a:off x="2007108" y="2624328"/>
             <a:ext cx="694944" cy="694944"/>
           </a:xfrm>
           <a:prstGeom prst="ellipse">
@@ -13509,7 +12985,7 @@
       </p:sp>
       <p:pic>
         <p:nvPicPr>
-          <p:cNvPr id="19" name="Image 3" descr="preencoded.png">    </p:cNvPr>
+          <p:cNvPr id="9" name="Image 1" descr="preencoded.png"/>
           <p:cNvPicPr>
             <a:picLocks noChangeAspect="1"/>
           </p:cNvPicPr>
@@ -13523,7 +12999,7 @@
         </p:blipFill>
         <p:spPr>
           <a:xfrm>
-            <a:off x="9596628" y="2770632"/>
+            <a:off x="2153412" y="2770632"/>
             <a:ext cx="402336" cy="402336"/>
           </a:xfrm>
           <a:prstGeom prst="rect">
@@ -13533,13 +13009,13 @@
       </p:pic>
       <p:sp>
         <p:nvSpPr>
-          <p:cNvPr id="20" name="Text 14"/>
-          <p:cNvSpPr/>
-          <p:nvPr/>
-        </p:nvSpPr>
-        <p:spPr>
-          <a:xfrm>
-            <a:off x="8266176" y="3538728"/>
+          <p:cNvPr id="10" name="Text 6"/>
+          <p:cNvSpPr/>
+          <p:nvPr/>
+        </p:nvSpPr>
+        <p:spPr>
+          <a:xfrm>
+            <a:off x="822960" y="3538728"/>
             <a:ext cx="3063240" cy="548640"/>
           </a:xfrm>
           <a:prstGeom prst="rect">
@@ -13552,7 +13028,7 @@
           <a:bodyPr wrap="square" lIns="0" tIns="0" rIns="0" bIns="0" rtlCol="0" anchor="ctr"/>
           <a:lstStyle/>
           <a:p>
-            <a:pPr algn="ctr" indent="0" marL="0">
+            <a:pPr marL="0" indent="0" algn="ctr">
               <a:lnSpc>
                 <a:spcPts val="1800"/>
               </a:lnSpc>
@@ -13567,7 +13043,7 @@
                 <a:ea typeface="Calibri" pitchFamily="34" charset="-122"/>
                 <a:cs typeface="Calibri" pitchFamily="34" charset="-120"/>
               </a:rPr>
-              <a:t>Grafo de adjacência</a:t>
+              <a:t>Lista / pilha / fila</a:t>
             </a:r>
             <a:endParaRPr lang="en-US" sz="1550" dirty="0"/>
           </a:p>
@@ -13575,13 +13051,13 @@
       </p:sp>
       <p:sp>
         <p:nvSpPr>
-          <p:cNvPr id="21" name="Text 15"/>
-          <p:cNvSpPr/>
-          <p:nvPr/>
-        </p:nvSpPr>
-        <p:spPr>
-          <a:xfrm>
-            <a:off x="8357616" y="4160520"/>
+          <p:cNvPr id="11" name="Text 7"/>
+          <p:cNvSpPr/>
+          <p:nvPr/>
+        </p:nvSpPr>
+        <p:spPr>
+          <a:xfrm>
+            <a:off x="914400" y="4160520"/>
             <a:ext cx="2880360" cy="1280160"/>
           </a:xfrm>
           <a:prstGeom prst="rect">
@@ -13594,7 +13070,7 @@
           <a:bodyPr wrap="square" lIns="0" tIns="0" rIns="0" bIns="0" rtlCol="0" anchor="ctr"/>
           <a:lstStyle/>
           <a:p>
-            <a:pPr algn="ctr" indent="0" marL="0">
+            <a:pPr marL="0" indent="0" algn="ctr">
               <a:lnSpc>
                 <a:spcPts val="1600"/>
               </a:lnSpc>
@@ -13609,6 +13085,306 @@
                 <a:ea typeface="Calibri" pitchFamily="34" charset="-122"/>
                 <a:cs typeface="Calibri" pitchFamily="34" charset="-120"/>
               </a:rPr>
+              <a:t>Sequências lineares — o caso mais simples de grafo: cada elemento aponta só para o próximo.</a:t>
+            </a:r>
+            <a:endParaRPr lang="en-US" sz="1200" dirty="0"/>
+          </a:p>
+        </p:txBody>
+      </p:sp>
+      <p:sp>
+        <p:nvSpPr>
+          <p:cNvPr id="12" name="Shape 8"/>
+          <p:cNvSpPr/>
+          <p:nvPr/>
+        </p:nvSpPr>
+        <p:spPr>
+          <a:xfrm>
+            <a:off x="4361688" y="2331720"/>
+            <a:ext cx="3429000" cy="3246120"/>
+          </a:xfrm>
+          <a:prstGeom prst="roundRect">
+            <a:avLst>
+              <a:gd name="adj" fmla="val 3944"/>
+            </a:avLst>
+          </a:prstGeom>
+          <a:solidFill>
+            <a:srgbClr val="F3F1FB"/>
+          </a:solidFill>
+          <a:ln/>
+        </p:spPr>
+      </p:sp>
+      <p:sp>
+        <p:nvSpPr>
+          <p:cNvPr id="13" name="Shape 9"/>
+          <p:cNvSpPr/>
+          <p:nvPr/>
+        </p:nvSpPr>
+        <p:spPr>
+          <a:xfrm>
+            <a:off x="5728716" y="2624328"/>
+            <a:ext cx="694944" cy="694944"/>
+          </a:xfrm>
+          <a:prstGeom prst="ellipse">
+            <a:avLst/>
+          </a:prstGeom>
+          <a:solidFill>
+            <a:srgbClr val="6C4BC1"/>
+          </a:solidFill>
+          <a:ln/>
+        </p:spPr>
+      </p:sp>
+      <p:pic>
+        <p:nvPicPr>
+          <p:cNvPr id="14" name="Image 2" descr="preencoded.png"/>
+          <p:cNvPicPr>
+            <a:picLocks noChangeAspect="1"/>
+          </p:cNvPicPr>
+          <p:nvPr/>
+        </p:nvPicPr>
+        <p:blipFill>
+          <a:blip r:embed="rId3"/>
+          <a:stretch>
+            <a:fillRect/>
+          </a:stretch>
+        </p:blipFill>
+        <p:spPr>
+          <a:xfrm>
+            <a:off x="5875020" y="2770632"/>
+            <a:ext cx="402336" cy="402336"/>
+          </a:xfrm>
+          <a:prstGeom prst="rect">
+            <a:avLst/>
+          </a:prstGeom>
+        </p:spPr>
+      </p:pic>
+      <p:sp>
+        <p:nvSpPr>
+          <p:cNvPr id="15" name="Text 10"/>
+          <p:cNvSpPr/>
+          <p:nvPr/>
+        </p:nvSpPr>
+        <p:spPr>
+          <a:xfrm>
+            <a:off x="4544568" y="3538728"/>
+            <a:ext cx="3063240" cy="548640"/>
+          </a:xfrm>
+          <a:prstGeom prst="rect">
+            <a:avLst/>
+          </a:prstGeom>
+          <a:noFill/>
+          <a:ln/>
+        </p:spPr>
+        <p:txBody>
+          <a:bodyPr wrap="square" lIns="0" tIns="0" rIns="0" bIns="0" rtlCol="0" anchor="ctr"/>
+          <a:lstStyle/>
+          <a:p>
+            <a:pPr marL="0" indent="0" algn="ctr">
+              <a:lnSpc>
+                <a:spcPts val="1800"/>
+              </a:lnSpc>
+              <a:buNone/>
+            </a:pPr>
+            <a:r>
+              <a:rPr lang="en-US" sz="1550" b="1" dirty="0">
+                <a:solidFill>
+                  <a:srgbClr val="1B1B2F"/>
+                </a:solidFill>
+                <a:latin typeface="Calibri" pitchFamily="34" charset="0"/>
+                <a:ea typeface="Calibri" pitchFamily="34" charset="-122"/>
+                <a:cs typeface="Calibri" pitchFamily="34" charset="-120"/>
+              </a:rPr>
+              <a:t>Árvore binária de busca</a:t>
+            </a:r>
+            <a:endParaRPr lang="en-US" sz="1550" dirty="0"/>
+          </a:p>
+        </p:txBody>
+      </p:sp>
+      <p:sp>
+        <p:nvSpPr>
+          <p:cNvPr id="16" name="Text 11"/>
+          <p:cNvSpPr/>
+          <p:nvPr/>
+        </p:nvSpPr>
+        <p:spPr>
+          <a:xfrm>
+            <a:off x="4636008" y="4160520"/>
+            <a:ext cx="2880360" cy="1280160"/>
+          </a:xfrm>
+          <a:prstGeom prst="rect">
+            <a:avLst/>
+          </a:prstGeom>
+          <a:noFill/>
+          <a:ln/>
+        </p:spPr>
+        <p:txBody>
+          <a:bodyPr wrap="square" lIns="0" tIns="0" rIns="0" bIns="0" rtlCol="0" anchor="ctr"/>
+          <a:lstStyle/>
+          <a:p>
+            <a:pPr marL="0" indent="0" algn="ctr">
+              <a:lnSpc>
+                <a:spcPts val="1600"/>
+              </a:lnSpc>
+              <a:buNone/>
+            </a:pPr>
+            <a:r>
+              <a:rPr lang="en-US" sz="1200" dirty="0">
+                <a:solidFill>
+                  <a:srgbClr val="1B1B2F"/>
+                </a:solidFill>
+                <a:latin typeface="Calibri" pitchFamily="34" charset="0"/>
+                <a:ea typeface="Calibri" pitchFamily="34" charset="-122"/>
+                <a:cs typeface="Calibri" pitchFamily="34" charset="-120"/>
+              </a:rPr>
+              <a:t>Busca, inserção e remoção em O(log n) no caso médio, contra O(n) de uma lista (Aula 14).</a:t>
+            </a:r>
+            <a:endParaRPr lang="en-US" sz="1200" dirty="0"/>
+          </a:p>
+        </p:txBody>
+      </p:sp>
+      <p:sp>
+        <p:nvSpPr>
+          <p:cNvPr id="17" name="Shape 12"/>
+          <p:cNvSpPr/>
+          <p:nvPr/>
+        </p:nvSpPr>
+        <p:spPr>
+          <a:xfrm>
+            <a:off x="8083296" y="2331720"/>
+            <a:ext cx="3429000" cy="3246120"/>
+          </a:xfrm>
+          <a:prstGeom prst="roundRect">
+            <a:avLst>
+              <a:gd name="adj" fmla="val 3944"/>
+            </a:avLst>
+          </a:prstGeom>
+          <a:solidFill>
+            <a:srgbClr val="F3F1FB"/>
+          </a:solidFill>
+          <a:ln/>
+        </p:spPr>
+      </p:sp>
+      <p:sp>
+        <p:nvSpPr>
+          <p:cNvPr id="18" name="Shape 13"/>
+          <p:cNvSpPr/>
+          <p:nvPr/>
+        </p:nvSpPr>
+        <p:spPr>
+          <a:xfrm>
+            <a:off x="9450324" y="2624328"/>
+            <a:ext cx="694944" cy="694944"/>
+          </a:xfrm>
+          <a:prstGeom prst="ellipse">
+            <a:avLst/>
+          </a:prstGeom>
+          <a:solidFill>
+            <a:srgbClr val="6C4BC1"/>
+          </a:solidFill>
+          <a:ln/>
+        </p:spPr>
+      </p:sp>
+      <p:pic>
+        <p:nvPicPr>
+          <p:cNvPr id="19" name="Image 3" descr="preencoded.png"/>
+          <p:cNvPicPr>
+            <a:picLocks noChangeAspect="1"/>
+          </p:cNvPicPr>
+          <p:nvPr/>
+        </p:nvPicPr>
+        <p:blipFill>
+          <a:blip r:embed="rId5"/>
+          <a:stretch>
+            <a:fillRect/>
+          </a:stretch>
+        </p:blipFill>
+        <p:spPr>
+          <a:xfrm>
+            <a:off x="9596628" y="2770632"/>
+            <a:ext cx="402336" cy="402336"/>
+          </a:xfrm>
+          <a:prstGeom prst="rect">
+            <a:avLst/>
+          </a:prstGeom>
+        </p:spPr>
+      </p:pic>
+      <p:sp>
+        <p:nvSpPr>
+          <p:cNvPr id="20" name="Text 14"/>
+          <p:cNvSpPr/>
+          <p:nvPr/>
+        </p:nvSpPr>
+        <p:spPr>
+          <a:xfrm>
+            <a:off x="8266176" y="3538728"/>
+            <a:ext cx="3063240" cy="548640"/>
+          </a:xfrm>
+          <a:prstGeom prst="rect">
+            <a:avLst/>
+          </a:prstGeom>
+          <a:noFill/>
+          <a:ln/>
+        </p:spPr>
+        <p:txBody>
+          <a:bodyPr wrap="square" lIns="0" tIns="0" rIns="0" bIns="0" rtlCol="0" anchor="ctr"/>
+          <a:lstStyle/>
+          <a:p>
+            <a:pPr marL="0" indent="0" algn="ctr">
+              <a:lnSpc>
+                <a:spcPts val="1800"/>
+              </a:lnSpc>
+              <a:buNone/>
+            </a:pPr>
+            <a:r>
+              <a:rPr lang="en-US" sz="1550" b="1" dirty="0">
+                <a:solidFill>
+                  <a:srgbClr val="1B1B2F"/>
+                </a:solidFill>
+                <a:latin typeface="Calibri" pitchFamily="34" charset="0"/>
+                <a:ea typeface="Calibri" pitchFamily="34" charset="-122"/>
+                <a:cs typeface="Calibri" pitchFamily="34" charset="-120"/>
+              </a:rPr>
+              <a:t>Grafo de adjacência</a:t>
+            </a:r>
+            <a:endParaRPr lang="en-US" sz="1550" dirty="0"/>
+          </a:p>
+        </p:txBody>
+      </p:sp>
+      <p:sp>
+        <p:nvSpPr>
+          <p:cNvPr id="21" name="Text 15"/>
+          <p:cNvSpPr/>
+          <p:nvPr/>
+        </p:nvSpPr>
+        <p:spPr>
+          <a:xfrm>
+            <a:off x="8357616" y="4160520"/>
+            <a:ext cx="2880360" cy="1280160"/>
+          </a:xfrm>
+          <a:prstGeom prst="rect">
+            <a:avLst/>
+          </a:prstGeom>
+          <a:noFill/>
+          <a:ln/>
+        </p:spPr>
+        <p:txBody>
+          <a:bodyPr wrap="square" lIns="0" tIns="0" rIns="0" bIns="0" rtlCol="0" anchor="ctr"/>
+          <a:lstStyle/>
+          <a:p>
+            <a:pPr marL="0" indent="0" algn="ctr">
+              <a:lnSpc>
+                <a:spcPts val="1600"/>
+              </a:lnSpc>
+              <a:buNone/>
+            </a:pPr>
+            <a:r>
+              <a:rPr lang="en-US" sz="1200" dirty="0">
+                <a:solidFill>
+                  <a:srgbClr val="1B1B2F"/>
+                </a:solidFill>
+                <a:latin typeface="Calibri" pitchFamily="34" charset="0"/>
+                <a:ea typeface="Calibri" pitchFamily="34" charset="-122"/>
+                <a:cs typeface="Calibri" pitchFamily="34" charset="-120"/>
+              </a:rPr>
               <a:t>Representa redes diretamente (Aula 12) — base de algoritmos de rotas, recomendação e redes sociais.</a:t>
             </a:r>
             <a:endParaRPr lang="en-US" sz="1200" dirty="0"/>
@@ -13636,7 +13412,7 @@
           <a:bodyPr wrap="square" lIns="0" tIns="0" rIns="0" bIns="0" rtlCol="0" anchor="ctr"/>
           <a:lstStyle/>
           <a:p>
-            <a:pPr algn="r" indent="0" marL="0">
+            <a:pPr marL="0" indent="0" algn="r">
               <a:buNone/>
             </a:pPr>
             <a:r>
@@ -13670,6 +13446,7 @@
         <a:solidFill>
           <a:srgbClr val="FFFFFF"/>
         </a:solidFill>
+        <a:effectLst/>
       </p:bgPr>
     </p:bg>
     <p:spTree>
@@ -13707,11 +13484,11 @@
           <a:bodyPr wrap="square" lIns="0" tIns="0" rIns="0" bIns="0" rtlCol="0" anchor="ctr"/>
           <a:lstStyle/>
           <a:p>
-            <a:pPr algn="l" indent="0" marL="0">
-              <a:buNone/>
-            </a:pPr>
-            <a:r>
-              <a:rPr lang="en-US" sz="1200" b="1" spc="200" kern="0" dirty="0">
+            <a:pPr marL="0" indent="0" algn="l">
+              <a:buNone/>
+            </a:pPr>
+            <a:r>
+              <a:rPr lang="en-US" sz="1200" b="1" kern="0" spc="200" dirty="0">
                 <a:solidFill>
                   <a:srgbClr val="6C4BC1"/>
                 </a:solidFill>
@@ -13746,7 +13523,7 @@
           <a:bodyPr wrap="square" lIns="0" tIns="0" rIns="0" bIns="0" rtlCol="0" anchor="ctr"/>
           <a:lstStyle/>
           <a:p>
-            <a:pPr indent="0" marL="0">
+            <a:pPr marL="0" indent="0">
               <a:buNone/>
             </a:pPr>
             <a:r>
@@ -13807,7 +13584,7 @@
           <a:bodyPr wrap="square" lIns="0" tIns="0" rIns="0" bIns="0" rtlCol="0" anchor="ctr"/>
           <a:lstStyle/>
           <a:p>
-            <a:pPr algn="ctr" indent="0" marL="0">
+            <a:pPr marL="0" indent="0" algn="ctr">
               <a:lnSpc>
                 <a:spcPts val="1500"/>
               </a:lnSpc>
@@ -13827,7 +13604,7 @@
             <a:endParaRPr lang="en-US" sz="1250" dirty="0"/>
           </a:p>
           <a:p>
-            <a:pPr algn="ctr" indent="0" marL="0">
+            <a:pPr marL="0" indent="0" algn="ctr">
               <a:lnSpc>
                 <a:spcPts val="1500"/>
               </a:lnSpc>
@@ -13891,7 +13668,7 @@
           <a:bodyPr wrap="square" lIns="0" tIns="0" rIns="0" bIns="0" rtlCol="0" anchor="ctr"/>
           <a:lstStyle/>
           <a:p>
-            <a:pPr algn="ctr" indent="0" marL="0">
+            <a:pPr marL="0" indent="0" algn="ctr">
               <a:lnSpc>
                 <a:spcPts val="1500"/>
               </a:lnSpc>
@@ -13911,7 +13688,7 @@
             <a:endParaRPr lang="en-US" sz="1250" dirty="0"/>
           </a:p>
           <a:p>
-            <a:pPr algn="ctr" indent="0" marL="0">
+            <a:pPr marL="0" indent="0" algn="ctr">
               <a:lnSpc>
                 <a:spcPts val="1500"/>
               </a:lnSpc>
@@ -13975,7 +13752,7 @@
           <a:bodyPr wrap="square" lIns="0" tIns="0" rIns="0" bIns="0" rtlCol="0" anchor="ctr"/>
           <a:lstStyle/>
           <a:p>
-            <a:pPr algn="ctr" indent="0" marL="0">
+            <a:pPr marL="0" indent="0" algn="ctr">
               <a:lnSpc>
                 <a:spcPts val="1500"/>
               </a:lnSpc>
@@ -14039,7 +13816,7 @@
           <a:bodyPr wrap="square" lIns="0" tIns="0" rIns="0" bIns="0" rtlCol="0" anchor="ctr"/>
           <a:lstStyle/>
           <a:p>
-            <a:pPr algn="ctr" indent="0" marL="0">
+            <a:pPr marL="0" indent="0" algn="ctr">
               <a:lnSpc>
                 <a:spcPts val="1500"/>
               </a:lnSpc>
@@ -14103,7 +13880,7 @@
           <a:bodyPr wrap="square" lIns="0" tIns="0" rIns="0" bIns="0" rtlCol="0" anchor="ctr"/>
           <a:lstStyle/>
           <a:p>
-            <a:pPr algn="ctr" indent="0" marL="0">
+            <a:pPr marL="0" indent="0" algn="ctr">
               <a:lnSpc>
                 <a:spcPts val="1400"/>
               </a:lnSpc>
@@ -14123,7 +13900,7 @@
             <a:endParaRPr lang="en-US" sz="1200" dirty="0"/>
           </a:p>
           <a:p>
-            <a:pPr algn="ctr" indent="0" marL="0">
+            <a:pPr marL="0" indent="0" algn="ctr">
               <a:lnSpc>
                 <a:spcPts val="1400"/>
               </a:lnSpc>
@@ -14187,7 +13964,7 @@
           <a:bodyPr wrap="square" lIns="0" tIns="0" rIns="0" bIns="0" rtlCol="0" anchor="ctr"/>
           <a:lstStyle/>
           <a:p>
-            <a:pPr algn="ctr" indent="0" marL="0">
+            <a:pPr marL="0" indent="0" algn="ctr">
               <a:lnSpc>
                 <a:spcPts val="1400"/>
               </a:lnSpc>
@@ -14207,7 +13984,7 @@
             <a:endParaRPr lang="en-US" sz="1200" dirty="0"/>
           </a:p>
           <a:p>
-            <a:pPr algn="ctr" indent="0" marL="0">
+            <a:pPr marL="0" indent="0" algn="ctr">
               <a:lnSpc>
                 <a:spcPts val="1400"/>
               </a:lnSpc>
@@ -14271,7 +14048,7 @@
           <a:bodyPr wrap="square" lIns="0" tIns="0" rIns="0" bIns="0" rtlCol="0" anchor="ctr"/>
           <a:lstStyle/>
           <a:p>
-            <a:pPr algn="ctr" indent="0" marL="0">
+            <a:pPr marL="0" indent="0" algn="ctr">
               <a:lnSpc>
                 <a:spcPts val="1400"/>
               </a:lnSpc>
@@ -14291,7 +14068,7 @@
             <a:endParaRPr lang="en-US" sz="1200" dirty="0"/>
           </a:p>
           <a:p>
-            <a:pPr algn="ctr" indent="0" marL="0">
+            <a:pPr marL="0" indent="0" algn="ctr">
               <a:lnSpc>
                 <a:spcPts val="1400"/>
               </a:lnSpc>
@@ -14355,7 +14132,7 @@
           <a:bodyPr wrap="square" lIns="0" tIns="0" rIns="0" bIns="0" rtlCol="0" anchor="ctr"/>
           <a:lstStyle/>
           <a:p>
-            <a:pPr algn="ctr" indent="0" marL="0">
+            <a:pPr marL="0" indent="0" algn="ctr">
               <a:lnSpc>
                 <a:spcPts val="1400"/>
               </a:lnSpc>
@@ -14375,7 +14152,7 @@
             <a:endParaRPr lang="en-US" sz="1200" dirty="0"/>
           </a:p>
           <a:p>
-            <a:pPr algn="ctr" indent="0" marL="0">
+            <a:pPr marL="0" indent="0" algn="ctr">
               <a:lnSpc>
                 <a:spcPts val="1400"/>
               </a:lnSpc>
@@ -14439,7 +14216,7 @@
           <a:bodyPr wrap="square" lIns="0" tIns="0" rIns="0" bIns="0" rtlCol="0" anchor="ctr"/>
           <a:lstStyle/>
           <a:p>
-            <a:pPr algn="ctr" indent="0" marL="0">
+            <a:pPr marL="0" indent="0" algn="ctr">
               <a:buNone/>
             </a:pPr>
             <a:r>
@@ -14670,7 +14447,7 @@
           <a:bodyPr wrap="square" lIns="0" tIns="0" rIns="0" bIns="0" rtlCol="0" anchor="ctr"/>
           <a:lstStyle/>
           <a:p>
-            <a:pPr algn="r" indent="0" marL="0">
+            <a:pPr marL="0" indent="0" algn="r">
               <a:buNone/>
             </a:pPr>
             <a:r>
@@ -14704,6 +14481,7 @@
         <a:solidFill>
           <a:srgbClr val="6C4BC1"/>
         </a:solidFill>
+        <a:effectLst/>
       </p:bgPr>
     </p:bg>
     <p:spTree>
@@ -14790,14 +14568,14 @@
       </p:sp>
       <p:pic>
         <p:nvPicPr>
-          <p:cNvPr id="5" name="Image 0" descr="preencoded.png">    </p:cNvPr>
+          <p:cNvPr id="5" name="Image 0" descr="preencoded.png"/>
           <p:cNvPicPr>
             <a:picLocks noChangeAspect="1"/>
           </p:cNvPicPr>
           <p:nvPr/>
         </p:nvPicPr>
         <p:blipFill>
-          <a:blip r:embed="rId1"/>
+          <a:blip r:embed="rId3"/>
           <a:stretch>
             <a:fillRect/>
           </a:stretch>
@@ -14833,7 +14611,7 @@
           <a:bodyPr wrap="square" lIns="0" tIns="0" rIns="0" bIns="0" rtlCol="0" anchor="ctr"/>
           <a:lstStyle/>
           <a:p>
-            <a:pPr algn="ctr" indent="0" marL="0">
+            <a:pPr marL="0" indent="0" algn="ctr">
               <a:buNone/>
             </a:pPr>
             <a:r>
@@ -14872,7 +14650,7 @@
           <a:bodyPr wrap="square" lIns="0" tIns="0" rIns="0" bIns="0" rtlCol="0" anchor="ctr"/>
           <a:lstStyle/>
           <a:p>
-            <a:pPr algn="ctr" indent="0" marL="0">
+            <a:pPr marL="0" indent="0" algn="ctr">
               <a:lnSpc>
                 <a:spcPts val="2200"/>
               </a:lnSpc>
@@ -14909,6 +14687,7 @@
         <a:solidFill>
           <a:srgbClr val="FFFFFF"/>
         </a:solidFill>
+        <a:effectLst/>
       </p:bgPr>
     </p:bg>
     <p:spTree>
@@ -14946,11 +14725,11 @@
           <a:bodyPr wrap="square" lIns="0" tIns="0" rIns="0" bIns="0" rtlCol="0" anchor="ctr"/>
           <a:lstStyle/>
           <a:p>
-            <a:pPr algn="l" indent="0" marL="0">
-              <a:buNone/>
-            </a:pPr>
-            <a:r>
-              <a:rPr lang="en-US" sz="1200" b="1" spc="200" kern="0" dirty="0">
+            <a:pPr marL="0" indent="0" algn="l">
+              <a:buNone/>
+            </a:pPr>
+            <a:r>
+              <a:rPr lang="en-US" sz="1200" b="1" kern="0" spc="200" dirty="0">
                 <a:solidFill>
                   <a:srgbClr val="6C4BC1"/>
                 </a:solidFill>
@@ -14985,7 +14764,7 @@
           <a:bodyPr wrap="square" lIns="0" tIns="0" rIns="0" bIns="0" rtlCol="0" anchor="ctr"/>
           <a:lstStyle/>
           <a:p>
-            <a:pPr indent="0" marL="0">
+            <a:pPr marL="0" indent="0">
               <a:buNone/>
             </a:pPr>
             <a:r>
@@ -15046,7 +14825,7 @@
           <a:bodyPr wrap="square" lIns="0" tIns="0" rIns="0" bIns="0" rtlCol="0" anchor="ctr"/>
           <a:lstStyle/>
           <a:p>
-            <a:pPr indent="0" marL="0">
+            <a:pPr marL="0" indent="0">
               <a:lnSpc>
                 <a:spcPts val="2000"/>
               </a:lnSpc>
@@ -15110,7 +14889,7 @@
           <a:bodyPr wrap="square" lIns="0" tIns="0" rIns="0" bIns="0" rtlCol="0" anchor="ctr"/>
           <a:lstStyle/>
           <a:p>
-            <a:pPr indent="0" marL="0">
+            <a:pPr marL="0" indent="0">
               <a:lnSpc>
                 <a:spcPts val="1900"/>
               </a:lnSpc>
@@ -15152,7 +14931,7 @@
           <a:bodyPr wrap="square" lIns="0" tIns="0" rIns="0" bIns="0" rtlCol="0" anchor="ctr"/>
           <a:lstStyle/>
           <a:p>
-            <a:pPr algn="ctr" indent="0" marL="0">
+            <a:pPr marL="0" indent="0" algn="ctr">
               <a:lnSpc>
                 <a:spcPts val="1900"/>
               </a:lnSpc>
@@ -15194,7 +14973,7 @@
           <a:bodyPr wrap="square" lIns="0" tIns="0" rIns="0" bIns="0" rtlCol="0" anchor="ctr"/>
           <a:lstStyle/>
           <a:p>
-            <a:pPr algn="r" indent="0" marL="0">
+            <a:pPr marL="0" indent="0" algn="r">
               <a:buNone/>
             </a:pPr>
             <a:r>
@@ -15228,6 +15007,7 @@
         <a:solidFill>
           <a:srgbClr val="FFFFFF"/>
         </a:solidFill>
+        <a:effectLst/>
       </p:bgPr>
     </p:bg>
     <p:spTree>
@@ -15265,11 +15045,11 @@
           <a:bodyPr wrap="square" lIns="0" tIns="0" rIns="0" bIns="0" rtlCol="0" anchor="ctr"/>
           <a:lstStyle/>
           <a:p>
-            <a:pPr algn="l" indent="0" marL="0">
-              <a:buNone/>
-            </a:pPr>
-            <a:r>
-              <a:rPr lang="en-US" sz="1200" b="1" spc="200" kern="0" dirty="0">
+            <a:pPr marL="0" indent="0" algn="l">
+              <a:buNone/>
+            </a:pPr>
+            <a:r>
+              <a:rPr lang="en-US" sz="1200" b="1" kern="0" spc="200" dirty="0">
                 <a:solidFill>
                   <a:srgbClr val="6C4BC1"/>
                 </a:solidFill>
@@ -15304,7 +15084,7 @@
           <a:bodyPr wrap="square" lIns="0" tIns="0" rIns="0" bIns="0" rtlCol="0" anchor="ctr"/>
           <a:lstStyle/>
           <a:p>
-            <a:pPr indent="0" marL="0">
+            <a:pPr marL="0" indent="0">
               <a:buNone/>
             </a:pPr>
             <a:r>
@@ -15343,7 +15123,7 @@
           <a:bodyPr wrap="square" lIns="0" tIns="0" rIns="0" bIns="0" rtlCol="0" anchor="ctr"/>
           <a:lstStyle/>
           <a:p>
-            <a:pPr indent="0" marL="0">
+            <a:pPr marL="0" indent="0">
               <a:buNone/>
             </a:pPr>
             <a:r>
@@ -15464,7 +15244,7 @@
           <a:bodyPr wrap="square" lIns="0" tIns="0" rIns="0" bIns="0" rtlCol="0" anchor="ctr"/>
           <a:lstStyle/>
           <a:p>
-            <a:pPr indent="0" marL="0">
+            <a:pPr marL="0" indent="0">
               <a:buNone/>
             </a:pPr>
             <a:r>
@@ -15484,14 +15264,14 @@
       </p:sp>
       <p:pic>
         <p:nvPicPr>
-          <p:cNvPr id="10" name="Image 0" descr="preencoded.png">    </p:cNvPr>
+          <p:cNvPr id="10" name="Image 0" descr="preencoded.png"/>
           <p:cNvPicPr>
             <a:picLocks noChangeAspect="1"/>
           </p:cNvPicPr>
           <p:nvPr/>
         </p:nvPicPr>
         <p:blipFill>
-          <a:blip r:embed="rId1"/>
+          <a:blip r:embed="rId3"/>
           <a:stretch>
             <a:fillRect/>
           </a:stretch>
@@ -15527,7 +15307,7 @@
           <a:bodyPr wrap="square" lIns="0" tIns="0" rIns="0" bIns="0" rtlCol="0" anchor="ctr"/>
           <a:lstStyle/>
           <a:p>
-            <a:pPr indent="0" marL="0">
+            <a:pPr marL="0" indent="0">
               <a:buNone/>
             </a:pPr>
             <a:r>
@@ -15541,9 +15321,6 @@
               </a:rPr>
               <a:t>static int </a:t>
             </a:r>
-            <a:pPr indent="0" marL="0">
-              <a:buNone/>
-            </a:pPr>
             <a:r>
               <a:rPr lang="en-US" sz="1000" dirty="0">
                 <a:solidFill>
@@ -15555,9 +15332,6 @@
               </a:rPr>
               <a:t>BuscaLista(List&lt;int&gt; lista, </a:t>
             </a:r>
-            <a:pPr indent="0" marL="0">
-              <a:buNone/>
-            </a:pPr>
             <a:r>
               <a:rPr lang="en-US" sz="1000" dirty="0">
                 <a:solidFill>
@@ -15569,9 +15343,6 @@
               </a:rPr>
               <a:t>int </a:t>
             </a:r>
-            <a:pPr indent="0" marL="0">
-              <a:buNone/>
-            </a:pPr>
             <a:r>
               <a:rPr lang="en-US" sz="1000" dirty="0">
                 <a:solidFill>
@@ -15608,7 +15379,7 @@
           <a:bodyPr wrap="square" lIns="0" tIns="0" rIns="0" bIns="0" rtlCol="0" anchor="ctr"/>
           <a:lstStyle/>
           <a:p>
-            <a:pPr indent="0" marL="0">
+            <a:pPr marL="0" indent="0">
               <a:buNone/>
             </a:pPr>
             <a:r>
@@ -15622,9 +15393,6 @@
               </a:rPr>
               <a:t>    int </a:t>
             </a:r>
-            <a:pPr indent="0" marL="0">
-              <a:buNone/>
-            </a:pPr>
             <a:r>
               <a:rPr lang="en-US" sz="1000" dirty="0">
                 <a:solidFill>
@@ -15661,7 +15429,7 @@
           <a:bodyPr wrap="square" lIns="0" tIns="0" rIns="0" bIns="0" rtlCol="0" anchor="ctr"/>
           <a:lstStyle/>
           <a:p>
-            <a:pPr indent="0" marL="0">
+            <a:pPr marL="0" indent="0">
               <a:buNone/>
             </a:pPr>
             <a:r>
@@ -15675,9 +15443,6 @@
               </a:rPr>
               <a:t>    foreach </a:t>
             </a:r>
-            <a:pPr indent="0" marL="0">
-              <a:buNone/>
-            </a:pPr>
             <a:r>
               <a:rPr lang="en-US" sz="1000" dirty="0">
                 <a:solidFill>
@@ -15714,7 +15479,7 @@
           <a:bodyPr wrap="square" lIns="0" tIns="0" rIns="0" bIns="0" rtlCol="0" anchor="ctr"/>
           <a:lstStyle/>
           <a:p>
-            <a:pPr indent="0" marL="0">
+            <a:pPr marL="0" indent="0">
               <a:buNone/>
             </a:pPr>
             <a:r>
@@ -15753,7 +15518,7 @@
           <a:bodyPr wrap="square" lIns="0" tIns="0" rIns="0" bIns="0" rtlCol="0" anchor="ctr"/>
           <a:lstStyle/>
           <a:p>
-            <a:pPr indent="0" marL="0">
+            <a:pPr marL="0" indent="0">
               <a:buNone/>
             </a:pPr>
             <a:r>
@@ -15767,9 +15532,6 @@
               </a:rPr>
               <a:t>        if </a:t>
             </a:r>
-            <a:pPr indent="0" marL="0">
-              <a:buNone/>
-            </a:pPr>
             <a:r>
               <a:rPr lang="en-US" sz="1000" dirty="0">
                 <a:solidFill>
@@ -15781,9 +15543,6 @@
               </a:rPr>
               <a:t>(item == alvo) </a:t>
             </a:r>
-            <a:pPr indent="0" marL="0">
-              <a:buNone/>
-            </a:pPr>
             <a:r>
               <a:rPr lang="en-US" sz="1000" dirty="0">
                 <a:solidFill>
@@ -15795,9 +15554,6 @@
               </a:rPr>
               <a:t>return </a:t>
             </a:r>
-            <a:pPr indent="0" marL="0">
-              <a:buNone/>
-            </a:pPr>
             <a:r>
               <a:rPr lang="en-US" sz="1000" dirty="0">
                 <a:solidFill>
@@ -15834,7 +15590,7 @@
           <a:bodyPr wrap="square" lIns="0" tIns="0" rIns="0" bIns="0" rtlCol="0" anchor="ctr"/>
           <a:lstStyle/>
           <a:p>
-            <a:pPr indent="0" marL="0">
+            <a:pPr marL="0" indent="0">
               <a:buNone/>
             </a:pPr>
             <a:r>
@@ -15873,7 +15629,7 @@
           <a:bodyPr wrap="square" lIns="0" tIns="0" rIns="0" bIns="0" rtlCol="0" anchor="ctr"/>
           <a:lstStyle/>
           <a:p>
-            <a:pPr indent="0" marL="0">
+            <a:pPr marL="0" indent="0">
               <a:buNone/>
             </a:pPr>
             <a:r>
@@ -15887,9 +15643,6 @@
               </a:rPr>
               <a:t>    return </a:t>
             </a:r>
-            <a:pPr indent="0" marL="0">
-              <a:buNone/>
-            </a:pPr>
             <a:r>
               <a:rPr lang="en-US" sz="1000" dirty="0">
                 <a:solidFill>
@@ -15926,7 +15679,7 @@
           <a:bodyPr wrap="square" lIns="0" tIns="0" rIns="0" bIns="0" rtlCol="0" anchor="ctr"/>
           <a:lstStyle/>
           <a:p>
-            <a:pPr indent="0" marL="0">
+            <a:pPr marL="0" indent="0">
               <a:buNone/>
             </a:pPr>
             <a:r>
@@ -15965,7 +15718,7 @@
           <a:bodyPr wrap="square" lIns="0" tIns="0" rIns="0" bIns="0" rtlCol="0" anchor="ctr"/>
           <a:lstStyle/>
           <a:p>
-            <a:pPr indent="0" marL="0">
+            <a:pPr marL="0" indent="0">
               <a:buNone/>
             </a:pPr>
             <a:r>
@@ -15979,9 +15732,6 @@
               </a:rPr>
               <a:t>static int </a:t>
             </a:r>
-            <a:pPr indent="0" marL="0">
-              <a:buNone/>
-            </a:pPr>
             <a:r>
               <a:rPr lang="en-US" sz="1000" dirty="0">
                 <a:solidFill>
@@ -15993,9 +15743,6 @@
               </a:rPr>
               <a:t>BuscaBst(No no, </a:t>
             </a:r>
-            <a:pPr indent="0" marL="0">
-              <a:buNone/>
-            </a:pPr>
             <a:r>
               <a:rPr lang="en-US" sz="1000" dirty="0">
                 <a:solidFill>
@@ -16007,9 +15754,6 @@
               </a:rPr>
               <a:t>int </a:t>
             </a:r>
-            <a:pPr indent="0" marL="0">
-              <a:buNone/>
-            </a:pPr>
             <a:r>
               <a:rPr lang="en-US" sz="1000" dirty="0">
                 <a:solidFill>
@@ -16021,9 +15765,6 @@
               </a:rPr>
               <a:t>alvo, </a:t>
             </a:r>
-            <a:pPr indent="0" marL="0">
-              <a:buNone/>
-            </a:pPr>
             <a:r>
               <a:rPr lang="en-US" sz="1000" dirty="0">
                 <a:solidFill>
@@ -16035,9 +15776,6 @@
               </a:rPr>
               <a:t>int </a:t>
             </a:r>
-            <a:pPr indent="0" marL="0">
-              <a:buNone/>
-            </a:pPr>
             <a:r>
               <a:rPr lang="en-US" sz="1000" dirty="0">
                 <a:solidFill>
@@ -16074,7 +15812,7 @@
           <a:bodyPr wrap="square" lIns="0" tIns="0" rIns="0" bIns="0" rtlCol="0" anchor="ctr"/>
           <a:lstStyle/>
           <a:p>
-            <a:pPr indent="0" marL="0">
+            <a:pPr marL="0" indent="0">
               <a:buNone/>
             </a:pPr>
             <a:r>
@@ -16113,7 +15851,7 @@
           <a:bodyPr wrap="square" lIns="0" tIns="0" rIns="0" bIns="0" rtlCol="0" anchor="ctr"/>
           <a:lstStyle/>
           <a:p>
-            <a:pPr indent="0" marL="0">
+            <a:pPr marL="0" indent="0">
               <a:buNone/>
             </a:pPr>
             <a:r>
@@ -16127,9 +15865,6 @@
               </a:rPr>
               <a:t>    if </a:t>
             </a:r>
-            <a:pPr indent="0" marL="0">
-              <a:buNone/>
-            </a:pPr>
             <a:r>
               <a:rPr lang="en-US" sz="1000" dirty="0">
                 <a:solidFill>
@@ -16141,9 +15876,6 @@
               </a:rPr>
               <a:t>(no == </a:t>
             </a:r>
-            <a:pPr indent="0" marL="0">
-              <a:buNone/>
-            </a:pPr>
             <a:r>
               <a:rPr lang="en-US" sz="1000" dirty="0">
                 <a:solidFill>
@@ -16155,9 +15887,6 @@
               </a:rPr>
               <a:t>null</a:t>
             </a:r>
-            <a:pPr indent="0" marL="0">
-              <a:buNone/>
-            </a:pPr>
             <a:r>
               <a:rPr lang="en-US" sz="1000" dirty="0">
                 <a:solidFill>
@@ -16194,7 +15923,7 @@
           <a:bodyPr wrap="square" lIns="0" tIns="0" rIns="0" bIns="0" rtlCol="0" anchor="ctr"/>
           <a:lstStyle/>
           <a:p>
-            <a:pPr indent="0" marL="0">
+            <a:pPr marL="0" indent="0">
               <a:buNone/>
             </a:pPr>
             <a:r>
@@ -16208,9 +15937,6 @@
               </a:rPr>
               <a:t>        return </a:t>
             </a:r>
-            <a:pPr indent="0" marL="0">
-              <a:buNone/>
-            </a:pPr>
             <a:r>
               <a:rPr lang="en-US" sz="1000" dirty="0">
                 <a:solidFill>
@@ -16247,7 +15973,7 @@
           <a:bodyPr wrap="square" lIns="0" tIns="0" rIns="0" bIns="0" rtlCol="0" anchor="ctr"/>
           <a:lstStyle/>
           <a:p>
-            <a:pPr indent="0" marL="0">
+            <a:pPr marL="0" indent="0">
               <a:buNone/>
             </a:pPr>
             <a:r>
@@ -16261,9 +15987,6 @@
               </a:rPr>
               <a:t>    if </a:t>
             </a:r>
-            <a:pPr indent="0" marL="0">
-              <a:buNone/>
-            </a:pPr>
             <a:r>
               <a:rPr lang="en-US" sz="1000" dirty="0">
                 <a:solidFill>
@@ -16300,7 +16023,7 @@
           <a:bodyPr wrap="square" lIns="0" tIns="0" rIns="0" bIns="0" rtlCol="0" anchor="ctr"/>
           <a:lstStyle/>
           <a:p>
-            <a:pPr indent="0" marL="0">
+            <a:pPr marL="0" indent="0">
               <a:buNone/>
             </a:pPr>
             <a:r>
@@ -16314,9 +16037,6 @@
               </a:rPr>
               <a:t>        return </a:t>
             </a:r>
-            <a:pPr indent="0" marL="0">
-              <a:buNone/>
-            </a:pPr>
             <a:r>
               <a:rPr lang="en-US" sz="1000" dirty="0">
                 <a:solidFill>
@@ -16353,7 +16073,7 @@
           <a:bodyPr wrap="square" lIns="0" tIns="0" rIns="0" bIns="0" rtlCol="0" anchor="ctr"/>
           <a:lstStyle/>
           <a:p>
-            <a:pPr indent="0" marL="0">
+            <a:pPr marL="0" indent="0">
               <a:buNone/>
             </a:pPr>
             <a:r>
@@ -16367,9 +16087,6 @@
               </a:rPr>
               <a:t>    return </a:t>
             </a:r>
-            <a:pPr indent="0" marL="0">
-              <a:buNone/>
-            </a:pPr>
             <a:r>
               <a:rPr lang="en-US" sz="1000" dirty="0">
                 <a:solidFill>
@@ -16406,7 +16123,7 @@
           <a:bodyPr wrap="square" lIns="0" tIns="0" rIns="0" bIns="0" rtlCol="0" anchor="ctr"/>
           <a:lstStyle/>
           <a:p>
-            <a:pPr indent="0" marL="0">
+            <a:pPr marL="0" indent="0">
               <a:buNone/>
             </a:pPr>
             <a:r>
@@ -16527,7 +16244,7 @@
           <a:bodyPr wrap="square" lIns="0" tIns="0" rIns="0" bIns="0" rtlCol="0" anchor="ctr"/>
           <a:lstStyle/>
           <a:p>
-            <a:pPr indent="0" marL="0">
+            <a:pPr marL="0" indent="0">
               <a:buNone/>
             </a:pPr>
             <a:r>
@@ -16547,14 +16264,14 @@
       </p:sp>
       <p:pic>
         <p:nvPicPr>
-          <p:cNvPr id="32" name="Image 1" descr="preencoded.png">    </p:cNvPr>
+          <p:cNvPr id="32" name="Image 1" descr="preencoded.png"/>
           <p:cNvPicPr>
             <a:picLocks noChangeAspect="1"/>
           </p:cNvPicPr>
           <p:nvPr/>
         </p:nvPicPr>
         <p:blipFill>
-          <a:blip r:embed="rId2"/>
+          <a:blip r:embed="rId4"/>
           <a:stretch>
             <a:fillRect/>
           </a:stretch>
@@ -16590,7 +16307,7 @@
           <a:bodyPr wrap="square" lIns="0" tIns="0" rIns="0" bIns="0" rtlCol="0" anchor="ctr"/>
           <a:lstStyle/>
           <a:p>
-            <a:pPr indent="0" marL="0">
+            <a:pPr marL="0" indent="0">
               <a:buNone/>
             </a:pPr>
             <a:r>
@@ -16604,9 +16321,6 @@
               </a:rPr>
               <a:t>def </a:t>
             </a:r>
-            <a:pPr indent="0" marL="0">
-              <a:buNone/>
-            </a:pPr>
             <a:r>
               <a:rPr lang="en-US" sz="1000" dirty="0">
                 <a:solidFill>
@@ -16643,7 +16357,7 @@
           <a:bodyPr wrap="square" lIns="0" tIns="0" rIns="0" bIns="0" rtlCol="0" anchor="ctr"/>
           <a:lstStyle/>
           <a:p>
-            <a:pPr indent="0" marL="0">
+            <a:pPr marL="0" indent="0">
               <a:buNone/>
             </a:pPr>
             <a:r>
@@ -16682,7 +16396,7 @@
           <a:bodyPr wrap="square" lIns="0" tIns="0" rIns="0" bIns="0" rtlCol="0" anchor="ctr"/>
           <a:lstStyle/>
           <a:p>
-            <a:pPr indent="0" marL="0">
+            <a:pPr marL="0" indent="0">
               <a:buNone/>
             </a:pPr>
             <a:r>
@@ -16696,9 +16410,6 @@
               </a:rPr>
               <a:t>    for </a:t>
             </a:r>
-            <a:pPr indent="0" marL="0">
-              <a:buNone/>
-            </a:pPr>
             <a:r>
               <a:rPr lang="en-US" sz="1000" dirty="0">
                 <a:solidFill>
@@ -16710,9 +16421,6 @@
               </a:rPr>
               <a:t>item </a:t>
             </a:r>
-            <a:pPr indent="0" marL="0">
-              <a:buNone/>
-            </a:pPr>
             <a:r>
               <a:rPr lang="en-US" sz="1000" dirty="0">
                 <a:solidFill>
@@ -16724,9 +16432,6 @@
               </a:rPr>
               <a:t>in </a:t>
             </a:r>
-            <a:pPr indent="0" marL="0">
-              <a:buNone/>
-            </a:pPr>
             <a:r>
               <a:rPr lang="en-US" sz="1000" dirty="0">
                 <a:solidFill>
@@ -16763,7 +16468,7 @@
           <a:bodyPr wrap="square" lIns="0" tIns="0" rIns="0" bIns="0" rtlCol="0" anchor="ctr"/>
           <a:lstStyle/>
           <a:p>
-            <a:pPr indent="0" marL="0">
+            <a:pPr marL="0" indent="0">
               <a:buNone/>
             </a:pPr>
             <a:r>
@@ -16802,7 +16507,7 @@
           <a:bodyPr wrap="square" lIns="0" tIns="0" rIns="0" bIns="0" rtlCol="0" anchor="ctr"/>
           <a:lstStyle/>
           <a:p>
-            <a:pPr indent="0" marL="0">
+            <a:pPr marL="0" indent="0">
               <a:buNone/>
             </a:pPr>
             <a:r>
@@ -16816,9 +16521,6 @@
               </a:rPr>
               <a:t>        if </a:t>
             </a:r>
-            <a:pPr indent="0" marL="0">
-              <a:buNone/>
-            </a:pPr>
             <a:r>
               <a:rPr lang="en-US" sz="1000" dirty="0">
                 <a:solidFill>
@@ -16855,7 +16557,7 @@
           <a:bodyPr wrap="square" lIns="0" tIns="0" rIns="0" bIns="0" rtlCol="0" anchor="ctr"/>
           <a:lstStyle/>
           <a:p>
-            <a:pPr indent="0" marL="0">
+            <a:pPr marL="0" indent="0">
               <a:buNone/>
             </a:pPr>
             <a:r>
@@ -16869,9 +16571,6 @@
               </a:rPr>
               <a:t>            return </a:t>
             </a:r>
-            <a:pPr indent="0" marL="0">
-              <a:buNone/>
-            </a:pPr>
             <a:r>
               <a:rPr lang="en-US" sz="1000" dirty="0">
                 <a:solidFill>
@@ -16908,7 +16607,7 @@
           <a:bodyPr wrap="square" lIns="0" tIns="0" rIns="0" bIns="0" rtlCol="0" anchor="ctr"/>
           <a:lstStyle/>
           <a:p>
-            <a:pPr indent="0" marL="0">
+            <a:pPr marL="0" indent="0">
               <a:buNone/>
             </a:pPr>
             <a:r>
@@ -16922,9 +16621,6 @@
               </a:rPr>
               <a:t>    return </a:t>
             </a:r>
-            <a:pPr indent="0" marL="0">
-              <a:buNone/>
-            </a:pPr>
             <a:r>
               <a:rPr lang="en-US" sz="1000" dirty="0">
                 <a:solidFill>
@@ -16961,7 +16657,7 @@
           <a:bodyPr wrap="square" lIns="0" tIns="0" rIns="0" bIns="0" rtlCol="0" anchor="ctr"/>
           <a:lstStyle/>
           <a:p>
-            <a:pPr indent="0" marL="0">
+            <a:pPr marL="0" indent="0">
               <a:buNone/>
             </a:pPr>
             <a:r>
@@ -17000,7 +16696,7 @@
           <a:bodyPr wrap="square" lIns="0" tIns="0" rIns="0" bIns="0" rtlCol="0" anchor="ctr"/>
           <a:lstStyle/>
           <a:p>
-            <a:pPr indent="0" marL="0">
+            <a:pPr marL="0" indent="0">
               <a:buNone/>
             </a:pPr>
             <a:r>
@@ -17014,9 +16710,6 @@
               </a:rPr>
               <a:t>def </a:t>
             </a:r>
-            <a:pPr indent="0" marL="0">
-              <a:buNone/>
-            </a:pPr>
             <a:r>
               <a:rPr lang="en-US" sz="1000" dirty="0">
                 <a:solidFill>
@@ -17053,7 +16746,7 @@
           <a:bodyPr wrap="square" lIns="0" tIns="0" rIns="0" bIns="0" rtlCol="0" anchor="ctr"/>
           <a:lstStyle/>
           <a:p>
-            <a:pPr indent="0" marL="0">
+            <a:pPr marL="0" indent="0">
               <a:buNone/>
             </a:pPr>
             <a:r>
@@ -17092,7 +16785,7 @@
           <a:bodyPr wrap="square" lIns="0" tIns="0" rIns="0" bIns="0" rtlCol="0" anchor="ctr"/>
           <a:lstStyle/>
           <a:p>
-            <a:pPr indent="0" marL="0">
+            <a:pPr marL="0" indent="0">
               <a:buNone/>
             </a:pPr>
             <a:r>
@@ -17106,9 +16799,6 @@
               </a:rPr>
               <a:t>    if </a:t>
             </a:r>
-            <a:pPr indent="0" marL="0">
-              <a:buNone/>
-            </a:pPr>
             <a:r>
               <a:rPr lang="en-US" sz="1000" dirty="0">
                 <a:solidFill>
@@ -17120,9 +16810,6 @@
               </a:rPr>
               <a:t>no </a:t>
             </a:r>
-            <a:pPr indent="0" marL="0">
-              <a:buNone/>
-            </a:pPr>
             <a:r>
               <a:rPr lang="en-US" sz="1000" dirty="0">
                 <a:solidFill>
@@ -17134,9 +16821,6 @@
               </a:rPr>
               <a:t>is None or </a:t>
             </a:r>
-            <a:pPr indent="0" marL="0">
-              <a:buNone/>
-            </a:pPr>
             <a:r>
               <a:rPr lang="en-US" sz="1000" dirty="0">
                 <a:solidFill>
@@ -17173,7 +16857,7 @@
           <a:bodyPr wrap="square" lIns="0" tIns="0" rIns="0" bIns="0" rtlCol="0" anchor="ctr"/>
           <a:lstStyle/>
           <a:p>
-            <a:pPr indent="0" marL="0">
+            <a:pPr marL="0" indent="0">
               <a:buNone/>
             </a:pPr>
             <a:r>
@@ -17187,9 +16871,6 @@
               </a:rPr>
               <a:t>        return </a:t>
             </a:r>
-            <a:pPr indent="0" marL="0">
-              <a:buNone/>
-            </a:pPr>
             <a:r>
               <a:rPr lang="en-US" sz="1000" dirty="0">
                 <a:solidFill>
@@ -17226,7 +16907,7 @@
           <a:bodyPr wrap="square" lIns="0" tIns="0" rIns="0" bIns="0" rtlCol="0" anchor="ctr"/>
           <a:lstStyle/>
           <a:p>
-            <a:pPr indent="0" marL="0">
+            <a:pPr marL="0" indent="0">
               <a:buNone/>
             </a:pPr>
             <a:r>
@@ -17240,9 +16921,6 @@
               </a:rPr>
               <a:t>    if </a:t>
             </a:r>
-            <a:pPr indent="0" marL="0">
-              <a:buNone/>
-            </a:pPr>
             <a:r>
               <a:rPr lang="en-US" sz="1000" dirty="0">
                 <a:solidFill>
@@ -17279,7 +16957,7 @@
           <a:bodyPr wrap="square" lIns="0" tIns="0" rIns="0" bIns="0" rtlCol="0" anchor="ctr"/>
           <a:lstStyle/>
           <a:p>
-            <a:pPr indent="0" marL="0">
+            <a:pPr marL="0" indent="0">
               <a:buNone/>
             </a:pPr>
             <a:r>
@@ -17293,9 +16971,6 @@
               </a:rPr>
               <a:t>        return </a:t>
             </a:r>
-            <a:pPr indent="0" marL="0">
-              <a:buNone/>
-            </a:pPr>
             <a:r>
               <a:rPr lang="en-US" sz="1000" dirty="0">
                 <a:solidFill>
@@ -17332,7 +17007,7 @@
           <a:bodyPr wrap="square" lIns="0" tIns="0" rIns="0" bIns="0" rtlCol="0" anchor="ctr"/>
           <a:lstStyle/>
           <a:p>
-            <a:pPr indent="0" marL="0">
+            <a:pPr marL="0" indent="0">
               <a:buNone/>
             </a:pPr>
             <a:r>
@@ -17346,9 +17021,6 @@
               </a:rPr>
               <a:t>    return </a:t>
             </a:r>
-            <a:pPr indent="0" marL="0">
-              <a:buNone/>
-            </a:pPr>
             <a:r>
               <a:rPr lang="en-US" sz="1000" dirty="0">
                 <a:solidFill>
@@ -17385,7 +17057,7 @@
           <a:bodyPr wrap="square" lIns="0" tIns="0" rIns="0" bIns="0" rtlCol="0" anchor="ctr"/>
           <a:lstStyle/>
           <a:p>
-            <a:pPr algn="r" indent="0" marL="0">
+            <a:pPr marL="0" indent="0" algn="r">
               <a:buNone/>
             </a:pPr>
             <a:r>
@@ -17419,6 +17091,7 @@
         <a:solidFill>
           <a:srgbClr val="141B41"/>
         </a:solidFill>
+        <a:effectLst/>
       </p:bgPr>
     </p:bg>
     <p:spTree>
@@ -17480,11 +17153,11 @@
           <a:bodyPr wrap="square" lIns="0" tIns="0" rIns="0" bIns="0" rtlCol="0" anchor="ctr"/>
           <a:lstStyle/>
           <a:p>
-            <a:pPr algn="l" indent="0" marL="0">
-              <a:buNone/>
-            </a:pPr>
-            <a:r>
-              <a:rPr lang="en-US" sz="1200" b="1" spc="200" kern="0" dirty="0">
+            <a:pPr marL="0" indent="0" algn="l">
+              <a:buNone/>
+            </a:pPr>
+            <a:r>
+              <a:rPr lang="en-US" sz="1200" b="1" kern="0" spc="200" dirty="0">
                 <a:solidFill>
                   <a:srgbClr val="2FE6C7"/>
                 </a:solidFill>
@@ -17520,14 +17193,14 @@
       </p:sp>
       <p:pic>
         <p:nvPicPr>
-          <p:cNvPr id="5" name="Image 0" descr="preencoded.png">    </p:cNvPr>
+          <p:cNvPr id="5" name="Image 0" descr="preencoded.png"/>
           <p:cNvPicPr>
             <a:picLocks noChangeAspect="1"/>
           </p:cNvPicPr>
           <p:nvPr/>
         </p:nvPicPr>
         <p:blipFill>
-          <a:blip r:embed="rId1"/>
+          <a:blip r:embed="rId3"/>
           <a:stretch>
             <a:fillRect/>
           </a:stretch>
@@ -17590,7 +17263,7 @@
           <a:bodyPr wrap="square" lIns="0" tIns="0" rIns="0" bIns="0" rtlCol="0" anchor="ctr"/>
           <a:lstStyle/>
           <a:p>
-            <a:pPr algn="ctr" indent="0" marL="0">
+            <a:pPr marL="0" indent="0" algn="ctr">
               <a:buNone/>
             </a:pPr>
             <a:r>
@@ -17629,7 +17302,7 @@
           <a:bodyPr wrap="square" lIns="0" tIns="0" rIns="0" bIns="0" rtlCol="0" anchor="ctr"/>
           <a:lstStyle/>
           <a:p>
-            <a:pPr algn="ctr" indent="0" marL="0">
+            <a:pPr marL="0" indent="0" algn="ctr">
               <a:lnSpc>
                 <a:spcPts val="2100"/>
               </a:lnSpc>
@@ -17951,4 +17624,319 @@
     </a:ext>
   </a:extLst>
 </a:theme>
+</file>
+
+<file path=ppt/theme/theme2.xml><?xml version="1.0" encoding="utf-8"?>
+<a:theme xmlns:a="http://schemas.openxmlformats.org/drawingml/2006/main" name="Tema do Office">
+  <a:themeElements>
+    <a:clrScheme name="Office">
+      <a:dk1>
+        <a:sysClr val="windowText" lastClr="000000"/>
+      </a:dk1>
+      <a:lt1>
+        <a:sysClr val="window" lastClr="FFFFFF"/>
+      </a:lt1>
+      <a:dk2>
+        <a:srgbClr val="0E2841"/>
+      </a:dk2>
+      <a:lt2>
+        <a:srgbClr val="E8E8E8"/>
+      </a:lt2>
+      <a:accent1>
+        <a:srgbClr val="156082"/>
+      </a:accent1>
+      <a:accent2>
+        <a:srgbClr val="E97132"/>
+      </a:accent2>
+      <a:accent3>
+        <a:srgbClr val="196B24"/>
+      </a:accent3>
+      <a:accent4>
+        <a:srgbClr val="0F9ED5"/>
+      </a:accent4>
+      <a:accent5>
+        <a:srgbClr val="A02B93"/>
+      </a:accent5>
+      <a:accent6>
+        <a:srgbClr val="4EA72E"/>
+      </a:accent6>
+      <a:hlink>
+        <a:srgbClr val="467886"/>
+      </a:hlink>
+      <a:folHlink>
+        <a:srgbClr val="96607D"/>
+      </a:folHlink>
+    </a:clrScheme>
+    <a:fontScheme name="Office">
+      <a:majorFont>
+        <a:latin typeface="Aptos Display" panose="02110004020202020204"/>
+        <a:ea typeface=""/>
+        <a:cs typeface=""/>
+        <a:font script="Jpan" typeface="游ゴシック Light"/>
+        <a:font script="Hang" typeface="맑은 고딕"/>
+        <a:font script="Hans" typeface="等线 Light"/>
+        <a:font script="Hant" typeface="新細明體"/>
+        <a:font script="Arab" typeface="Times New Roman"/>
+        <a:font script="Hebr" typeface="Times New Roman"/>
+        <a:font script="Thai" typeface="Angsana New"/>
+        <a:font script="Ethi" typeface="Nyala"/>
+        <a:font script="Beng" typeface="Vrinda"/>
+        <a:font script="Gujr" typeface="Shruti"/>
+        <a:font script="Khmr" typeface="MoolBoran"/>
+        <a:font script="Knda" typeface="Tunga"/>
+        <a:font script="Guru" typeface="Raavi"/>
+        <a:font script="Cans" typeface="Euphemia"/>
+        <a:font script="Cher" typeface="Plantagenet Cherokee"/>
+        <a:font script="Yiii" typeface="Microsoft Yi Baiti"/>
+        <a:font script="Tibt" typeface="Microsoft Himalaya"/>
+        <a:font script="Thaa" typeface="MV Boli"/>
+        <a:font script="Deva" typeface="Mangal"/>
+        <a:font script="Telu" typeface="Gautami"/>
+        <a:font script="Taml" typeface="Latha"/>
+        <a:font script="Syrc" typeface="Estrangelo Edessa"/>
+        <a:font script="Orya" typeface="Kalinga"/>
+        <a:font script="Mlym" typeface="Kartika"/>
+        <a:font script="Laoo" typeface="DokChampa"/>
+        <a:font script="Sinh" typeface="Iskoola Pota"/>
+        <a:font script="Mong" typeface="Mongolian Baiti"/>
+        <a:font script="Viet" typeface="Times New Roman"/>
+        <a:font script="Uigh" typeface="Microsoft Uighur"/>
+        <a:font script="Geor" typeface="Sylfaen"/>
+        <a:font script="Armn" typeface="Arial"/>
+        <a:font script="Bugi" typeface="Leelawadee UI"/>
+        <a:font script="Bopo" typeface="Microsoft JhengHei"/>
+        <a:font script="Java" typeface="Javanese Text"/>
+        <a:font script="Lisu" typeface="Segoe UI"/>
+        <a:font script="Mymr" typeface="Myanmar Text"/>
+        <a:font script="Nkoo" typeface="Ebrima"/>
+        <a:font script="Olck" typeface="Nirmala UI"/>
+        <a:font script="Osma" typeface="Ebrima"/>
+        <a:font script="Phag" typeface="Phagspa"/>
+        <a:font script="Syrn" typeface="Estrangelo Edessa"/>
+        <a:font script="Syrj" typeface="Estrangelo Edessa"/>
+        <a:font script="Syre" typeface="Estrangelo Edessa"/>
+        <a:font script="Sora" typeface="Nirmala UI"/>
+        <a:font script="Tale" typeface="Microsoft Tai Le"/>
+        <a:font script="Talu" typeface="Microsoft New Tai Lue"/>
+        <a:font script="Tfng" typeface="Ebrima"/>
+      </a:majorFont>
+      <a:minorFont>
+        <a:latin typeface="Aptos" panose="02110004020202020204"/>
+        <a:ea typeface=""/>
+        <a:cs typeface=""/>
+        <a:font script="Jpan" typeface="游ゴシック"/>
+        <a:font script="Hang" typeface="맑은 고딕"/>
+        <a:font script="Hans" typeface="等线"/>
+        <a:font script="Hant" typeface="新細明體"/>
+        <a:font script="Arab" typeface="Arial"/>
+        <a:font script="Hebr" typeface="Arial"/>
+        <a:font script="Thai" typeface="Cordia New"/>
+        <a:font script="Ethi" typeface="Nyala"/>
+        <a:font script="Beng" typeface="Vrinda"/>
+        <a:font script="Gujr" typeface="Shruti"/>
+        <a:font script="Khmr" typeface="DaunPenh"/>
+        <a:font script="Knda" typeface="Tunga"/>
+        <a:font script="Guru" typeface="Raavi"/>
+        <a:font script="Cans" typeface="Euphemia"/>
+        <a:font script="Cher" typeface="Plantagenet Cherokee"/>
+        <a:font script="Yiii" typeface="Microsoft Yi Baiti"/>
+        <a:font script="Tibt" typeface="Microsoft Himalaya"/>
+        <a:font script="Thaa" typeface="MV Boli"/>
+        <a:font script="Deva" typeface="Mangal"/>
+        <a:font script="Telu" typeface="Gautami"/>
+        <a:font script="Taml" typeface="Latha"/>
+        <a:font script="Syrc" typeface="Estrangelo Edessa"/>
+        <a:font script="Orya" typeface="Kalinga"/>
+        <a:font script="Mlym" typeface="Kartika"/>
+        <a:font script="Laoo" typeface="DokChampa"/>
+        <a:font script="Sinh" typeface="Iskoola Pota"/>
+        <a:font script="Mong" typeface="Mongolian Baiti"/>
+        <a:font script="Viet" typeface="Arial"/>
+        <a:font script="Uigh" typeface="Microsoft Uighur"/>
+        <a:font script="Geor" typeface="Sylfaen"/>
+        <a:font script="Armn" typeface="Arial"/>
+        <a:font script="Bugi" typeface="Leelawadee UI"/>
+        <a:font script="Bopo" typeface="Microsoft JhengHei"/>
+        <a:font script="Java" typeface="Javanese Text"/>
+        <a:font script="Lisu" typeface="Segoe UI"/>
+        <a:font script="Mymr" typeface="Myanmar Text"/>
+        <a:font script="Nkoo" typeface="Ebrima"/>
+        <a:font script="Olck" typeface="Nirmala UI"/>
+        <a:font script="Osma" typeface="Ebrima"/>
+        <a:font script="Phag" typeface="Phagspa"/>
+        <a:font script="Syrn" typeface="Estrangelo Edessa"/>
+        <a:font script="Syrj" typeface="Estrangelo Edessa"/>
+        <a:font script="Syre" typeface="Estrangelo Edessa"/>
+        <a:font script="Sora" typeface="Nirmala UI"/>
+        <a:font script="Tale" typeface="Microsoft Tai Le"/>
+        <a:font script="Talu" typeface="Microsoft New Tai Lue"/>
+        <a:font script="Tfng" typeface="Ebrima"/>
+      </a:minorFont>
+    </a:fontScheme>
+    <a:fmtScheme name="Office">
+      <a:fillStyleLst>
+        <a:solidFill>
+          <a:schemeClr val="phClr"/>
+        </a:solidFill>
+        <a:gradFill rotWithShape="1">
+          <a:gsLst>
+            <a:gs pos="0">
+              <a:schemeClr val="phClr">
+                <a:lumMod val="110000"/>
+                <a:satMod val="105000"/>
+                <a:tint val="67000"/>
+              </a:schemeClr>
+            </a:gs>
+            <a:gs pos="50000">
+              <a:schemeClr val="phClr">
+                <a:lumMod val="105000"/>
+                <a:satMod val="103000"/>
+                <a:tint val="73000"/>
+              </a:schemeClr>
+            </a:gs>
+            <a:gs pos="100000">
+              <a:schemeClr val="phClr">
+                <a:lumMod val="105000"/>
+                <a:satMod val="109000"/>
+                <a:tint val="81000"/>
+              </a:schemeClr>
+            </a:gs>
+          </a:gsLst>
+          <a:lin ang="5400000" scaled="0"/>
+        </a:gradFill>
+        <a:gradFill rotWithShape="1">
+          <a:gsLst>
+            <a:gs pos="0">
+              <a:schemeClr val="phClr">
+                <a:satMod val="103000"/>
+                <a:lumMod val="102000"/>
+                <a:tint val="94000"/>
+              </a:schemeClr>
+            </a:gs>
+            <a:gs pos="50000">
+              <a:schemeClr val="phClr">
+                <a:satMod val="110000"/>
+                <a:lumMod val="100000"/>
+                <a:shade val="100000"/>
+              </a:schemeClr>
+            </a:gs>
+            <a:gs pos="100000">
+              <a:schemeClr val="phClr">
+                <a:lumMod val="99000"/>
+                <a:satMod val="120000"/>
+                <a:shade val="78000"/>
+              </a:schemeClr>
+            </a:gs>
+          </a:gsLst>
+          <a:lin ang="5400000" scaled="0"/>
+        </a:gradFill>
+      </a:fillStyleLst>
+      <a:lnStyleLst>
+        <a:ln w="12700" cap="flat" cmpd="sng" algn="ctr">
+          <a:solidFill>
+            <a:schemeClr val="phClr"/>
+          </a:solidFill>
+          <a:prstDash val="solid"/>
+          <a:miter lim="800000"/>
+        </a:ln>
+        <a:ln w="19050" cap="flat" cmpd="sng" algn="ctr">
+          <a:solidFill>
+            <a:schemeClr val="phClr"/>
+          </a:solidFill>
+          <a:prstDash val="solid"/>
+          <a:miter lim="800000"/>
+        </a:ln>
+        <a:ln w="25400" cap="flat" cmpd="sng" algn="ctr">
+          <a:solidFill>
+            <a:schemeClr val="phClr"/>
+          </a:solidFill>
+          <a:prstDash val="solid"/>
+          <a:miter lim="800000"/>
+        </a:ln>
+      </a:lnStyleLst>
+      <a:effectStyleLst>
+        <a:effectStyle>
+          <a:effectLst/>
+        </a:effectStyle>
+        <a:effectStyle>
+          <a:effectLst/>
+        </a:effectStyle>
+        <a:effectStyle>
+          <a:effectLst>
+            <a:outerShdw blurRad="57150" dist="19050" dir="5400000" algn="ctr" rotWithShape="0">
+              <a:srgbClr val="000000">
+                <a:alpha val="63000"/>
+              </a:srgbClr>
+            </a:outerShdw>
+          </a:effectLst>
+        </a:effectStyle>
+      </a:effectStyleLst>
+      <a:bgFillStyleLst>
+        <a:solidFill>
+          <a:schemeClr val="phClr"/>
+        </a:solidFill>
+        <a:solidFill>
+          <a:schemeClr val="phClr">
+            <a:tint val="95000"/>
+            <a:satMod val="170000"/>
+          </a:schemeClr>
+        </a:solidFill>
+        <a:gradFill rotWithShape="1">
+          <a:gsLst>
+            <a:gs pos="0">
+              <a:schemeClr val="phClr">
+                <a:tint val="93000"/>
+                <a:satMod val="150000"/>
+                <a:shade val="98000"/>
+                <a:lumMod val="102000"/>
+              </a:schemeClr>
+            </a:gs>
+            <a:gs pos="50000">
+              <a:schemeClr val="phClr">
+                <a:tint val="98000"/>
+                <a:satMod val="130000"/>
+                <a:shade val="90000"/>
+                <a:lumMod val="103000"/>
+              </a:schemeClr>
+            </a:gs>
+            <a:gs pos="100000">
+              <a:schemeClr val="phClr">
+                <a:shade val="63000"/>
+                <a:satMod val="120000"/>
+              </a:schemeClr>
+            </a:gs>
+          </a:gsLst>
+          <a:lin ang="5400000" scaled="0"/>
+        </a:gradFill>
+      </a:bgFillStyleLst>
+    </a:fmtScheme>
+  </a:themeElements>
+  <a:objectDefaults>
+    <a:lnDef>
+      <a:spPr/>
+      <a:bodyPr/>
+      <a:lstStyle/>
+      <a:style>
+        <a:lnRef idx="2">
+          <a:schemeClr val="accent1"/>
+        </a:lnRef>
+        <a:fillRef idx="0">
+          <a:schemeClr val="accent1"/>
+        </a:fillRef>
+        <a:effectRef idx="1">
+          <a:schemeClr val="accent1"/>
+        </a:effectRef>
+        <a:fontRef idx="minor">
+          <a:schemeClr val="tx1"/>
+        </a:fontRef>
+      </a:style>
+    </a:lnDef>
+  </a:objectDefaults>
+  <a:extraClrSchemeLst/>
+  <a:extLst>
+    <a:ext uri="{05A4C25C-085E-4340-85A3-A5531E510DB2}">
+      <thm15:themeFamily xmlns:thm15="http://schemas.microsoft.com/office/thememl/2012/main" name="Office Theme" id="{2E142A2C-CD16-42D6-873A-C26D2A0506FA}" vid="{1BDDFF52-6CD6-40A5-AB3C-68EB2F1E4D0A}"/>
+    </a:ext>
+  </a:extLst>
+</a:theme>
 </file>